--- a/public/slides/aa203/lecture_8.pptx
+++ b/public/slides/aa203/lecture_8.pptx
@@ -160,387 +160,56 @@
 </p:presentation>
 </file>
 
-<file path=ppt/revisionInfo.xml><?xml version="1.0" encoding="utf-8"?>
-<p1510:revInfo xmlns:a="http://schemas.openxmlformats.org/drawingml/2006/main" xmlns:r="http://schemas.openxmlformats.org/officeDocument/2006/relationships" xmlns:p1510="http://schemas.microsoft.com/office/powerpoint/2015/10/main">
-  <p1510:revLst>
-    <p1510:client id="{9EA23B23-8F0B-450D-A8CD-AFF6177A84CD}" v="251" dt="2022-04-25T07:17:35.304"/>
-  </p1510:revLst>
-</p1510:revInfo>
-</file>
-
 <file path=ppt/changesInfos/changesInfo1.xml><?xml version="1.0" encoding="utf-8"?>
 <pc:chgInfo xmlns:a="http://schemas.openxmlformats.org/drawingml/2006/main" xmlns:r="http://schemas.openxmlformats.org/officeDocument/2006/relationships" xmlns:ac="http://schemas.microsoft.com/office/drawing/2013/main/command" xmlns:pc="http://schemas.microsoft.com/office/powerpoint/2013/main/command">
   <pc:docChgLst>
-    <pc:chgData name="Edward Fu Schmerling" userId="c8b75dde-c097-4599-bb13-81e931e3f9a3" providerId="ADAL" clId="{9EA23B23-8F0B-450D-A8CD-AFF6177A84CD}"/>
-    <pc:docChg chg="undo redo custSel addSld delSld modSld modSection">
-      <pc:chgData name="Edward Fu Schmerling" userId="c8b75dde-c097-4599-bb13-81e931e3f9a3" providerId="ADAL" clId="{9EA23B23-8F0B-450D-A8CD-AFF6177A84CD}" dt="2022-04-27T15:15:12.829" v="353" actId="47"/>
+    <pc:chgData name="Daniele Gammelli" userId="292b8a31-f1ba-4b4c-b196-a231dc095d13" providerId="ADAL" clId="{6E670754-AB6A-5789-AA0A-6F6FD9CE3EEA}"/>
+    <pc:docChg chg="modSld">
+      <pc:chgData name="Daniele Gammelli" userId="292b8a31-f1ba-4b4c-b196-a231dc095d13" providerId="ADAL" clId="{6E670754-AB6A-5789-AA0A-6F6FD9CE3EEA}" dt="2026-08-13T21:15:42.443" v="6" actId="20577"/>
       <pc:docMkLst>
         <pc:docMk/>
       </pc:docMkLst>
-      <pc:sldChg chg="modSp mod">
-        <pc:chgData name="Edward Fu Schmerling" userId="c8b75dde-c097-4599-bb13-81e931e3f9a3" providerId="ADAL" clId="{9EA23B23-8F0B-450D-A8CD-AFF6177A84CD}" dt="2022-04-25T06:45:40.294" v="350" actId="20577"/>
+      <pc:sldChg chg="modNotesTx">
+        <pc:chgData name="Daniele Gammelli" userId="292b8a31-f1ba-4b4c-b196-a231dc095d13" providerId="ADAL" clId="{6E670754-AB6A-5789-AA0A-6F6FD9CE3EEA}" dt="2026-08-13T21:12:06.448" v="3" actId="20577"/>
         <pc:sldMkLst>
           <pc:docMk/>
-          <pc:sldMk cId="3651528683" sldId="399"/>
+          <pc:sldMk cId="4048239737" sldId="257"/>
         </pc:sldMkLst>
-        <pc:spChg chg="mod">
-          <ac:chgData name="Edward Fu Schmerling" userId="c8b75dde-c097-4599-bb13-81e931e3f9a3" providerId="ADAL" clId="{9EA23B23-8F0B-450D-A8CD-AFF6177A84CD}" dt="2022-04-25T06:45:40.294" v="350" actId="20577"/>
-          <ac:spMkLst>
-            <pc:docMk/>
-            <pc:sldMk cId="3651528683" sldId="399"/>
-            <ac:spMk id="3" creationId="{041834AB-4990-1841-A099-C9C9563E417D}"/>
-          </ac:spMkLst>
-        </pc:spChg>
       </pc:sldChg>
-      <pc:sldChg chg="modSp mod">
-        <pc:chgData name="Edward Fu Schmerling" userId="c8b75dde-c097-4599-bb13-81e931e3f9a3" providerId="ADAL" clId="{9EA23B23-8F0B-450D-A8CD-AFF6177A84CD}" dt="2022-04-25T03:23:54.980" v="32" actId="27636"/>
+      <pc:sldChg chg="modNotesTx">
+        <pc:chgData name="Daniele Gammelli" userId="292b8a31-f1ba-4b4c-b196-a231dc095d13" providerId="ADAL" clId="{6E670754-AB6A-5789-AA0A-6F6FD9CE3EEA}" dt="2026-08-13T21:15:42.443" v="6" actId="20577"/>
         <pc:sldMkLst>
           <pc:docMk/>
-          <pc:sldMk cId="308399181" sldId="403"/>
+          <pc:sldMk cId="2851514682" sldId="258"/>
         </pc:sldMkLst>
-        <pc:spChg chg="mod">
-          <ac:chgData name="Edward Fu Schmerling" userId="c8b75dde-c097-4599-bb13-81e931e3f9a3" providerId="ADAL" clId="{9EA23B23-8F0B-450D-A8CD-AFF6177A84CD}" dt="2022-04-25T03:23:54.980" v="32" actId="27636"/>
-          <ac:spMkLst>
-            <pc:docMk/>
-            <pc:sldMk cId="308399181" sldId="403"/>
-            <ac:spMk id="3" creationId="{7FE419F9-38B8-5748-96FC-3F2C8969DC11}"/>
-          </ac:spMkLst>
-        </pc:spChg>
       </pc:sldChg>
-      <pc:sldChg chg="modSp mod">
-        <pc:chgData name="Edward Fu Schmerling" userId="c8b75dde-c097-4599-bb13-81e931e3f9a3" providerId="ADAL" clId="{9EA23B23-8F0B-450D-A8CD-AFF6177A84CD}" dt="2022-04-25T05:19:44.498" v="112" actId="20577"/>
-        <pc:sldMkLst>
-          <pc:docMk/>
-          <pc:sldMk cId="1620177077" sldId="407"/>
-        </pc:sldMkLst>
-        <pc:spChg chg="mod">
-          <ac:chgData name="Edward Fu Schmerling" userId="c8b75dde-c097-4599-bb13-81e931e3f9a3" providerId="ADAL" clId="{9EA23B23-8F0B-450D-A8CD-AFF6177A84CD}" dt="2022-04-25T05:19:44.498" v="112" actId="20577"/>
-          <ac:spMkLst>
-            <pc:docMk/>
-            <pc:sldMk cId="1620177077" sldId="407"/>
-            <ac:spMk id="3" creationId="{2603C417-5649-6241-B462-0B1D331A5A35}"/>
-          </ac:spMkLst>
-        </pc:spChg>
-        <pc:spChg chg="mod">
-          <ac:chgData name="Edward Fu Schmerling" userId="c8b75dde-c097-4599-bb13-81e931e3f9a3" providerId="ADAL" clId="{9EA23B23-8F0B-450D-A8CD-AFF6177A84CD}" dt="2022-04-25T04:22:57.176" v="98"/>
-          <ac:spMkLst>
-            <pc:docMk/>
-            <pc:sldMk cId="1620177077" sldId="407"/>
-            <ac:spMk id="8" creationId="{C292EE42-DD56-3B47-8244-92E029036876}"/>
-          </ac:spMkLst>
-        </pc:spChg>
-        <pc:spChg chg="mod">
-          <ac:chgData name="Edward Fu Schmerling" userId="c8b75dde-c097-4599-bb13-81e931e3f9a3" providerId="ADAL" clId="{9EA23B23-8F0B-450D-A8CD-AFF6177A84CD}" dt="2022-04-25T04:22:57.176" v="98"/>
-          <ac:spMkLst>
-            <pc:docMk/>
-            <pc:sldMk cId="1620177077" sldId="407"/>
-            <ac:spMk id="9" creationId="{DC3C3FAD-E9A5-B248-BFBC-0E2DD0886F88}"/>
-          </ac:spMkLst>
-        </pc:spChg>
-        <pc:spChg chg="mod">
-          <ac:chgData name="Edward Fu Schmerling" userId="c8b75dde-c097-4599-bb13-81e931e3f9a3" providerId="ADAL" clId="{9EA23B23-8F0B-450D-A8CD-AFF6177A84CD}" dt="2022-04-25T04:22:57.176" v="98"/>
-          <ac:spMkLst>
-            <pc:docMk/>
-            <pc:sldMk cId="1620177077" sldId="407"/>
-            <ac:spMk id="10" creationId="{E0244029-09B9-3F43-BFDD-32BF1801ECCD}"/>
-          </ac:spMkLst>
-        </pc:spChg>
-        <pc:spChg chg="mod">
-          <ac:chgData name="Edward Fu Schmerling" userId="c8b75dde-c097-4599-bb13-81e931e3f9a3" providerId="ADAL" clId="{9EA23B23-8F0B-450D-A8CD-AFF6177A84CD}" dt="2022-04-25T04:22:57.176" v="98"/>
-          <ac:spMkLst>
-            <pc:docMk/>
-            <pc:sldMk cId="1620177077" sldId="407"/>
-            <ac:spMk id="11" creationId="{84643577-8DA0-8847-9E71-8593808739F3}"/>
-          </ac:spMkLst>
-        </pc:spChg>
-        <pc:spChg chg="mod">
-          <ac:chgData name="Edward Fu Schmerling" userId="c8b75dde-c097-4599-bb13-81e931e3f9a3" providerId="ADAL" clId="{9EA23B23-8F0B-450D-A8CD-AFF6177A84CD}" dt="2022-04-25T04:22:57.176" v="98"/>
-          <ac:spMkLst>
-            <pc:docMk/>
-            <pc:sldMk cId="1620177077" sldId="407"/>
-            <ac:spMk id="12" creationId="{8D93A7A7-0A1C-0641-9120-D032DF7AE07A}"/>
-          </ac:spMkLst>
-        </pc:spChg>
-        <pc:spChg chg="mod">
-          <ac:chgData name="Edward Fu Schmerling" userId="c8b75dde-c097-4599-bb13-81e931e3f9a3" providerId="ADAL" clId="{9EA23B23-8F0B-450D-A8CD-AFF6177A84CD}" dt="2022-04-25T04:22:57.176" v="98"/>
-          <ac:spMkLst>
-            <pc:docMk/>
-            <pc:sldMk cId="1620177077" sldId="407"/>
-            <ac:spMk id="13" creationId="{5395126F-1CED-FB49-B17E-729E383E74EC}"/>
-          </ac:spMkLst>
-        </pc:spChg>
-        <pc:spChg chg="mod">
-          <ac:chgData name="Edward Fu Schmerling" userId="c8b75dde-c097-4599-bb13-81e931e3f9a3" providerId="ADAL" clId="{9EA23B23-8F0B-450D-A8CD-AFF6177A84CD}" dt="2022-04-25T04:22:57.176" v="98"/>
-          <ac:spMkLst>
-            <pc:docMk/>
-            <pc:sldMk cId="1620177077" sldId="407"/>
-            <ac:spMk id="14" creationId="{9DB94763-DABB-A345-AA92-987E72C0F8EC}"/>
-          </ac:spMkLst>
-        </pc:spChg>
-        <pc:spChg chg="mod">
-          <ac:chgData name="Edward Fu Schmerling" userId="c8b75dde-c097-4599-bb13-81e931e3f9a3" providerId="ADAL" clId="{9EA23B23-8F0B-450D-A8CD-AFF6177A84CD}" dt="2022-04-25T04:22:57.176" v="98"/>
-          <ac:spMkLst>
-            <pc:docMk/>
-            <pc:sldMk cId="1620177077" sldId="407"/>
-            <ac:spMk id="15" creationId="{B0782DB2-EABF-D644-884C-52125BBB734B}"/>
-          </ac:spMkLst>
-        </pc:spChg>
-        <pc:grpChg chg="mod">
-          <ac:chgData name="Edward Fu Schmerling" userId="c8b75dde-c097-4599-bb13-81e931e3f9a3" providerId="ADAL" clId="{9EA23B23-8F0B-450D-A8CD-AFF6177A84CD}" dt="2022-04-25T04:22:57.176" v="98"/>
-          <ac:grpSpMkLst>
-            <pc:docMk/>
-            <pc:sldMk cId="1620177077" sldId="407"/>
-            <ac:grpSpMk id="4" creationId="{7F7B69DA-56F5-CB44-BCAD-04A01B434DA5}"/>
-          </ac:grpSpMkLst>
-        </pc:grpChg>
-        <pc:grpChg chg="mod">
-          <ac:chgData name="Edward Fu Schmerling" userId="c8b75dde-c097-4599-bb13-81e931e3f9a3" providerId="ADAL" clId="{9EA23B23-8F0B-450D-A8CD-AFF6177A84CD}" dt="2022-04-25T04:22:57.176" v="98"/>
-          <ac:grpSpMkLst>
-            <pc:docMk/>
-            <pc:sldMk cId="1620177077" sldId="407"/>
-            <ac:grpSpMk id="5" creationId="{C6BCB2EB-6966-7247-8930-72C3386B9CFE}"/>
-          </ac:grpSpMkLst>
-        </pc:grpChg>
-        <pc:picChg chg="mod">
-          <ac:chgData name="Edward Fu Schmerling" userId="c8b75dde-c097-4599-bb13-81e931e3f9a3" providerId="ADAL" clId="{9EA23B23-8F0B-450D-A8CD-AFF6177A84CD}" dt="2022-04-25T04:22:57.176" v="98"/>
-          <ac:picMkLst>
-            <pc:docMk/>
-            <pc:sldMk cId="1620177077" sldId="407"/>
-            <ac:picMk id="7" creationId="{5D7475E8-37FA-C641-8930-657494BF9F6C}"/>
-          </ac:picMkLst>
-        </pc:picChg>
-      </pc:sldChg>
-      <pc:sldChg chg="addSp delSp modSp mod">
-        <pc:chgData name="Edward Fu Schmerling" userId="c8b75dde-c097-4599-bb13-81e931e3f9a3" providerId="ADAL" clId="{9EA23B23-8F0B-450D-A8CD-AFF6177A84CD}" dt="2022-04-25T05:44:07.698" v="188" actId="1035"/>
+      <pc:sldChg chg="modNotesTx">
+        <pc:chgData name="Daniele Gammelli" userId="292b8a31-f1ba-4b4c-b196-a231dc095d13" providerId="ADAL" clId="{6E670754-AB6A-5789-AA0A-6F6FD9CE3EEA}" dt="2026-08-13T21:12:01.170" v="2" actId="20577"/>
         <pc:sldMkLst>
           <pc:docMk/>
           <pc:sldMk cId="2277185333" sldId="408"/>
         </pc:sldMkLst>
-        <pc:spChg chg="mod">
-          <ac:chgData name="Edward Fu Schmerling" userId="c8b75dde-c097-4599-bb13-81e931e3f9a3" providerId="ADAL" clId="{9EA23B23-8F0B-450D-A8CD-AFF6177A84CD}" dt="2022-04-25T05:43:42.902" v="175" actId="20577"/>
-          <ac:spMkLst>
-            <pc:docMk/>
-            <pc:sldMk cId="2277185333" sldId="408"/>
-            <ac:spMk id="3" creationId="{D0B2FEF2-AE55-5940-8228-B23174AC5E7A}"/>
-          </ac:spMkLst>
-        </pc:spChg>
-        <pc:spChg chg="add mod">
-          <ac:chgData name="Edward Fu Schmerling" userId="c8b75dde-c097-4599-bb13-81e931e3f9a3" providerId="ADAL" clId="{9EA23B23-8F0B-450D-A8CD-AFF6177A84CD}" dt="2022-04-25T05:28:21.639" v="155" actId="164"/>
-          <ac:spMkLst>
-            <pc:docMk/>
-            <pc:sldMk cId="2277185333" sldId="408"/>
-            <ac:spMk id="4" creationId="{7D6852BB-24C9-4A21-98A5-5192DF360FD1}"/>
-          </ac:spMkLst>
-        </pc:spChg>
-        <pc:spChg chg="add mod">
-          <ac:chgData name="Edward Fu Schmerling" userId="c8b75dde-c097-4599-bb13-81e931e3f9a3" providerId="ADAL" clId="{9EA23B23-8F0B-450D-A8CD-AFF6177A84CD}" dt="2022-04-25T05:28:21.639" v="155" actId="164"/>
-          <ac:spMkLst>
-            <pc:docMk/>
-            <pc:sldMk cId="2277185333" sldId="408"/>
-            <ac:spMk id="10" creationId="{C0FA4F24-7D41-48EF-BBF5-68D91CE65808}"/>
-          </ac:spMkLst>
-        </pc:spChg>
-        <pc:spChg chg="add mod">
-          <ac:chgData name="Edward Fu Schmerling" userId="c8b75dde-c097-4599-bb13-81e931e3f9a3" providerId="ADAL" clId="{9EA23B23-8F0B-450D-A8CD-AFF6177A84CD}" dt="2022-04-25T05:28:33.313" v="158" actId="1037"/>
-          <ac:spMkLst>
-            <pc:docMk/>
-            <pc:sldMk cId="2277185333" sldId="408"/>
-            <ac:spMk id="14" creationId="{7DF96BB7-A8B7-49C1-AFE7-368E103AB5E1}"/>
-          </ac:spMkLst>
-        </pc:spChg>
-        <pc:grpChg chg="add del mod">
-          <ac:chgData name="Edward Fu Schmerling" userId="c8b75dde-c097-4599-bb13-81e931e3f9a3" providerId="ADAL" clId="{9EA23B23-8F0B-450D-A8CD-AFF6177A84CD}" dt="2022-04-25T05:36:32.997" v="168" actId="478"/>
-          <ac:grpSpMkLst>
-            <pc:docMk/>
-            <pc:sldMk cId="2277185333" sldId="408"/>
-            <ac:grpSpMk id="5" creationId="{94800D36-B9F2-4411-A766-74C819D291E3}"/>
-          </ac:grpSpMkLst>
-        </pc:grpChg>
-        <pc:picChg chg="mod">
-          <ac:chgData name="Edward Fu Schmerling" userId="c8b75dde-c097-4599-bb13-81e931e3f9a3" providerId="ADAL" clId="{9EA23B23-8F0B-450D-A8CD-AFF6177A84CD}" dt="2022-04-25T05:44:07.698" v="188" actId="1035"/>
-          <ac:picMkLst>
-            <pc:docMk/>
-            <pc:sldMk cId="2277185333" sldId="408"/>
-            <ac:picMk id="4" creationId="{D03E03EA-8CE3-D546-AB93-E6C4FDC556D4}"/>
-          </ac:picMkLst>
-        </pc:picChg>
-        <pc:picChg chg="del">
-          <ac:chgData name="Edward Fu Schmerling" userId="c8b75dde-c097-4599-bb13-81e931e3f9a3" providerId="ADAL" clId="{9EA23B23-8F0B-450D-A8CD-AFF6177A84CD}" dt="2022-04-25T05:43:55.458" v="179" actId="478"/>
-          <ac:picMkLst>
-            <pc:docMk/>
-            <pc:sldMk cId="2277185333" sldId="408"/>
-            <ac:picMk id="7" creationId="{4DBDD128-6D15-2644-AF9A-C6A3E08E8EAB}"/>
-          </ac:picMkLst>
-        </pc:picChg>
-        <pc:picChg chg="mod">
-          <ac:chgData name="Edward Fu Schmerling" userId="c8b75dde-c097-4599-bb13-81e931e3f9a3" providerId="ADAL" clId="{9EA23B23-8F0B-450D-A8CD-AFF6177A84CD}" dt="2022-04-25T05:28:21.639" v="155" actId="164"/>
-          <ac:picMkLst>
-            <pc:docMk/>
-            <pc:sldMk cId="2277185333" sldId="408"/>
-            <ac:picMk id="8" creationId="{2904DD92-3841-6E4D-848C-9BA9D0687DCB}"/>
-          </ac:picMkLst>
-        </pc:picChg>
-        <pc:picChg chg="mod">
-          <ac:chgData name="Edward Fu Schmerling" userId="c8b75dde-c097-4599-bb13-81e931e3f9a3" providerId="ADAL" clId="{9EA23B23-8F0B-450D-A8CD-AFF6177A84CD}" dt="2022-04-25T05:43:40.618" v="174" actId="1076"/>
-          <ac:picMkLst>
-            <pc:docMk/>
-            <pc:sldMk cId="2277185333" sldId="408"/>
-            <ac:picMk id="18" creationId="{FA477285-1F1F-5B4B-A0E5-C6EFAD168C6B}"/>
-          </ac:picMkLst>
-        </pc:picChg>
       </pc:sldChg>
-      <pc:sldChg chg="modSp mod">
-        <pc:chgData name="Edward Fu Schmerling" userId="c8b75dde-c097-4599-bb13-81e931e3f9a3" providerId="ADAL" clId="{9EA23B23-8F0B-450D-A8CD-AFF6177A84CD}" dt="2022-04-25T05:44:44.874" v="189" actId="14100"/>
-        <pc:sldMkLst>
-          <pc:docMk/>
-          <pc:sldMk cId="3073302647" sldId="410"/>
-        </pc:sldMkLst>
-        <pc:spChg chg="mod">
-          <ac:chgData name="Edward Fu Schmerling" userId="c8b75dde-c097-4599-bb13-81e931e3f9a3" providerId="ADAL" clId="{9EA23B23-8F0B-450D-A8CD-AFF6177A84CD}" dt="2022-04-25T05:44:44.874" v="189" actId="14100"/>
-          <ac:spMkLst>
-            <pc:docMk/>
-            <pc:sldMk cId="3073302647" sldId="410"/>
-            <ac:spMk id="3" creationId="{1EA36D0E-48EC-B248-996D-FB2D083592D4}"/>
-          </ac:spMkLst>
-        </pc:spChg>
-      </pc:sldChg>
-      <pc:sldChg chg="modSp mod">
-        <pc:chgData name="Edward Fu Schmerling" userId="c8b75dde-c097-4599-bb13-81e931e3f9a3" providerId="ADAL" clId="{9EA23B23-8F0B-450D-A8CD-AFF6177A84CD}" dt="2022-04-25T06:26:32.911" v="304" actId="368"/>
-        <pc:sldMkLst>
-          <pc:docMk/>
-          <pc:sldMk cId="1320528044" sldId="411"/>
-        </pc:sldMkLst>
-        <pc:spChg chg="mod">
-          <ac:chgData name="Edward Fu Schmerling" userId="c8b75dde-c097-4599-bb13-81e931e3f9a3" providerId="ADAL" clId="{9EA23B23-8F0B-450D-A8CD-AFF6177A84CD}" dt="2022-04-25T06:26:32.911" v="304" actId="368"/>
-          <ac:spMkLst>
-            <pc:docMk/>
-            <pc:sldMk cId="1320528044" sldId="411"/>
-            <ac:spMk id="3" creationId="{AEF1C16D-FC4B-794C-844C-B00A86A30890}"/>
-          </ac:spMkLst>
-        </pc:spChg>
-      </pc:sldChg>
-      <pc:sldChg chg="modSp mod">
-        <pc:chgData name="Edward Fu Schmerling" userId="c8b75dde-c097-4599-bb13-81e931e3f9a3" providerId="ADAL" clId="{9EA23B23-8F0B-450D-A8CD-AFF6177A84CD}" dt="2022-04-25T06:35:23.652" v="307" actId="1076"/>
-        <pc:sldMkLst>
-          <pc:docMk/>
-          <pc:sldMk cId="2899107199" sldId="412"/>
-        </pc:sldMkLst>
-        <pc:picChg chg="mod modCrop">
-          <ac:chgData name="Edward Fu Schmerling" userId="c8b75dde-c097-4599-bb13-81e931e3f9a3" providerId="ADAL" clId="{9EA23B23-8F0B-450D-A8CD-AFF6177A84CD}" dt="2022-04-25T06:35:23.652" v="307" actId="1076"/>
-          <ac:picMkLst>
-            <pc:docMk/>
-            <pc:sldMk cId="2899107199" sldId="412"/>
-            <ac:picMk id="9" creationId="{1423415A-CA14-144D-9B79-17C90C8A9CBD}"/>
-          </ac:picMkLst>
-        </pc:picChg>
-      </pc:sldChg>
-      <pc:sldChg chg="add del">
-        <pc:chgData name="Edward Fu Schmerling" userId="c8b75dde-c097-4599-bb13-81e931e3f9a3" providerId="ADAL" clId="{9EA23B23-8F0B-450D-A8CD-AFF6177A84CD}" dt="2022-04-27T15:15:12.829" v="353" actId="47"/>
-        <pc:sldMkLst>
-          <pc:docMk/>
-          <pc:sldMk cId="137478247" sldId="416"/>
-        </pc:sldMkLst>
-      </pc:sldChg>
-      <pc:sldChg chg="addSp modSp add mod">
-        <pc:chgData name="Edward Fu Schmerling" userId="c8b75dde-c097-4599-bb13-81e931e3f9a3" providerId="ADAL" clId="{9EA23B23-8F0B-450D-A8CD-AFF6177A84CD}" dt="2022-04-25T03:27:12.784" v="90" actId="1076"/>
-        <pc:sldMkLst>
-          <pc:docMk/>
-          <pc:sldMk cId="4047473323" sldId="420"/>
-        </pc:sldMkLst>
-        <pc:spChg chg="add mod">
-          <ac:chgData name="Edward Fu Schmerling" userId="c8b75dde-c097-4599-bb13-81e931e3f9a3" providerId="ADAL" clId="{9EA23B23-8F0B-450D-A8CD-AFF6177A84CD}" dt="2022-04-25T03:27:10.270" v="89" actId="208"/>
-          <ac:spMkLst>
-            <pc:docMk/>
-            <pc:sldMk cId="4047473323" sldId="420"/>
-            <ac:spMk id="4" creationId="{C0050957-D8A0-4DBE-A075-F1F7C8B2C9D4}"/>
-          </ac:spMkLst>
-        </pc:spChg>
-        <pc:spChg chg="add mod">
-          <ac:chgData name="Edward Fu Schmerling" userId="c8b75dde-c097-4599-bb13-81e931e3f9a3" providerId="ADAL" clId="{9EA23B23-8F0B-450D-A8CD-AFF6177A84CD}" dt="2022-04-25T03:27:12.784" v="90" actId="1076"/>
-          <ac:spMkLst>
-            <pc:docMk/>
-            <pc:sldMk cId="4047473323" sldId="420"/>
-            <ac:spMk id="6" creationId="{7441EB80-D0C1-40D4-AFFD-5D67CBD1B756}"/>
-          </ac:spMkLst>
-        </pc:spChg>
-      </pc:sldChg>
-    </pc:docChg>
-  </pc:docChgLst>
-  <pc:docChgLst>
-    <pc:chgData name="Karen Yan Ming Leung" userId="5702c81a-7bc1-45f0-9e77-da815cac1d17" providerId="ADAL" clId="{C422858A-B3A0-3549-BF17-D2149089A683}"/>
-    <pc:docChg chg="custSel modSld">
-      <pc:chgData name="Karen Yan Ming Leung" userId="5702c81a-7bc1-45f0-9e77-da815cac1d17" providerId="ADAL" clId="{C422858A-B3A0-3549-BF17-D2149089A683}" dt="2022-04-25T05:43:32.282" v="28"/>
-      <pc:docMkLst>
-        <pc:docMk/>
-      </pc:docMkLst>
-      <pc:sldChg chg="modSp">
-        <pc:chgData name="Karen Yan Ming Leung" userId="5702c81a-7bc1-45f0-9e77-da815cac1d17" providerId="ADAL" clId="{C422858A-B3A0-3549-BF17-D2149089A683}" dt="2022-04-24T07:55:22.728" v="13" actId="20577"/>
-        <pc:sldMkLst>
-          <pc:docMk/>
-          <pc:sldMk cId="3356403099" sldId="404"/>
-        </pc:sldMkLst>
-        <pc:spChg chg="mod">
-          <ac:chgData name="Karen Yan Ming Leung" userId="5702c81a-7bc1-45f0-9e77-da815cac1d17" providerId="ADAL" clId="{C422858A-B3A0-3549-BF17-D2149089A683}" dt="2022-04-24T07:55:22.728" v="13" actId="20577"/>
-          <ac:spMkLst>
-            <pc:docMk/>
-            <pc:sldMk cId="3356403099" sldId="404"/>
-            <ac:spMk id="3" creationId="{29B023E4-5EB1-AA47-888A-E03A42712FEE}"/>
-          </ac:spMkLst>
-        </pc:spChg>
-      </pc:sldChg>
-      <pc:sldChg chg="addSp delSp mod modNotesTx">
-        <pc:chgData name="Karen Yan Ming Leung" userId="5702c81a-7bc1-45f0-9e77-da815cac1d17" providerId="ADAL" clId="{C422858A-B3A0-3549-BF17-D2149089A683}" dt="2022-04-25T05:43:32.282" v="28"/>
-        <pc:sldMkLst>
-          <pc:docMk/>
-          <pc:sldMk cId="2277185333" sldId="408"/>
-        </pc:sldMkLst>
-        <pc:picChg chg="add">
-          <ac:chgData name="Karen Yan Ming Leung" userId="5702c81a-7bc1-45f0-9e77-da815cac1d17" providerId="ADAL" clId="{C422858A-B3A0-3549-BF17-D2149089A683}" dt="2022-04-25T05:43:32.282" v="28"/>
-          <ac:picMkLst>
-            <pc:docMk/>
-            <pc:sldMk cId="2277185333" sldId="408"/>
-            <ac:picMk id="4" creationId="{D03E03EA-8CE3-D546-AB93-E6C4FDC556D4}"/>
-          </ac:picMkLst>
-        </pc:picChg>
-        <pc:picChg chg="add del">
-          <ac:chgData name="Karen Yan Ming Leung" userId="5702c81a-7bc1-45f0-9e77-da815cac1d17" providerId="ADAL" clId="{C422858A-B3A0-3549-BF17-D2149089A683}" dt="2022-04-25T05:36:12.614" v="15" actId="478"/>
-          <ac:picMkLst>
-            <pc:docMk/>
-            <pc:sldMk cId="2277185333" sldId="408"/>
-            <ac:picMk id="17" creationId="{C5183730-3936-3240-A6BE-291083174370}"/>
-          </ac:picMkLst>
-        </pc:picChg>
-        <pc:picChg chg="add">
-          <ac:chgData name="Karen Yan Ming Leung" userId="5702c81a-7bc1-45f0-9e77-da815cac1d17" providerId="ADAL" clId="{C422858A-B3A0-3549-BF17-D2149089A683}" dt="2022-04-25T05:36:22.254" v="25"/>
-          <ac:picMkLst>
-            <pc:docMk/>
-            <pc:sldMk cId="2277185333" sldId="408"/>
-            <ac:picMk id="18" creationId="{FA477285-1F1F-5B4B-A0E5-C6EFAD168C6B}"/>
-          </ac:picMkLst>
-        </pc:picChg>
-      </pc:sldChg>
-      <pc:sldChg chg="addSp delSp modSp mod modNotesTx">
-        <pc:chgData name="Karen Yan Ming Leung" userId="5702c81a-7bc1-45f0-9e77-da815cac1d17" providerId="ADAL" clId="{C422858A-B3A0-3549-BF17-D2149089A683}" dt="2022-04-24T07:52:47.305" v="8" actId="20577"/>
+      <pc:sldChg chg="modNotesTx">
+        <pc:chgData name="Daniele Gammelli" userId="292b8a31-f1ba-4b4c-b196-a231dc095d13" providerId="ADAL" clId="{6E670754-AB6A-5789-AA0A-6F6FD9CE3EEA}" dt="2026-08-13T21:11:50.844" v="0" actId="20577"/>
         <pc:sldMkLst>
           <pc:docMk/>
           <pc:sldMk cId="856275544" sldId="417"/>
         </pc:sldMkLst>
-        <pc:picChg chg="add mod">
-          <ac:chgData name="Karen Yan Ming Leung" userId="5702c81a-7bc1-45f0-9e77-da815cac1d17" providerId="ADAL" clId="{C422858A-B3A0-3549-BF17-D2149089A683}" dt="2022-04-24T07:52:37.838" v="6" actId="1076"/>
-          <ac:picMkLst>
-            <pc:docMk/>
-            <pc:sldMk cId="856275544" sldId="417"/>
-            <ac:picMk id="3" creationId="{1026CC71-F344-304C-BB85-2F23B772BCC8}"/>
-          </ac:picMkLst>
-        </pc:picChg>
-        <pc:picChg chg="del">
-          <ac:chgData name="Karen Yan Ming Leung" userId="5702c81a-7bc1-45f0-9e77-da815cac1d17" providerId="ADAL" clId="{C422858A-B3A0-3549-BF17-D2149089A683}" dt="2022-04-24T07:52:33.755" v="5" actId="478"/>
-          <ac:picMkLst>
-            <pc:docMk/>
-            <pc:sldMk cId="856275544" sldId="417"/>
-            <ac:picMk id="18" creationId="{7D5B0E45-5784-7443-B08B-6EB0C0935664}"/>
-          </ac:picMkLst>
-        </pc:picChg>
+      </pc:sldChg>
+      <pc:sldChg chg="modNotesTx">
+        <pc:chgData name="Daniele Gammelli" userId="292b8a31-f1ba-4b4c-b196-a231dc095d13" providerId="ADAL" clId="{6E670754-AB6A-5789-AA0A-6F6FD9CE3EEA}" dt="2026-08-13T21:11:55.791" v="1" actId="20577"/>
+        <pc:sldMkLst>
+          <pc:docMk/>
+          <pc:sldMk cId="1142390406" sldId="418"/>
+        </pc:sldMkLst>
+      </pc:sldChg>
+      <pc:sldChg chg="modNotesTx">
+        <pc:chgData name="Daniele Gammelli" userId="292b8a31-f1ba-4b4c-b196-a231dc095d13" providerId="ADAL" clId="{6E670754-AB6A-5789-AA0A-6F6FD9CE3EEA}" dt="2026-08-13T21:12:10.412" v="4" actId="20577"/>
+        <pc:sldMkLst>
+          <pc:docMk/>
+          <pc:sldMk cId="2677579993" sldId="419"/>
+        </pc:sldMkLst>
       </pc:sldChg>
     </pc:docChg>
   </pc:docChgLst>
@@ -629,7 +298,7 @@
           <a:p>
             <a:fld id="{EBD6F028-2067-3740-AA48-A91E93570B1D}" type="datetimeFigureOut">
               <a:rPr lang="en-US" smtClean="0"/>
-              <a:t>4/22/26</a:t>
+              <a:t>8/13/26</a:t>
             </a:fld>
             <a:endParaRPr lang="en-US"/>
           </a:p>
@@ -1240,774 +909,6 @@
           </a:bodyPr>
           <a:lstStyle/>
           <a:p>
-            <a:r>
-              <a:rPr lang="en-US" sz="1200" kern="1200" dirty="0" err="1">
-                <a:solidFill>
-                  <a:schemeClr val="tx1"/>
-                </a:solidFill>
-                <a:effectLst/>
-                <a:latin typeface="+mn-lt"/>
-                <a:ea typeface="+mn-ea"/>
-                <a:cs typeface="+mn-cs"/>
-              </a:rPr>
-              <a:t>Q_k</a:t>
-            </a:r>
-            <a:r>
-              <a:rPr lang="en-US" sz="1200" kern="1200" dirty="0">
-                <a:solidFill>
-                  <a:schemeClr val="tx1"/>
-                </a:solidFill>
-                <a:effectLst/>
-                <a:latin typeface="+mn-lt"/>
-                <a:ea typeface="+mn-ea"/>
-                <a:cs typeface="+mn-cs"/>
-              </a:rPr>
-              <a:t> &amp;= \</a:t>
-            </a:r>
-            <a:r>
-              <a:rPr lang="en-US" sz="1200" kern="1200" dirty="0" err="1">
-                <a:solidFill>
-                  <a:schemeClr val="tx1"/>
-                </a:solidFill>
-                <a:effectLst/>
-                <a:latin typeface="+mn-lt"/>
-                <a:ea typeface="+mn-ea"/>
-                <a:cs typeface="+mn-cs"/>
-              </a:rPr>
-              <a:t>cost_k</a:t>
-            </a:r>
-            <a:r>
-              <a:rPr lang="en-US" sz="1200" kern="1200" dirty="0">
-                <a:solidFill>
-                  <a:schemeClr val="tx1"/>
-                </a:solidFill>
-                <a:effectLst/>
-                <a:latin typeface="+mn-lt"/>
-                <a:ea typeface="+mn-ea"/>
-                <a:cs typeface="+mn-cs"/>
-              </a:rPr>
-              <a:t> + v_{k+1}\\</a:t>
-            </a:r>
-          </a:p>
-          <a:p>
-            <a:r>
-              <a:rPr lang="en-US" sz="1200" kern="1200" dirty="0">
-                <a:solidFill>
-                  <a:schemeClr val="tx1"/>
-                </a:solidFill>
-                <a:effectLst/>
-                <a:latin typeface="+mn-lt"/>
-                <a:ea typeface="+mn-ea"/>
-                <a:cs typeface="+mn-cs"/>
-              </a:rPr>
-              <a:t>Q_{\</a:t>
-            </a:r>
-            <a:r>
-              <a:rPr lang="en-US" sz="1200" kern="1200" dirty="0" err="1">
-                <a:solidFill>
-                  <a:schemeClr val="tx1"/>
-                </a:solidFill>
-                <a:effectLst/>
-                <a:latin typeface="+mn-lt"/>
-                <a:ea typeface="+mn-ea"/>
-                <a:cs typeface="+mn-cs"/>
-              </a:rPr>
-              <a:t>st,k</a:t>
-            </a:r>
-            <a:r>
-              <a:rPr lang="en-US" sz="1200" kern="1200" dirty="0">
-                <a:solidFill>
-                  <a:schemeClr val="tx1"/>
-                </a:solidFill>
-                <a:effectLst/>
-                <a:latin typeface="+mn-lt"/>
-                <a:ea typeface="+mn-ea"/>
-                <a:cs typeface="+mn-cs"/>
-              </a:rPr>
-              <a:t>} &amp;= \cost_{\</a:t>
-            </a:r>
-            <a:r>
-              <a:rPr lang="en-US" sz="1200" kern="1200" dirty="0" err="1">
-                <a:solidFill>
-                  <a:schemeClr val="tx1"/>
-                </a:solidFill>
-                <a:effectLst/>
-                <a:latin typeface="+mn-lt"/>
-                <a:ea typeface="+mn-ea"/>
-                <a:cs typeface="+mn-cs"/>
-              </a:rPr>
-              <a:t>st,k</a:t>
-            </a:r>
-            <a:r>
-              <a:rPr lang="en-US" sz="1200" kern="1200" dirty="0">
-                <a:solidFill>
-                  <a:schemeClr val="tx1"/>
-                </a:solidFill>
-                <a:effectLst/>
-                <a:latin typeface="+mn-lt"/>
-                <a:ea typeface="+mn-ea"/>
-                <a:cs typeface="+mn-cs"/>
-              </a:rPr>
-              <a:t>} + \f_{\</a:t>
-            </a:r>
-            <a:r>
-              <a:rPr lang="en-US" sz="1200" kern="1200" dirty="0" err="1">
-                <a:solidFill>
-                  <a:schemeClr val="tx1"/>
-                </a:solidFill>
-                <a:effectLst/>
-                <a:latin typeface="+mn-lt"/>
-                <a:ea typeface="+mn-ea"/>
-                <a:cs typeface="+mn-cs"/>
-              </a:rPr>
-              <a:t>st,k</a:t>
-            </a:r>
-            <a:r>
-              <a:rPr lang="en-US" sz="1200" kern="1200" dirty="0">
-                <a:solidFill>
-                  <a:schemeClr val="tx1"/>
-                </a:solidFill>
-                <a:effectLst/>
-                <a:latin typeface="+mn-lt"/>
-                <a:ea typeface="+mn-ea"/>
-                <a:cs typeface="+mn-cs"/>
-              </a:rPr>
-              <a:t>}^T \bm{v}_{k+1}\\</a:t>
-            </a:r>
-          </a:p>
-          <a:p>
-            <a:r>
-              <a:rPr lang="en-US" sz="1200" kern="1200" dirty="0">
-                <a:solidFill>
-                  <a:schemeClr val="tx1"/>
-                </a:solidFill>
-                <a:effectLst/>
-                <a:latin typeface="+mn-lt"/>
-                <a:ea typeface="+mn-ea"/>
-                <a:cs typeface="+mn-cs"/>
-              </a:rPr>
-              <a:t>Q_{\</a:t>
-            </a:r>
-            <a:r>
-              <a:rPr lang="en-US" sz="1200" kern="1200" dirty="0" err="1">
-                <a:solidFill>
-                  <a:schemeClr val="tx1"/>
-                </a:solidFill>
-                <a:effectLst/>
-                <a:latin typeface="+mn-lt"/>
-                <a:ea typeface="+mn-ea"/>
-                <a:cs typeface="+mn-cs"/>
-              </a:rPr>
-              <a:t>ac,k</a:t>
-            </a:r>
-            <a:r>
-              <a:rPr lang="en-US" sz="1200" kern="1200" dirty="0">
-                <a:solidFill>
-                  <a:schemeClr val="tx1"/>
-                </a:solidFill>
-                <a:effectLst/>
-                <a:latin typeface="+mn-lt"/>
-                <a:ea typeface="+mn-ea"/>
-                <a:cs typeface="+mn-cs"/>
-              </a:rPr>
-              <a:t>} &amp;= \cost_{\</a:t>
-            </a:r>
-            <a:r>
-              <a:rPr lang="en-US" sz="1200" kern="1200" dirty="0" err="1">
-                <a:solidFill>
-                  <a:schemeClr val="tx1"/>
-                </a:solidFill>
-                <a:effectLst/>
-                <a:latin typeface="+mn-lt"/>
-                <a:ea typeface="+mn-ea"/>
-                <a:cs typeface="+mn-cs"/>
-              </a:rPr>
-              <a:t>ac,k</a:t>
-            </a:r>
-            <a:r>
-              <a:rPr lang="en-US" sz="1200" kern="1200" dirty="0">
-                <a:solidFill>
-                  <a:schemeClr val="tx1"/>
-                </a:solidFill>
-                <a:effectLst/>
-                <a:latin typeface="+mn-lt"/>
-                <a:ea typeface="+mn-ea"/>
-                <a:cs typeface="+mn-cs"/>
-              </a:rPr>
-              <a:t>} + \f_{\</a:t>
-            </a:r>
-            <a:r>
-              <a:rPr lang="en-US" sz="1200" kern="1200" dirty="0" err="1">
-                <a:solidFill>
-                  <a:schemeClr val="tx1"/>
-                </a:solidFill>
-                <a:effectLst/>
-                <a:latin typeface="+mn-lt"/>
-                <a:ea typeface="+mn-ea"/>
-                <a:cs typeface="+mn-cs"/>
-              </a:rPr>
-              <a:t>ac,k</a:t>
-            </a:r>
-            <a:r>
-              <a:rPr lang="en-US" sz="1200" kern="1200" dirty="0">
-                <a:solidFill>
-                  <a:schemeClr val="tx1"/>
-                </a:solidFill>
-                <a:effectLst/>
-                <a:latin typeface="+mn-lt"/>
-                <a:ea typeface="+mn-ea"/>
-                <a:cs typeface="+mn-cs"/>
-              </a:rPr>
-              <a:t>}^T \bm{v}_{k+1}\\</a:t>
-            </a:r>
-          </a:p>
-          <a:p>
-            <a:r>
-              <a:rPr lang="en-US" sz="1200" kern="1200" dirty="0">
-                <a:solidFill>
-                  <a:schemeClr val="tx1"/>
-                </a:solidFill>
-                <a:effectLst/>
-                <a:latin typeface="+mn-lt"/>
-                <a:ea typeface="+mn-ea"/>
-                <a:cs typeface="+mn-cs"/>
-              </a:rPr>
-              <a:t>Q_{\</a:t>
-            </a:r>
-            <a:r>
-              <a:rPr lang="en-US" sz="1200" kern="1200" dirty="0" err="1">
-                <a:solidFill>
-                  <a:schemeClr val="tx1"/>
-                </a:solidFill>
-                <a:effectLst/>
-                <a:latin typeface="+mn-lt"/>
-                <a:ea typeface="+mn-ea"/>
-                <a:cs typeface="+mn-cs"/>
-              </a:rPr>
-              <a:t>st</a:t>
-            </a:r>
-            <a:r>
-              <a:rPr lang="en-US" sz="1200" kern="1200" dirty="0">
-                <a:solidFill>
-                  <a:schemeClr val="tx1"/>
-                </a:solidFill>
-                <a:effectLst/>
-                <a:latin typeface="+mn-lt"/>
-                <a:ea typeface="+mn-ea"/>
-                <a:cs typeface="+mn-cs"/>
-              </a:rPr>
-              <a:t> \</a:t>
-            </a:r>
-            <a:r>
-              <a:rPr lang="en-US" sz="1200" kern="1200" dirty="0" err="1">
-                <a:solidFill>
-                  <a:schemeClr val="tx1"/>
-                </a:solidFill>
-                <a:effectLst/>
-                <a:latin typeface="+mn-lt"/>
-                <a:ea typeface="+mn-ea"/>
-                <a:cs typeface="+mn-cs"/>
-              </a:rPr>
-              <a:t>st,k</a:t>
-            </a:r>
-            <a:r>
-              <a:rPr lang="en-US" sz="1200" kern="1200" dirty="0">
-                <a:solidFill>
-                  <a:schemeClr val="tx1"/>
-                </a:solidFill>
-                <a:effectLst/>
-                <a:latin typeface="+mn-lt"/>
-                <a:ea typeface="+mn-ea"/>
-                <a:cs typeface="+mn-cs"/>
-              </a:rPr>
-              <a:t>} &amp;= \cost_{\</a:t>
-            </a:r>
-            <a:r>
-              <a:rPr lang="en-US" sz="1200" kern="1200" dirty="0" err="1">
-                <a:solidFill>
-                  <a:schemeClr val="tx1"/>
-                </a:solidFill>
-                <a:effectLst/>
-                <a:latin typeface="+mn-lt"/>
-                <a:ea typeface="+mn-ea"/>
-                <a:cs typeface="+mn-cs"/>
-              </a:rPr>
-              <a:t>st</a:t>
-            </a:r>
-            <a:r>
-              <a:rPr lang="en-US" sz="1200" kern="1200" dirty="0">
-                <a:solidFill>
-                  <a:schemeClr val="tx1"/>
-                </a:solidFill>
-                <a:effectLst/>
-                <a:latin typeface="+mn-lt"/>
-                <a:ea typeface="+mn-ea"/>
-                <a:cs typeface="+mn-cs"/>
-              </a:rPr>
-              <a:t> \</a:t>
-            </a:r>
-            <a:r>
-              <a:rPr lang="en-US" sz="1200" kern="1200" dirty="0" err="1">
-                <a:solidFill>
-                  <a:schemeClr val="tx1"/>
-                </a:solidFill>
-                <a:effectLst/>
-                <a:latin typeface="+mn-lt"/>
-                <a:ea typeface="+mn-ea"/>
-                <a:cs typeface="+mn-cs"/>
-              </a:rPr>
-              <a:t>st,k</a:t>
-            </a:r>
-            <a:r>
-              <a:rPr lang="en-US" sz="1200" kern="1200" dirty="0">
-                <a:solidFill>
-                  <a:schemeClr val="tx1"/>
-                </a:solidFill>
-                <a:effectLst/>
-                <a:latin typeface="+mn-lt"/>
-                <a:ea typeface="+mn-ea"/>
-                <a:cs typeface="+mn-cs"/>
-              </a:rPr>
-              <a:t>} + \f_{\</a:t>
-            </a:r>
-            <a:r>
-              <a:rPr lang="en-US" sz="1200" kern="1200" dirty="0" err="1">
-                <a:solidFill>
-                  <a:schemeClr val="tx1"/>
-                </a:solidFill>
-                <a:effectLst/>
-                <a:latin typeface="+mn-lt"/>
-                <a:ea typeface="+mn-ea"/>
-                <a:cs typeface="+mn-cs"/>
-              </a:rPr>
-              <a:t>st,k</a:t>
-            </a:r>
-            <a:r>
-              <a:rPr lang="en-US" sz="1200" kern="1200" dirty="0">
-                <a:solidFill>
-                  <a:schemeClr val="tx1"/>
-                </a:solidFill>
-                <a:effectLst/>
-                <a:latin typeface="+mn-lt"/>
-                <a:ea typeface="+mn-ea"/>
-                <a:cs typeface="+mn-cs"/>
-              </a:rPr>
-              <a:t>}^T V_{k+1} \f_{\</a:t>
-            </a:r>
-            <a:r>
-              <a:rPr lang="en-US" sz="1200" kern="1200" dirty="0" err="1">
-                <a:solidFill>
-                  <a:schemeClr val="tx1"/>
-                </a:solidFill>
-                <a:effectLst/>
-                <a:latin typeface="+mn-lt"/>
-                <a:ea typeface="+mn-ea"/>
-                <a:cs typeface="+mn-cs"/>
-              </a:rPr>
-              <a:t>st,k</a:t>
-            </a:r>
-            <a:r>
-              <a:rPr lang="en-US" sz="1200" kern="1200" dirty="0">
-                <a:solidFill>
-                  <a:schemeClr val="tx1"/>
-                </a:solidFill>
-                <a:effectLst/>
-                <a:latin typeface="+mn-lt"/>
-                <a:ea typeface="+mn-ea"/>
-                <a:cs typeface="+mn-cs"/>
-              </a:rPr>
-              <a:t>} + {\color{red}\bm{v}_{k+1} \</a:t>
-            </a:r>
-            <a:r>
-              <a:rPr lang="en-US" sz="1200" kern="1200" dirty="0" err="1">
-                <a:solidFill>
-                  <a:schemeClr val="tx1"/>
-                </a:solidFill>
-                <a:effectLst/>
-                <a:latin typeface="+mn-lt"/>
-                <a:ea typeface="+mn-ea"/>
-                <a:cs typeface="+mn-cs"/>
-              </a:rPr>
-              <a:t>cdot</a:t>
-            </a:r>
-            <a:r>
-              <a:rPr lang="en-US" sz="1200" kern="1200" dirty="0">
-                <a:solidFill>
-                  <a:schemeClr val="tx1"/>
-                </a:solidFill>
-                <a:effectLst/>
-                <a:latin typeface="+mn-lt"/>
-                <a:ea typeface="+mn-ea"/>
-                <a:cs typeface="+mn-cs"/>
-              </a:rPr>
-              <a:t> f_{\</a:t>
-            </a:r>
-            <a:r>
-              <a:rPr lang="en-US" sz="1200" kern="1200" dirty="0" err="1">
-                <a:solidFill>
-                  <a:schemeClr val="tx1"/>
-                </a:solidFill>
-                <a:effectLst/>
-                <a:latin typeface="+mn-lt"/>
-                <a:ea typeface="+mn-ea"/>
-                <a:cs typeface="+mn-cs"/>
-              </a:rPr>
-              <a:t>st</a:t>
-            </a:r>
-            <a:r>
-              <a:rPr lang="en-US" sz="1200" kern="1200" dirty="0">
-                <a:solidFill>
-                  <a:schemeClr val="tx1"/>
-                </a:solidFill>
-                <a:effectLst/>
-                <a:latin typeface="+mn-lt"/>
-                <a:ea typeface="+mn-ea"/>
-                <a:cs typeface="+mn-cs"/>
-              </a:rPr>
-              <a:t>\</a:t>
-            </a:r>
-            <a:r>
-              <a:rPr lang="en-US" sz="1200" kern="1200" dirty="0" err="1">
-                <a:solidFill>
-                  <a:schemeClr val="tx1"/>
-                </a:solidFill>
-                <a:effectLst/>
-                <a:latin typeface="+mn-lt"/>
-                <a:ea typeface="+mn-ea"/>
-                <a:cs typeface="+mn-cs"/>
-              </a:rPr>
-              <a:t>st,k</a:t>
-            </a:r>
-            <a:r>
-              <a:rPr lang="en-US" sz="1200" kern="1200" dirty="0">
-                <a:solidFill>
-                  <a:schemeClr val="tx1"/>
-                </a:solidFill>
-                <a:effectLst/>
-                <a:latin typeface="+mn-lt"/>
-                <a:ea typeface="+mn-ea"/>
-                <a:cs typeface="+mn-cs"/>
-              </a:rPr>
-              <a:t>}} \\</a:t>
-            </a:r>
-          </a:p>
-          <a:p>
-            <a:r>
-              <a:rPr lang="en-US" sz="1200" kern="1200" dirty="0">
-                <a:solidFill>
-                  <a:schemeClr val="tx1"/>
-                </a:solidFill>
-                <a:effectLst/>
-                <a:latin typeface="+mn-lt"/>
-                <a:ea typeface="+mn-ea"/>
-                <a:cs typeface="+mn-cs"/>
-              </a:rPr>
-              <a:t>Q_{\ac \</a:t>
-            </a:r>
-            <a:r>
-              <a:rPr lang="en-US" sz="1200" kern="1200" dirty="0" err="1">
-                <a:solidFill>
-                  <a:schemeClr val="tx1"/>
-                </a:solidFill>
-                <a:effectLst/>
-                <a:latin typeface="+mn-lt"/>
-                <a:ea typeface="+mn-ea"/>
-                <a:cs typeface="+mn-cs"/>
-              </a:rPr>
-              <a:t>ac,k</a:t>
-            </a:r>
-            <a:r>
-              <a:rPr lang="en-US" sz="1200" kern="1200" dirty="0">
-                <a:solidFill>
-                  <a:schemeClr val="tx1"/>
-                </a:solidFill>
-                <a:effectLst/>
-                <a:latin typeface="+mn-lt"/>
-                <a:ea typeface="+mn-ea"/>
-                <a:cs typeface="+mn-cs"/>
-              </a:rPr>
-              <a:t>} &amp;= \cost_{\ac \</a:t>
-            </a:r>
-            <a:r>
-              <a:rPr lang="en-US" sz="1200" kern="1200" dirty="0" err="1">
-                <a:solidFill>
-                  <a:schemeClr val="tx1"/>
-                </a:solidFill>
-                <a:effectLst/>
-                <a:latin typeface="+mn-lt"/>
-                <a:ea typeface="+mn-ea"/>
-                <a:cs typeface="+mn-cs"/>
-              </a:rPr>
-              <a:t>ac,k</a:t>
-            </a:r>
-            <a:r>
-              <a:rPr lang="en-US" sz="1200" kern="1200" dirty="0">
-                <a:solidFill>
-                  <a:schemeClr val="tx1"/>
-                </a:solidFill>
-                <a:effectLst/>
-                <a:latin typeface="+mn-lt"/>
-                <a:ea typeface="+mn-ea"/>
-                <a:cs typeface="+mn-cs"/>
-              </a:rPr>
-              <a:t>} + \f_{\</a:t>
-            </a:r>
-            <a:r>
-              <a:rPr lang="en-US" sz="1200" kern="1200" dirty="0" err="1">
-                <a:solidFill>
-                  <a:schemeClr val="tx1"/>
-                </a:solidFill>
-                <a:effectLst/>
-                <a:latin typeface="+mn-lt"/>
-                <a:ea typeface="+mn-ea"/>
-                <a:cs typeface="+mn-cs"/>
-              </a:rPr>
-              <a:t>ac,k</a:t>
-            </a:r>
-            <a:r>
-              <a:rPr lang="en-US" sz="1200" kern="1200" dirty="0">
-                <a:solidFill>
-                  <a:schemeClr val="tx1"/>
-                </a:solidFill>
-                <a:effectLst/>
-                <a:latin typeface="+mn-lt"/>
-                <a:ea typeface="+mn-ea"/>
-                <a:cs typeface="+mn-cs"/>
-              </a:rPr>
-              <a:t>}^T V_{k+1} \f_{\</a:t>
-            </a:r>
-            <a:r>
-              <a:rPr lang="en-US" sz="1200" kern="1200" dirty="0" err="1">
-                <a:solidFill>
-                  <a:schemeClr val="tx1"/>
-                </a:solidFill>
-                <a:effectLst/>
-                <a:latin typeface="+mn-lt"/>
-                <a:ea typeface="+mn-ea"/>
-                <a:cs typeface="+mn-cs"/>
-              </a:rPr>
-              <a:t>ac,k</a:t>
-            </a:r>
-            <a:r>
-              <a:rPr lang="en-US" sz="1200" kern="1200" dirty="0">
-                <a:solidFill>
-                  <a:schemeClr val="tx1"/>
-                </a:solidFill>
-                <a:effectLst/>
-                <a:latin typeface="+mn-lt"/>
-                <a:ea typeface="+mn-ea"/>
-                <a:cs typeface="+mn-cs"/>
-              </a:rPr>
-              <a:t>} + {\color{red}\bm{v}_{k+1} \</a:t>
-            </a:r>
-            <a:r>
-              <a:rPr lang="en-US" sz="1200" kern="1200" dirty="0" err="1">
-                <a:solidFill>
-                  <a:schemeClr val="tx1"/>
-                </a:solidFill>
-                <a:effectLst/>
-                <a:latin typeface="+mn-lt"/>
-                <a:ea typeface="+mn-ea"/>
-                <a:cs typeface="+mn-cs"/>
-              </a:rPr>
-              <a:t>cdot</a:t>
-            </a:r>
-            <a:r>
-              <a:rPr lang="en-US" sz="1200" kern="1200" dirty="0">
-                <a:solidFill>
-                  <a:schemeClr val="tx1"/>
-                </a:solidFill>
-                <a:effectLst/>
-                <a:latin typeface="+mn-lt"/>
-                <a:ea typeface="+mn-ea"/>
-                <a:cs typeface="+mn-cs"/>
-              </a:rPr>
-              <a:t> f_{\ac\</a:t>
-            </a:r>
-            <a:r>
-              <a:rPr lang="en-US" sz="1200" kern="1200" dirty="0" err="1">
-                <a:solidFill>
-                  <a:schemeClr val="tx1"/>
-                </a:solidFill>
-                <a:effectLst/>
-                <a:latin typeface="+mn-lt"/>
-                <a:ea typeface="+mn-ea"/>
-                <a:cs typeface="+mn-cs"/>
-              </a:rPr>
-              <a:t>ac,k</a:t>
-            </a:r>
-            <a:r>
-              <a:rPr lang="en-US" sz="1200" kern="1200" dirty="0">
-                <a:solidFill>
-                  <a:schemeClr val="tx1"/>
-                </a:solidFill>
-                <a:effectLst/>
-                <a:latin typeface="+mn-lt"/>
-                <a:ea typeface="+mn-ea"/>
-                <a:cs typeface="+mn-cs"/>
-              </a:rPr>
-              <a:t>}}\\</a:t>
-            </a:r>
-          </a:p>
-          <a:p>
-            <a:r>
-              <a:rPr lang="en-US" sz="1200" kern="1200" dirty="0">
-                <a:solidFill>
-                  <a:schemeClr val="tx1"/>
-                </a:solidFill>
-                <a:effectLst/>
-                <a:latin typeface="+mn-lt"/>
-                <a:ea typeface="+mn-ea"/>
-                <a:cs typeface="+mn-cs"/>
-              </a:rPr>
-              <a:t>Q_{\ac \</a:t>
-            </a:r>
-            <a:r>
-              <a:rPr lang="en-US" sz="1200" kern="1200" dirty="0" err="1">
-                <a:solidFill>
-                  <a:schemeClr val="tx1"/>
-                </a:solidFill>
-                <a:effectLst/>
-                <a:latin typeface="+mn-lt"/>
-                <a:ea typeface="+mn-ea"/>
-                <a:cs typeface="+mn-cs"/>
-              </a:rPr>
-              <a:t>st,k</a:t>
-            </a:r>
-            <a:r>
-              <a:rPr lang="en-US" sz="1200" kern="1200" dirty="0">
-                <a:solidFill>
-                  <a:schemeClr val="tx1"/>
-                </a:solidFill>
-                <a:effectLst/>
-                <a:latin typeface="+mn-lt"/>
-                <a:ea typeface="+mn-ea"/>
-                <a:cs typeface="+mn-cs"/>
-              </a:rPr>
-              <a:t>} &amp;= \cost_{\ac \</a:t>
-            </a:r>
-            <a:r>
-              <a:rPr lang="en-US" sz="1200" kern="1200" dirty="0" err="1">
-                <a:solidFill>
-                  <a:schemeClr val="tx1"/>
-                </a:solidFill>
-                <a:effectLst/>
-                <a:latin typeface="+mn-lt"/>
-                <a:ea typeface="+mn-ea"/>
-                <a:cs typeface="+mn-cs"/>
-              </a:rPr>
-              <a:t>st,k</a:t>
-            </a:r>
-            <a:r>
-              <a:rPr lang="en-US" sz="1200" kern="1200" dirty="0">
-                <a:solidFill>
-                  <a:schemeClr val="tx1"/>
-                </a:solidFill>
-                <a:effectLst/>
-                <a:latin typeface="+mn-lt"/>
-                <a:ea typeface="+mn-ea"/>
-                <a:cs typeface="+mn-cs"/>
-              </a:rPr>
-              <a:t>} + \f_{\</a:t>
-            </a:r>
-            <a:r>
-              <a:rPr lang="en-US" sz="1200" kern="1200" dirty="0" err="1">
-                <a:solidFill>
-                  <a:schemeClr val="tx1"/>
-                </a:solidFill>
-                <a:effectLst/>
-                <a:latin typeface="+mn-lt"/>
-                <a:ea typeface="+mn-ea"/>
-                <a:cs typeface="+mn-cs"/>
-              </a:rPr>
-              <a:t>ac,k</a:t>
-            </a:r>
-            <a:r>
-              <a:rPr lang="en-US" sz="1200" kern="1200" dirty="0">
-                <a:solidFill>
-                  <a:schemeClr val="tx1"/>
-                </a:solidFill>
-                <a:effectLst/>
-                <a:latin typeface="+mn-lt"/>
-                <a:ea typeface="+mn-ea"/>
-                <a:cs typeface="+mn-cs"/>
-              </a:rPr>
-              <a:t>}^T V_{k+1} \f_{\</a:t>
-            </a:r>
-            <a:r>
-              <a:rPr lang="en-US" sz="1200" kern="1200" dirty="0" err="1">
-                <a:solidFill>
-                  <a:schemeClr val="tx1"/>
-                </a:solidFill>
-                <a:effectLst/>
-                <a:latin typeface="+mn-lt"/>
-                <a:ea typeface="+mn-ea"/>
-                <a:cs typeface="+mn-cs"/>
-              </a:rPr>
-              <a:t>st,k</a:t>
-            </a:r>
-            <a:r>
-              <a:rPr lang="en-US" sz="1200" kern="1200" dirty="0">
-                <a:solidFill>
-                  <a:schemeClr val="tx1"/>
-                </a:solidFill>
-                <a:effectLst/>
-                <a:latin typeface="+mn-lt"/>
-                <a:ea typeface="+mn-ea"/>
-                <a:cs typeface="+mn-cs"/>
-              </a:rPr>
-              <a:t>} + {\color{red}\bm{v}_{k+1} \</a:t>
-            </a:r>
-            <a:r>
-              <a:rPr lang="en-US" sz="1200" kern="1200" dirty="0" err="1">
-                <a:solidFill>
-                  <a:schemeClr val="tx1"/>
-                </a:solidFill>
-                <a:effectLst/>
-                <a:latin typeface="+mn-lt"/>
-                <a:ea typeface="+mn-ea"/>
-                <a:cs typeface="+mn-cs"/>
-              </a:rPr>
-              <a:t>cdot</a:t>
-            </a:r>
-            <a:r>
-              <a:rPr lang="en-US" sz="1200" kern="1200" dirty="0">
-                <a:solidFill>
-                  <a:schemeClr val="tx1"/>
-                </a:solidFill>
-                <a:effectLst/>
-                <a:latin typeface="+mn-lt"/>
-                <a:ea typeface="+mn-ea"/>
-                <a:cs typeface="+mn-cs"/>
-              </a:rPr>
-              <a:t> f_{\ac\</a:t>
-            </a:r>
-            <a:r>
-              <a:rPr lang="en-US" sz="1200" kern="1200" dirty="0" err="1">
-                <a:solidFill>
-                  <a:schemeClr val="tx1"/>
-                </a:solidFill>
-                <a:effectLst/>
-                <a:latin typeface="+mn-lt"/>
-                <a:ea typeface="+mn-ea"/>
-                <a:cs typeface="+mn-cs"/>
-              </a:rPr>
-              <a:t>st,k</a:t>
-            </a:r>
-            <a:r>
-              <a:rPr lang="en-US" sz="1200" kern="1200" dirty="0">
-                <a:solidFill>
-                  <a:schemeClr val="tx1"/>
-                </a:solidFill>
-                <a:effectLst/>
-                <a:latin typeface="+mn-lt"/>
-                <a:ea typeface="+mn-ea"/>
-                <a:cs typeface="+mn-cs"/>
-              </a:rPr>
-              <a:t>}}</a:t>
-            </a:r>
-          </a:p>
-          <a:p>
             <a:pPr marL="0" lvl="0" indent="0" algn="l" rtl="0">
               <a:spcBef>
                 <a:spcPts val="0"/>
@@ -2203,1604 +1104,6 @@
           <a:bodyPr/>
           <a:lstStyle/>
           <a:p>
-            <a:r>
-              <a:rPr lang="en-US" sz="1200" kern="1200" dirty="0">
-                <a:solidFill>
-                  <a:schemeClr val="tx1"/>
-                </a:solidFill>
-                <a:effectLst/>
-                <a:latin typeface="+mn-lt"/>
-                <a:ea typeface="+mn-ea"/>
-                <a:cs typeface="+mn-cs"/>
-              </a:rPr>
-              <a:t>\</a:t>
-            </a:r>
-            <a:r>
-              <a:rPr lang="en-US" sz="1200" kern="1200" dirty="0" err="1">
-                <a:solidFill>
-                  <a:schemeClr val="tx1"/>
-                </a:solidFill>
-                <a:effectLst/>
-                <a:latin typeface="+mn-lt"/>
-                <a:ea typeface="+mn-ea"/>
-                <a:cs typeface="+mn-cs"/>
-              </a:rPr>
-              <a:t>documentclass</a:t>
-            </a:r>
-            <a:r>
-              <a:rPr lang="en-US" sz="1200" kern="1200" dirty="0">
-                <a:solidFill>
-                  <a:schemeClr val="tx1"/>
-                </a:solidFill>
-                <a:effectLst/>
-                <a:latin typeface="+mn-lt"/>
-                <a:ea typeface="+mn-ea"/>
-                <a:cs typeface="+mn-cs"/>
-              </a:rPr>
-              <a:t>[10pt]{article}</a:t>
-            </a:r>
-          </a:p>
-          <a:p>
-            <a:r>
-              <a:rPr lang="en-US" sz="1200" kern="1200" dirty="0">
-                <a:solidFill>
-                  <a:schemeClr val="tx1"/>
-                </a:solidFill>
-                <a:effectLst/>
-                <a:latin typeface="+mn-lt"/>
-                <a:ea typeface="+mn-ea"/>
-                <a:cs typeface="+mn-cs"/>
-              </a:rPr>
-              <a:t>\</a:t>
-            </a:r>
-            <a:r>
-              <a:rPr lang="en-US" sz="1200" kern="1200" dirty="0" err="1">
-                <a:solidFill>
-                  <a:schemeClr val="tx1"/>
-                </a:solidFill>
-                <a:effectLst/>
-                <a:latin typeface="+mn-lt"/>
-                <a:ea typeface="+mn-ea"/>
-                <a:cs typeface="+mn-cs"/>
-              </a:rPr>
-              <a:t>usepackage</a:t>
-            </a:r>
-            <a:r>
-              <a:rPr lang="en-US" sz="1200" kern="1200" dirty="0">
-                <a:solidFill>
-                  <a:schemeClr val="tx1"/>
-                </a:solidFill>
-                <a:effectLst/>
-                <a:latin typeface="+mn-lt"/>
-                <a:ea typeface="+mn-ea"/>
-                <a:cs typeface="+mn-cs"/>
-              </a:rPr>
-              <a:t>[</a:t>
-            </a:r>
-            <a:r>
-              <a:rPr lang="en-US" sz="1200" kern="1200" dirty="0" err="1">
-                <a:solidFill>
-                  <a:schemeClr val="tx1"/>
-                </a:solidFill>
-                <a:effectLst/>
-                <a:latin typeface="+mn-lt"/>
-                <a:ea typeface="+mn-ea"/>
-                <a:cs typeface="+mn-cs"/>
-              </a:rPr>
-              <a:t>usenames</a:t>
-            </a:r>
-            <a:r>
-              <a:rPr lang="en-US" sz="1200" kern="1200" dirty="0">
-                <a:solidFill>
-                  <a:schemeClr val="tx1"/>
-                </a:solidFill>
-                <a:effectLst/>
-                <a:latin typeface="+mn-lt"/>
-                <a:ea typeface="+mn-ea"/>
-                <a:cs typeface="+mn-cs"/>
-              </a:rPr>
-              <a:t>]{color} %used for font color</a:t>
-            </a:r>
-          </a:p>
-          <a:p>
-            <a:r>
-              <a:rPr lang="en-US" sz="1200" kern="1200" dirty="0">
-                <a:solidFill>
-                  <a:schemeClr val="tx1"/>
-                </a:solidFill>
-                <a:effectLst/>
-                <a:latin typeface="+mn-lt"/>
-                <a:ea typeface="+mn-ea"/>
-                <a:cs typeface="+mn-cs"/>
-              </a:rPr>
-              <a:t>\</a:t>
-            </a:r>
-            <a:r>
-              <a:rPr lang="en-US" sz="1200" kern="1200" dirty="0" err="1">
-                <a:solidFill>
-                  <a:schemeClr val="tx1"/>
-                </a:solidFill>
-                <a:effectLst/>
-                <a:latin typeface="+mn-lt"/>
-                <a:ea typeface="+mn-ea"/>
-                <a:cs typeface="+mn-cs"/>
-              </a:rPr>
-              <a:t>usepackage</a:t>
-            </a:r>
-            <a:r>
-              <a:rPr lang="en-US" sz="1200" kern="1200" dirty="0">
-                <a:solidFill>
-                  <a:schemeClr val="tx1"/>
-                </a:solidFill>
-                <a:effectLst/>
-                <a:latin typeface="+mn-lt"/>
-                <a:ea typeface="+mn-ea"/>
-                <a:cs typeface="+mn-cs"/>
-              </a:rPr>
-              <a:t>{</a:t>
-            </a:r>
-            <a:r>
-              <a:rPr lang="en-US" sz="1200" kern="1200" dirty="0" err="1">
-                <a:solidFill>
-                  <a:schemeClr val="tx1"/>
-                </a:solidFill>
-                <a:effectLst/>
-                <a:latin typeface="+mn-lt"/>
-                <a:ea typeface="+mn-ea"/>
-                <a:cs typeface="+mn-cs"/>
-              </a:rPr>
-              <a:t>amssymb</a:t>
-            </a:r>
-            <a:r>
-              <a:rPr lang="en-US" sz="1200" kern="1200" dirty="0">
-                <a:solidFill>
-                  <a:schemeClr val="tx1"/>
-                </a:solidFill>
-                <a:effectLst/>
-                <a:latin typeface="+mn-lt"/>
-                <a:ea typeface="+mn-ea"/>
-                <a:cs typeface="+mn-cs"/>
-              </a:rPr>
-              <a:t>} %</a:t>
-            </a:r>
-            <a:r>
-              <a:rPr lang="en-US" sz="1200" kern="1200" dirty="0" err="1">
-                <a:solidFill>
-                  <a:schemeClr val="tx1"/>
-                </a:solidFill>
-                <a:effectLst/>
-                <a:latin typeface="+mn-lt"/>
-                <a:ea typeface="+mn-ea"/>
-                <a:cs typeface="+mn-cs"/>
-              </a:rPr>
-              <a:t>maths</a:t>
-            </a:r>
-            <a:endParaRPr lang="en-US" sz="1200" kern="1200" dirty="0">
-              <a:solidFill>
-                <a:schemeClr val="tx1"/>
-              </a:solidFill>
-              <a:effectLst/>
-              <a:latin typeface="+mn-lt"/>
-              <a:ea typeface="+mn-ea"/>
-              <a:cs typeface="+mn-cs"/>
-            </a:endParaRPr>
-          </a:p>
-          <a:p>
-            <a:r>
-              <a:rPr lang="en-US" sz="1200" kern="1200" dirty="0">
-                <a:solidFill>
-                  <a:schemeClr val="tx1"/>
-                </a:solidFill>
-                <a:effectLst/>
-                <a:latin typeface="+mn-lt"/>
-                <a:ea typeface="+mn-ea"/>
-                <a:cs typeface="+mn-cs"/>
-              </a:rPr>
-              <a:t>\</a:t>
-            </a:r>
-            <a:r>
-              <a:rPr lang="en-US" sz="1200" kern="1200" dirty="0" err="1">
-                <a:solidFill>
-                  <a:schemeClr val="tx1"/>
-                </a:solidFill>
-                <a:effectLst/>
-                <a:latin typeface="+mn-lt"/>
-                <a:ea typeface="+mn-ea"/>
-                <a:cs typeface="+mn-cs"/>
-              </a:rPr>
-              <a:t>usepackage</a:t>
-            </a:r>
-            <a:r>
-              <a:rPr lang="en-US" sz="1200" kern="1200" dirty="0">
-                <a:solidFill>
-                  <a:schemeClr val="tx1"/>
-                </a:solidFill>
-                <a:effectLst/>
-                <a:latin typeface="+mn-lt"/>
-                <a:ea typeface="+mn-ea"/>
-                <a:cs typeface="+mn-cs"/>
-              </a:rPr>
-              <a:t>{</a:t>
-            </a:r>
-            <a:r>
-              <a:rPr lang="en-US" sz="1200" kern="1200" dirty="0" err="1">
-                <a:solidFill>
-                  <a:schemeClr val="tx1"/>
-                </a:solidFill>
-                <a:effectLst/>
-                <a:latin typeface="+mn-lt"/>
-                <a:ea typeface="+mn-ea"/>
-                <a:cs typeface="+mn-cs"/>
-              </a:rPr>
-              <a:t>amsmath</a:t>
-            </a:r>
-            <a:r>
-              <a:rPr lang="en-US" sz="1200" kern="1200" dirty="0">
-                <a:solidFill>
-                  <a:schemeClr val="tx1"/>
-                </a:solidFill>
-                <a:effectLst/>
-                <a:latin typeface="+mn-lt"/>
-                <a:ea typeface="+mn-ea"/>
-                <a:cs typeface="+mn-cs"/>
-              </a:rPr>
-              <a:t>} %</a:t>
-            </a:r>
-            <a:r>
-              <a:rPr lang="en-US" sz="1200" kern="1200" dirty="0" err="1">
-                <a:solidFill>
-                  <a:schemeClr val="tx1"/>
-                </a:solidFill>
-                <a:effectLst/>
-                <a:latin typeface="+mn-lt"/>
-                <a:ea typeface="+mn-ea"/>
-                <a:cs typeface="+mn-cs"/>
-              </a:rPr>
-              <a:t>maths</a:t>
-            </a:r>
-            <a:endParaRPr lang="en-US" sz="1200" kern="1200" dirty="0">
-              <a:solidFill>
-                <a:schemeClr val="tx1"/>
-              </a:solidFill>
-              <a:effectLst/>
-              <a:latin typeface="+mn-lt"/>
-              <a:ea typeface="+mn-ea"/>
-              <a:cs typeface="+mn-cs"/>
-            </a:endParaRPr>
-          </a:p>
-          <a:p>
-            <a:r>
-              <a:rPr lang="en-US" sz="1200" kern="1200" dirty="0">
-                <a:solidFill>
-                  <a:schemeClr val="tx1"/>
-                </a:solidFill>
-                <a:effectLst/>
-                <a:latin typeface="+mn-lt"/>
-                <a:ea typeface="+mn-ea"/>
-                <a:cs typeface="+mn-cs"/>
-              </a:rPr>
-              <a:t>\</a:t>
-            </a:r>
-            <a:r>
-              <a:rPr lang="en-US" sz="1200" kern="1200" dirty="0" err="1">
-                <a:solidFill>
-                  <a:schemeClr val="tx1"/>
-                </a:solidFill>
-                <a:effectLst/>
-                <a:latin typeface="+mn-lt"/>
-                <a:ea typeface="+mn-ea"/>
-                <a:cs typeface="+mn-cs"/>
-              </a:rPr>
-              <a:t>usepackage</a:t>
-            </a:r>
-            <a:r>
-              <a:rPr lang="en-US" sz="1200" kern="1200" dirty="0">
-                <a:solidFill>
-                  <a:schemeClr val="tx1"/>
-                </a:solidFill>
-                <a:effectLst/>
-                <a:latin typeface="+mn-lt"/>
-                <a:ea typeface="+mn-ea"/>
-                <a:cs typeface="+mn-cs"/>
-              </a:rPr>
-              <a:t>[utf8]{</a:t>
-            </a:r>
-            <a:r>
-              <a:rPr lang="en-US" sz="1200" kern="1200" dirty="0" err="1">
-                <a:solidFill>
-                  <a:schemeClr val="tx1"/>
-                </a:solidFill>
-                <a:effectLst/>
-                <a:latin typeface="+mn-lt"/>
-                <a:ea typeface="+mn-ea"/>
-                <a:cs typeface="+mn-cs"/>
-              </a:rPr>
-              <a:t>inputenc</a:t>
-            </a:r>
-            <a:r>
-              <a:rPr lang="en-US" sz="1200" kern="1200" dirty="0">
-                <a:solidFill>
-                  <a:schemeClr val="tx1"/>
-                </a:solidFill>
-                <a:effectLst/>
-                <a:latin typeface="+mn-lt"/>
-                <a:ea typeface="+mn-ea"/>
-                <a:cs typeface="+mn-cs"/>
-              </a:rPr>
-              <a:t>} %useful to type directly diacritic characters</a:t>
-            </a:r>
-          </a:p>
-          <a:p>
-            <a:r>
-              <a:rPr lang="en-US" sz="1200" kern="1200" dirty="0">
-                <a:solidFill>
-                  <a:schemeClr val="tx1"/>
-                </a:solidFill>
-                <a:effectLst/>
-                <a:latin typeface="+mn-lt"/>
-                <a:ea typeface="+mn-ea"/>
-                <a:cs typeface="+mn-cs"/>
-              </a:rPr>
-              <a:t>\</a:t>
-            </a:r>
-            <a:r>
-              <a:rPr lang="en-US" sz="1200" kern="1200" dirty="0" err="1">
-                <a:solidFill>
-                  <a:schemeClr val="tx1"/>
-                </a:solidFill>
-                <a:effectLst/>
-                <a:latin typeface="+mn-lt"/>
-                <a:ea typeface="+mn-ea"/>
-                <a:cs typeface="+mn-cs"/>
-              </a:rPr>
-              <a:t>renewcommand</a:t>
-            </a:r>
-            <a:r>
-              <a:rPr lang="en-US" sz="1200" kern="1200" dirty="0">
-                <a:solidFill>
-                  <a:schemeClr val="tx1"/>
-                </a:solidFill>
-                <a:effectLst/>
-                <a:latin typeface="+mn-lt"/>
-                <a:ea typeface="+mn-ea"/>
-                <a:cs typeface="+mn-cs"/>
-              </a:rPr>
-              <a:t>{\u}{\</a:t>
-            </a:r>
-            <a:r>
-              <a:rPr lang="en-US" sz="1200" kern="1200" dirty="0" err="1">
-                <a:solidFill>
-                  <a:schemeClr val="tx1"/>
-                </a:solidFill>
-                <a:effectLst/>
-                <a:latin typeface="+mn-lt"/>
-                <a:ea typeface="+mn-ea"/>
-                <a:cs typeface="+mn-cs"/>
-              </a:rPr>
-              <a:t>mathbf</a:t>
-            </a:r>
-            <a:r>
-              <a:rPr lang="en-US" sz="1200" kern="1200" dirty="0">
-                <a:solidFill>
-                  <a:schemeClr val="tx1"/>
-                </a:solidFill>
-                <a:effectLst/>
-                <a:latin typeface="+mn-lt"/>
-                <a:ea typeface="+mn-ea"/>
-                <a:cs typeface="+mn-cs"/>
-              </a:rPr>
-              <a:t>{u}}</a:t>
-            </a:r>
-          </a:p>
-          <a:p>
-            <a:r>
-              <a:rPr lang="en-US" sz="1200" kern="1200" dirty="0">
-                <a:solidFill>
-                  <a:schemeClr val="tx1"/>
-                </a:solidFill>
-                <a:effectLst/>
-                <a:latin typeface="+mn-lt"/>
-                <a:ea typeface="+mn-ea"/>
-                <a:cs typeface="+mn-cs"/>
-              </a:rPr>
-              <a:t>\</a:t>
-            </a:r>
-            <a:r>
-              <a:rPr lang="en-US" sz="1200" kern="1200" dirty="0" err="1">
-                <a:solidFill>
-                  <a:schemeClr val="tx1"/>
-                </a:solidFill>
-                <a:effectLst/>
-                <a:latin typeface="+mn-lt"/>
-                <a:ea typeface="+mn-ea"/>
-                <a:cs typeface="+mn-cs"/>
-              </a:rPr>
-              <a:t>newcommand</a:t>
-            </a:r>
-            <a:r>
-              <a:rPr lang="en-US" sz="1200" kern="1200" dirty="0">
-                <a:solidFill>
-                  <a:schemeClr val="tx1"/>
-                </a:solidFill>
-                <a:effectLst/>
-                <a:latin typeface="+mn-lt"/>
-                <a:ea typeface="+mn-ea"/>
-                <a:cs typeface="+mn-cs"/>
-              </a:rPr>
-              <a:t>{\w}{\</a:t>
-            </a:r>
-            <a:r>
-              <a:rPr lang="en-US" sz="1200" kern="1200" dirty="0" err="1">
-                <a:solidFill>
-                  <a:schemeClr val="tx1"/>
-                </a:solidFill>
-                <a:effectLst/>
-                <a:latin typeface="+mn-lt"/>
-                <a:ea typeface="+mn-ea"/>
-                <a:cs typeface="+mn-cs"/>
-              </a:rPr>
-              <a:t>mathbf</a:t>
-            </a:r>
-            <a:r>
-              <a:rPr lang="en-US" sz="1200" kern="1200" dirty="0">
-                <a:solidFill>
-                  <a:schemeClr val="tx1"/>
-                </a:solidFill>
-                <a:effectLst/>
-                <a:latin typeface="+mn-lt"/>
-                <a:ea typeface="+mn-ea"/>
-                <a:cs typeface="+mn-cs"/>
-              </a:rPr>
-              <a:t>{w}}</a:t>
-            </a:r>
-          </a:p>
-          <a:p>
-            <a:r>
-              <a:rPr lang="en-US" sz="1200" kern="1200" dirty="0">
-                <a:solidFill>
-                  <a:schemeClr val="tx1"/>
-                </a:solidFill>
-                <a:effectLst/>
-                <a:latin typeface="+mn-lt"/>
-                <a:ea typeface="+mn-ea"/>
-                <a:cs typeface="+mn-cs"/>
-              </a:rPr>
-              <a:t>\</a:t>
-            </a:r>
-            <a:r>
-              <a:rPr lang="en-US" sz="1200" kern="1200" dirty="0" err="1">
-                <a:solidFill>
-                  <a:schemeClr val="tx1"/>
-                </a:solidFill>
-                <a:effectLst/>
-                <a:latin typeface="+mn-lt"/>
-                <a:ea typeface="+mn-ea"/>
-                <a:cs typeface="+mn-cs"/>
-              </a:rPr>
-              <a:t>newcommand</a:t>
-            </a:r>
-            <a:r>
-              <a:rPr lang="en-US" sz="1200" kern="1200" dirty="0">
-                <a:solidFill>
-                  <a:schemeClr val="tx1"/>
-                </a:solidFill>
-                <a:effectLst/>
-                <a:latin typeface="+mn-lt"/>
-                <a:ea typeface="+mn-ea"/>
-                <a:cs typeface="+mn-cs"/>
-              </a:rPr>
-              <a:t>{\x}{\</a:t>
-            </a:r>
-            <a:r>
-              <a:rPr lang="en-US" sz="1200" kern="1200" dirty="0" err="1">
-                <a:solidFill>
-                  <a:schemeClr val="tx1"/>
-                </a:solidFill>
-                <a:effectLst/>
-                <a:latin typeface="+mn-lt"/>
-                <a:ea typeface="+mn-ea"/>
-                <a:cs typeface="+mn-cs"/>
-              </a:rPr>
-              <a:t>mathbf</a:t>
-            </a:r>
-            <a:r>
-              <a:rPr lang="en-US" sz="1200" kern="1200" dirty="0">
-                <a:solidFill>
-                  <a:schemeClr val="tx1"/>
-                </a:solidFill>
-                <a:effectLst/>
-                <a:latin typeface="+mn-lt"/>
-                <a:ea typeface="+mn-ea"/>
-                <a:cs typeface="+mn-cs"/>
-              </a:rPr>
-              <a:t>{x}}</a:t>
-            </a:r>
-          </a:p>
-          <a:p>
-            <a:r>
-              <a:rPr lang="en-US" sz="1200" kern="1200" dirty="0">
-                <a:solidFill>
-                  <a:schemeClr val="tx1"/>
-                </a:solidFill>
-                <a:effectLst/>
-                <a:latin typeface="+mn-lt"/>
-                <a:ea typeface="+mn-ea"/>
-                <a:cs typeface="+mn-cs"/>
-              </a:rPr>
-              <a:t>\</a:t>
-            </a:r>
-            <a:r>
-              <a:rPr lang="en-US" sz="1200" kern="1200" dirty="0" err="1">
-                <a:solidFill>
-                  <a:schemeClr val="tx1"/>
-                </a:solidFill>
-                <a:effectLst/>
-                <a:latin typeface="+mn-lt"/>
-                <a:ea typeface="+mn-ea"/>
-                <a:cs typeface="+mn-cs"/>
-              </a:rPr>
-              <a:t>newcommand</a:t>
-            </a:r>
-            <a:r>
-              <a:rPr lang="en-US" sz="1200" kern="1200" dirty="0">
-                <a:solidFill>
-                  <a:schemeClr val="tx1"/>
-                </a:solidFill>
-                <a:effectLst/>
-                <a:latin typeface="+mn-lt"/>
-                <a:ea typeface="+mn-ea"/>
-                <a:cs typeface="+mn-cs"/>
-              </a:rPr>
-              <a:t>{\xu}[1]{\begin{</a:t>
-            </a:r>
-            <a:r>
-              <a:rPr lang="en-US" sz="1200" kern="1200" dirty="0" err="1">
-                <a:solidFill>
-                  <a:schemeClr val="tx1"/>
-                </a:solidFill>
-                <a:effectLst/>
-                <a:latin typeface="+mn-lt"/>
-                <a:ea typeface="+mn-ea"/>
-                <a:cs typeface="+mn-cs"/>
-              </a:rPr>
-              <a:t>bmatrix</a:t>
-            </a:r>
-            <a:r>
-              <a:rPr lang="en-US" sz="1200" kern="1200" dirty="0">
-                <a:solidFill>
-                  <a:schemeClr val="tx1"/>
-                </a:solidFill>
-                <a:effectLst/>
-                <a:latin typeface="+mn-lt"/>
-                <a:ea typeface="+mn-ea"/>
-                <a:cs typeface="+mn-cs"/>
-              </a:rPr>
-              <a:t>}\x_{#1}\\\u_{#1}\end{</a:t>
-            </a:r>
-            <a:r>
-              <a:rPr lang="en-US" sz="1200" kern="1200" dirty="0" err="1">
-                <a:solidFill>
-                  <a:schemeClr val="tx1"/>
-                </a:solidFill>
-                <a:effectLst/>
-                <a:latin typeface="+mn-lt"/>
-                <a:ea typeface="+mn-ea"/>
-                <a:cs typeface="+mn-cs"/>
-              </a:rPr>
-              <a:t>bmatrix</a:t>
-            </a:r>
-            <a:r>
-              <a:rPr lang="en-US" sz="1200" kern="1200" dirty="0">
-                <a:solidFill>
-                  <a:schemeClr val="tx1"/>
-                </a:solidFill>
-                <a:effectLst/>
-                <a:latin typeface="+mn-lt"/>
-                <a:ea typeface="+mn-ea"/>
-                <a:cs typeface="+mn-cs"/>
-              </a:rPr>
-              <a:t>}}</a:t>
-            </a:r>
-          </a:p>
-          <a:p>
-            <a:r>
-              <a:rPr lang="en-US" sz="1200" kern="1200" dirty="0">
-                <a:solidFill>
-                  <a:schemeClr val="tx1"/>
-                </a:solidFill>
-                <a:effectLst/>
-                <a:latin typeface="+mn-lt"/>
-                <a:ea typeface="+mn-ea"/>
-                <a:cs typeface="+mn-cs"/>
-              </a:rPr>
-              <a:t>\</a:t>
-            </a:r>
-            <a:r>
-              <a:rPr lang="en-US" sz="1200" kern="1200" dirty="0" err="1">
-                <a:solidFill>
-                  <a:schemeClr val="tx1"/>
-                </a:solidFill>
-                <a:effectLst/>
-                <a:latin typeface="+mn-lt"/>
-                <a:ea typeface="+mn-ea"/>
-                <a:cs typeface="+mn-cs"/>
-              </a:rPr>
-              <a:t>newcommand</a:t>
-            </a:r>
-            <a:r>
-              <a:rPr lang="en-US" sz="1200" kern="1200" dirty="0">
-                <a:solidFill>
-                  <a:schemeClr val="tx1"/>
-                </a:solidFill>
-                <a:effectLst/>
-                <a:latin typeface="+mn-lt"/>
-                <a:ea typeface="+mn-ea"/>
-                <a:cs typeface="+mn-cs"/>
-              </a:rPr>
-              <a:t>{\</a:t>
-            </a:r>
-            <a:r>
-              <a:rPr lang="en-US" sz="1200" kern="1200" dirty="0" err="1">
-                <a:solidFill>
-                  <a:schemeClr val="tx1"/>
-                </a:solidFill>
-                <a:effectLst/>
-                <a:latin typeface="+mn-lt"/>
-                <a:ea typeface="+mn-ea"/>
-                <a:cs typeface="+mn-cs"/>
-              </a:rPr>
-              <a:t>qrs</a:t>
-            </a:r>
-            <a:r>
-              <a:rPr lang="en-US" sz="1200" kern="1200" dirty="0">
-                <a:solidFill>
-                  <a:schemeClr val="tx1"/>
-                </a:solidFill>
-                <a:effectLst/>
-                <a:latin typeface="+mn-lt"/>
-                <a:ea typeface="+mn-ea"/>
-                <a:cs typeface="+mn-cs"/>
-              </a:rPr>
-              <a:t>}[1]{\begin{</a:t>
-            </a:r>
-            <a:r>
-              <a:rPr lang="en-US" sz="1200" kern="1200" dirty="0" err="1">
-                <a:solidFill>
-                  <a:schemeClr val="tx1"/>
-                </a:solidFill>
-                <a:effectLst/>
-                <a:latin typeface="+mn-lt"/>
-                <a:ea typeface="+mn-ea"/>
-                <a:cs typeface="+mn-cs"/>
-              </a:rPr>
-              <a:t>bmatrix</a:t>
-            </a:r>
-            <a:r>
-              <a:rPr lang="en-US" sz="1200" kern="1200" dirty="0">
-                <a:solidFill>
-                  <a:schemeClr val="tx1"/>
-                </a:solidFill>
-                <a:effectLst/>
-                <a:latin typeface="+mn-lt"/>
-                <a:ea typeface="+mn-ea"/>
-                <a:cs typeface="+mn-cs"/>
-              </a:rPr>
-              <a:t>}Q_{#1} &amp; H_{#1}\\H^T_{#1} &amp;R_{#1}\end{</a:t>
-            </a:r>
-            <a:r>
-              <a:rPr lang="en-US" sz="1200" kern="1200" dirty="0" err="1">
-                <a:solidFill>
-                  <a:schemeClr val="tx1"/>
-                </a:solidFill>
-                <a:effectLst/>
-                <a:latin typeface="+mn-lt"/>
-                <a:ea typeface="+mn-ea"/>
-                <a:cs typeface="+mn-cs"/>
-              </a:rPr>
-              <a:t>bmatrix</a:t>
-            </a:r>
-            <a:r>
-              <a:rPr lang="en-US" sz="1200" kern="1200" dirty="0">
-                <a:solidFill>
-                  <a:schemeClr val="tx1"/>
-                </a:solidFill>
-                <a:effectLst/>
-                <a:latin typeface="+mn-lt"/>
-                <a:ea typeface="+mn-ea"/>
-                <a:cs typeface="+mn-cs"/>
-              </a:rPr>
-              <a:t>}}</a:t>
-            </a:r>
-          </a:p>
-          <a:p>
-            <a:r>
-              <a:rPr lang="en-US" sz="1200" kern="1200" dirty="0">
-                <a:solidFill>
-                  <a:schemeClr val="tx1"/>
-                </a:solidFill>
-                <a:effectLst/>
-                <a:latin typeface="+mn-lt"/>
-                <a:ea typeface="+mn-ea"/>
-                <a:cs typeface="+mn-cs"/>
-              </a:rPr>
-              <a:t>\</a:t>
-            </a:r>
-            <a:r>
-              <a:rPr lang="en-US" sz="1200" kern="1200" dirty="0" err="1">
-                <a:solidFill>
-                  <a:schemeClr val="tx1"/>
-                </a:solidFill>
-                <a:effectLst/>
-                <a:latin typeface="+mn-lt"/>
-                <a:ea typeface="+mn-ea"/>
-                <a:cs typeface="+mn-cs"/>
-              </a:rPr>
-              <a:t>newcommand</a:t>
-            </a:r>
-            <a:r>
-              <a:rPr lang="en-US" sz="1200" kern="1200" dirty="0">
-                <a:solidFill>
-                  <a:schemeClr val="tx1"/>
-                </a:solidFill>
-                <a:effectLst/>
-                <a:latin typeface="+mn-lt"/>
-                <a:ea typeface="+mn-ea"/>
-                <a:cs typeface="+mn-cs"/>
-              </a:rPr>
-              <a:t>{\y}{\</a:t>
-            </a:r>
-            <a:r>
-              <a:rPr lang="en-US" sz="1200" kern="1200" dirty="0" err="1">
-                <a:solidFill>
-                  <a:schemeClr val="tx1"/>
-                </a:solidFill>
-                <a:effectLst/>
-                <a:latin typeface="+mn-lt"/>
-                <a:ea typeface="+mn-ea"/>
-                <a:cs typeface="+mn-cs"/>
-              </a:rPr>
-              <a:t>mathbf</a:t>
-            </a:r>
-            <a:r>
-              <a:rPr lang="en-US" sz="1200" kern="1200" dirty="0">
-                <a:solidFill>
-                  <a:schemeClr val="tx1"/>
-                </a:solidFill>
-                <a:effectLst/>
-                <a:latin typeface="+mn-lt"/>
-                <a:ea typeface="+mn-ea"/>
-                <a:cs typeface="+mn-cs"/>
-              </a:rPr>
-              <a:t>{y}}</a:t>
-            </a:r>
-          </a:p>
-          <a:p>
-            <a:r>
-              <a:rPr lang="en-US" sz="1200" kern="1200" dirty="0">
-                <a:solidFill>
-                  <a:schemeClr val="tx1"/>
-                </a:solidFill>
-                <a:effectLst/>
-                <a:latin typeface="+mn-lt"/>
-                <a:ea typeface="+mn-ea"/>
-                <a:cs typeface="+mn-cs"/>
-              </a:rPr>
-              <a:t>\</a:t>
-            </a:r>
-            <a:r>
-              <a:rPr lang="en-US" sz="1200" kern="1200" dirty="0" err="1">
-                <a:solidFill>
-                  <a:schemeClr val="tx1"/>
-                </a:solidFill>
-                <a:effectLst/>
-                <a:latin typeface="+mn-lt"/>
-                <a:ea typeface="+mn-ea"/>
-                <a:cs typeface="+mn-cs"/>
-              </a:rPr>
-              <a:t>newcommand</a:t>
-            </a:r>
-            <a:r>
-              <a:rPr lang="en-US" sz="1200" kern="1200" dirty="0">
-                <a:solidFill>
-                  <a:schemeClr val="tx1"/>
-                </a:solidFill>
-                <a:effectLst/>
-                <a:latin typeface="+mn-lt"/>
-                <a:ea typeface="+mn-ea"/>
-                <a:cs typeface="+mn-cs"/>
-              </a:rPr>
-              <a:t>{\z}{\</a:t>
-            </a:r>
-            <a:r>
-              <a:rPr lang="en-US" sz="1200" kern="1200" dirty="0" err="1">
-                <a:solidFill>
-                  <a:schemeClr val="tx1"/>
-                </a:solidFill>
-                <a:effectLst/>
-                <a:latin typeface="+mn-lt"/>
-                <a:ea typeface="+mn-ea"/>
-                <a:cs typeface="+mn-cs"/>
-              </a:rPr>
-              <a:t>mathbf</a:t>
-            </a:r>
-            <a:r>
-              <a:rPr lang="en-US" sz="1200" kern="1200" dirty="0">
-                <a:solidFill>
-                  <a:schemeClr val="tx1"/>
-                </a:solidFill>
-                <a:effectLst/>
-                <a:latin typeface="+mn-lt"/>
-                <a:ea typeface="+mn-ea"/>
-                <a:cs typeface="+mn-cs"/>
-              </a:rPr>
-              <a:t>{z}}</a:t>
-            </a:r>
-          </a:p>
-          <a:p>
-            <a:r>
-              <a:rPr lang="en-US" sz="1200" kern="1200" dirty="0">
-                <a:solidFill>
-                  <a:schemeClr val="tx1"/>
-                </a:solidFill>
-                <a:effectLst/>
-                <a:latin typeface="+mn-lt"/>
-                <a:ea typeface="+mn-ea"/>
-                <a:cs typeface="+mn-cs"/>
-              </a:rPr>
-              <a:t>\</a:t>
-            </a:r>
-            <a:r>
-              <a:rPr lang="en-US" sz="1200" kern="1200" dirty="0" err="1">
-                <a:solidFill>
-                  <a:schemeClr val="tx1"/>
-                </a:solidFill>
-                <a:effectLst/>
-                <a:latin typeface="+mn-lt"/>
-                <a:ea typeface="+mn-ea"/>
-                <a:cs typeface="+mn-cs"/>
-              </a:rPr>
-              <a:t>newcommand</a:t>
-            </a:r>
-            <a:r>
-              <a:rPr lang="en-US" sz="1200" kern="1200" dirty="0">
-                <a:solidFill>
-                  <a:schemeClr val="tx1"/>
-                </a:solidFill>
-                <a:effectLst/>
-                <a:latin typeface="+mn-lt"/>
-                <a:ea typeface="+mn-ea"/>
-                <a:cs typeface="+mn-cs"/>
-              </a:rPr>
-              <a:t>{\</a:t>
-            </a:r>
-            <a:r>
-              <a:rPr lang="en-US" sz="1200" kern="1200" dirty="0" err="1">
-                <a:solidFill>
-                  <a:schemeClr val="tx1"/>
-                </a:solidFill>
-                <a:effectLst/>
-                <a:latin typeface="+mn-lt"/>
-                <a:ea typeface="+mn-ea"/>
-                <a:cs typeface="+mn-cs"/>
-              </a:rPr>
-              <a:t>btheta</a:t>
-            </a:r>
-            <a:r>
-              <a:rPr lang="en-US" sz="1200" kern="1200" dirty="0">
-                <a:solidFill>
-                  <a:schemeClr val="tx1"/>
-                </a:solidFill>
-                <a:effectLst/>
-                <a:latin typeface="+mn-lt"/>
-                <a:ea typeface="+mn-ea"/>
-                <a:cs typeface="+mn-cs"/>
-              </a:rPr>
-              <a:t>}{\</a:t>
-            </a:r>
-            <a:r>
-              <a:rPr lang="en-US" sz="1200" kern="1200" dirty="0" err="1">
-                <a:solidFill>
-                  <a:schemeClr val="tx1"/>
-                </a:solidFill>
-                <a:effectLst/>
-                <a:latin typeface="+mn-lt"/>
-                <a:ea typeface="+mn-ea"/>
-                <a:cs typeface="+mn-cs"/>
-              </a:rPr>
-              <a:t>boldsymbol</a:t>
-            </a:r>
-            <a:r>
-              <a:rPr lang="en-US" sz="1200" kern="1200" dirty="0">
-                <a:solidFill>
-                  <a:schemeClr val="tx1"/>
-                </a:solidFill>
-                <a:effectLst/>
-                <a:latin typeface="+mn-lt"/>
-                <a:ea typeface="+mn-ea"/>
-                <a:cs typeface="+mn-cs"/>
-              </a:rPr>
-              <a:t>{\theta}}</a:t>
-            </a:r>
-          </a:p>
-          <a:p>
-            <a:r>
-              <a:rPr lang="en-US" sz="1200" kern="1200" dirty="0">
-                <a:solidFill>
-                  <a:schemeClr val="tx1"/>
-                </a:solidFill>
-                <a:effectLst/>
-                <a:latin typeface="+mn-lt"/>
-                <a:ea typeface="+mn-ea"/>
-                <a:cs typeface="+mn-cs"/>
-              </a:rPr>
-              <a:t>\</a:t>
-            </a:r>
-            <a:r>
-              <a:rPr lang="en-US" sz="1200" kern="1200" dirty="0" err="1">
-                <a:solidFill>
-                  <a:schemeClr val="tx1"/>
-                </a:solidFill>
-                <a:effectLst/>
-                <a:latin typeface="+mn-lt"/>
-                <a:ea typeface="+mn-ea"/>
-                <a:cs typeface="+mn-cs"/>
-              </a:rPr>
-              <a:t>newcommand</a:t>
-            </a:r>
-            <a:r>
-              <a:rPr lang="en-US" sz="1200" kern="1200" dirty="0">
-                <a:solidFill>
-                  <a:schemeClr val="tx1"/>
-                </a:solidFill>
-                <a:effectLst/>
-                <a:latin typeface="+mn-lt"/>
-                <a:ea typeface="+mn-ea"/>
-                <a:cs typeface="+mn-cs"/>
-              </a:rPr>
-              <a:t>{\</a:t>
-            </a:r>
-            <a:r>
-              <a:rPr lang="en-US" sz="1200" kern="1200" dirty="0" err="1">
-                <a:solidFill>
-                  <a:schemeClr val="tx1"/>
-                </a:solidFill>
-                <a:effectLst/>
-                <a:latin typeface="+mn-lt"/>
-                <a:ea typeface="+mn-ea"/>
-                <a:cs typeface="+mn-cs"/>
-              </a:rPr>
-              <a:t>beps</a:t>
-            </a:r>
-            <a:r>
-              <a:rPr lang="en-US" sz="1200" kern="1200" dirty="0">
-                <a:solidFill>
-                  <a:schemeClr val="tx1"/>
-                </a:solidFill>
-                <a:effectLst/>
-                <a:latin typeface="+mn-lt"/>
-                <a:ea typeface="+mn-ea"/>
-                <a:cs typeface="+mn-cs"/>
-              </a:rPr>
-              <a:t>}{\</a:t>
-            </a:r>
-            <a:r>
-              <a:rPr lang="en-US" sz="1200" kern="1200" dirty="0" err="1">
-                <a:solidFill>
-                  <a:schemeClr val="tx1"/>
-                </a:solidFill>
-                <a:effectLst/>
-                <a:latin typeface="+mn-lt"/>
-                <a:ea typeface="+mn-ea"/>
-                <a:cs typeface="+mn-cs"/>
-              </a:rPr>
-              <a:t>boldsymbol</a:t>
-            </a:r>
-            <a:r>
-              <a:rPr lang="en-US" sz="1200" kern="1200" dirty="0">
-                <a:solidFill>
-                  <a:schemeClr val="tx1"/>
-                </a:solidFill>
-                <a:effectLst/>
-                <a:latin typeface="+mn-lt"/>
-                <a:ea typeface="+mn-ea"/>
-                <a:cs typeface="+mn-cs"/>
-              </a:rPr>
-              <a:t>{\epsilon}}</a:t>
-            </a:r>
-          </a:p>
-          <a:p>
-            <a:r>
-              <a:rPr lang="en-US" sz="1200" kern="1200" dirty="0">
-                <a:solidFill>
-                  <a:schemeClr val="tx1"/>
-                </a:solidFill>
-                <a:effectLst/>
-                <a:latin typeface="+mn-lt"/>
-                <a:ea typeface="+mn-ea"/>
-                <a:cs typeface="+mn-cs"/>
-              </a:rPr>
-              <a:t>\</a:t>
-            </a:r>
-            <a:r>
-              <a:rPr lang="en-US" sz="1200" kern="1200" dirty="0" err="1">
-                <a:solidFill>
-                  <a:schemeClr val="tx1"/>
-                </a:solidFill>
-                <a:effectLst/>
-                <a:latin typeface="+mn-lt"/>
-                <a:ea typeface="+mn-ea"/>
-                <a:cs typeface="+mn-cs"/>
-              </a:rPr>
-              <a:t>newcommand</a:t>
-            </a:r>
-            <a:r>
-              <a:rPr lang="en-US" sz="1200" kern="1200" dirty="0">
-                <a:solidFill>
-                  <a:schemeClr val="tx1"/>
-                </a:solidFill>
-                <a:effectLst/>
-                <a:latin typeface="+mn-lt"/>
-                <a:ea typeface="+mn-ea"/>
-                <a:cs typeface="+mn-cs"/>
-              </a:rPr>
-              <a:t>{\E}{\</a:t>
-            </a:r>
-            <a:r>
-              <a:rPr lang="en-US" sz="1200" kern="1200" dirty="0" err="1">
-                <a:solidFill>
-                  <a:schemeClr val="tx1"/>
-                </a:solidFill>
-                <a:effectLst/>
-                <a:latin typeface="+mn-lt"/>
-                <a:ea typeface="+mn-ea"/>
-                <a:cs typeface="+mn-cs"/>
-              </a:rPr>
-              <a:t>mathbb</a:t>
-            </a:r>
-            <a:r>
-              <a:rPr lang="en-US" sz="1200" kern="1200" dirty="0">
-                <a:solidFill>
-                  <a:schemeClr val="tx1"/>
-                </a:solidFill>
-                <a:effectLst/>
-                <a:latin typeface="+mn-lt"/>
-                <a:ea typeface="+mn-ea"/>
-                <a:cs typeface="+mn-cs"/>
-              </a:rPr>
-              <a:t>{E}}</a:t>
-            </a:r>
-          </a:p>
-          <a:p>
-            <a:r>
-              <a:rPr lang="en-US" sz="1200" kern="1200" dirty="0">
-                <a:solidFill>
-                  <a:schemeClr val="tx1"/>
-                </a:solidFill>
-                <a:effectLst/>
-                <a:latin typeface="+mn-lt"/>
-                <a:ea typeface="+mn-ea"/>
-                <a:cs typeface="+mn-cs"/>
-              </a:rPr>
-              <a:t>\</a:t>
-            </a:r>
-            <a:r>
-              <a:rPr lang="en-US" sz="1200" kern="1200" dirty="0" err="1">
-                <a:solidFill>
-                  <a:schemeClr val="tx1"/>
-                </a:solidFill>
-                <a:effectLst/>
-                <a:latin typeface="+mn-lt"/>
-                <a:ea typeface="+mn-ea"/>
-                <a:cs typeface="+mn-cs"/>
-              </a:rPr>
-              <a:t>DeclareMathOperator</a:t>
-            </a:r>
-            <a:r>
-              <a:rPr lang="en-US" sz="1200" kern="1200" dirty="0">
-                <a:solidFill>
-                  <a:schemeClr val="tx1"/>
-                </a:solidFill>
-                <a:effectLst/>
-                <a:latin typeface="+mn-lt"/>
-                <a:ea typeface="+mn-ea"/>
-                <a:cs typeface="+mn-cs"/>
-              </a:rPr>
-              <a:t>{\</a:t>
-            </a:r>
-            <a:r>
-              <a:rPr lang="en-US" sz="1200" kern="1200" dirty="0" err="1">
-                <a:solidFill>
-                  <a:schemeClr val="tx1"/>
-                </a:solidFill>
-                <a:effectLst/>
-                <a:latin typeface="+mn-lt"/>
-                <a:ea typeface="+mn-ea"/>
-                <a:cs typeface="+mn-cs"/>
-              </a:rPr>
-              <a:t>cov</a:t>
-            </a:r>
-            <a:r>
-              <a:rPr lang="en-US" sz="1200" kern="1200" dirty="0">
-                <a:solidFill>
-                  <a:schemeClr val="tx1"/>
-                </a:solidFill>
-                <a:effectLst/>
-                <a:latin typeface="+mn-lt"/>
-                <a:ea typeface="+mn-ea"/>
-                <a:cs typeface="+mn-cs"/>
-              </a:rPr>
-              <a:t>}{</a:t>
-            </a:r>
-            <a:r>
-              <a:rPr lang="en-US" sz="1200" kern="1200" dirty="0" err="1">
-                <a:solidFill>
-                  <a:schemeClr val="tx1"/>
-                </a:solidFill>
-                <a:effectLst/>
-                <a:latin typeface="+mn-lt"/>
-                <a:ea typeface="+mn-ea"/>
-                <a:cs typeface="+mn-cs"/>
-              </a:rPr>
-              <a:t>cov</a:t>
-            </a:r>
-            <a:r>
-              <a:rPr lang="en-US" sz="1200" kern="1200" dirty="0">
-                <a:solidFill>
-                  <a:schemeClr val="tx1"/>
-                </a:solidFill>
-                <a:effectLst/>
-                <a:latin typeface="+mn-lt"/>
-                <a:ea typeface="+mn-ea"/>
-                <a:cs typeface="+mn-cs"/>
-              </a:rPr>
-              <a:t>}</a:t>
-            </a:r>
-          </a:p>
-          <a:p>
-            <a:endParaRPr lang="en-US" sz="1200" kern="1200" dirty="0">
-              <a:solidFill>
-                <a:schemeClr val="tx1"/>
-              </a:solidFill>
-              <a:effectLst/>
-              <a:latin typeface="+mn-lt"/>
-              <a:ea typeface="+mn-ea"/>
-              <a:cs typeface="+mn-cs"/>
-            </a:endParaRPr>
-          </a:p>
-          <a:p>
-            <a:endParaRPr lang="en-US" sz="1200" kern="1200" dirty="0">
-              <a:solidFill>
-                <a:schemeClr val="tx1"/>
-              </a:solidFill>
-              <a:effectLst/>
-              <a:latin typeface="+mn-lt"/>
-              <a:ea typeface="+mn-ea"/>
-              <a:cs typeface="+mn-cs"/>
-            </a:endParaRPr>
-          </a:p>
-          <a:p>
-            <a:r>
-              <a:rPr lang="en-US" sz="1200" kern="1200" dirty="0">
-                <a:solidFill>
-                  <a:schemeClr val="tx1"/>
-                </a:solidFill>
-                <a:effectLst/>
-                <a:latin typeface="+mn-lt"/>
-                <a:ea typeface="+mn-ea"/>
-                <a:cs typeface="+mn-cs"/>
-              </a:rPr>
-              <a:t>J_{k}^*(\x_{k}) &amp;= \min_{\u_{k}} \frac{1}{2}\left(\xu{k}^T\</a:t>
-            </a:r>
-            <a:r>
-              <a:rPr lang="en-US" sz="1200" kern="1200" dirty="0" err="1">
-                <a:solidFill>
-                  <a:schemeClr val="tx1"/>
-                </a:solidFill>
-                <a:effectLst/>
-                <a:latin typeface="+mn-lt"/>
-                <a:ea typeface="+mn-ea"/>
-                <a:cs typeface="+mn-cs"/>
-              </a:rPr>
-              <a:t>qrs</a:t>
-            </a:r>
-            <a:r>
-              <a:rPr lang="en-US" sz="1200" kern="1200" dirty="0">
-                <a:solidFill>
-                  <a:schemeClr val="tx1"/>
-                </a:solidFill>
-                <a:effectLst/>
-                <a:latin typeface="+mn-lt"/>
-                <a:ea typeface="+mn-ea"/>
-                <a:cs typeface="+mn-cs"/>
-              </a:rPr>
-              <a:t>{k}\xu{k} +\right.\\</a:t>
-            </a:r>
-          </a:p>
-          <a:p>
-            <a:r>
-              <a:rPr lang="en-US" sz="1200" kern="1200" dirty="0">
-                <a:solidFill>
-                  <a:schemeClr val="tx1"/>
-                </a:solidFill>
-                <a:effectLst/>
-                <a:latin typeface="+mn-lt"/>
-                <a:ea typeface="+mn-ea"/>
-                <a:cs typeface="+mn-cs"/>
-              </a:rPr>
-              <a:t>&amp;\</a:t>
-            </a:r>
-            <a:r>
-              <a:rPr lang="en-US" sz="1200" kern="1200" dirty="0" err="1">
-                <a:solidFill>
-                  <a:schemeClr val="tx1"/>
-                </a:solidFill>
-                <a:effectLst/>
-                <a:latin typeface="+mn-lt"/>
-                <a:ea typeface="+mn-ea"/>
-                <a:cs typeface="+mn-cs"/>
-              </a:rPr>
-              <a:t>qquad</a:t>
-            </a:r>
-            <a:r>
-              <a:rPr lang="en-US" sz="1200" kern="1200" dirty="0">
-                <a:solidFill>
-                  <a:schemeClr val="tx1"/>
-                </a:solidFill>
-                <a:effectLst/>
-                <a:latin typeface="+mn-lt"/>
-                <a:ea typeface="+mn-ea"/>
-                <a:cs typeface="+mn-cs"/>
-              </a:rPr>
-              <a:t>\</a:t>
-            </a:r>
-            <a:r>
-              <a:rPr lang="en-US" sz="1200" kern="1200" dirty="0" err="1">
-                <a:solidFill>
-                  <a:schemeClr val="tx1"/>
-                </a:solidFill>
-                <a:effectLst/>
-                <a:latin typeface="+mn-lt"/>
-                <a:ea typeface="+mn-ea"/>
-                <a:cs typeface="+mn-cs"/>
-              </a:rPr>
-              <a:t>qquad</a:t>
-            </a:r>
-            <a:r>
-              <a:rPr lang="en-US" sz="1200" kern="1200" dirty="0">
-                <a:solidFill>
-                  <a:schemeClr val="tx1"/>
-                </a:solidFill>
-                <a:effectLst/>
-                <a:latin typeface="+mn-lt"/>
-                <a:ea typeface="+mn-ea"/>
-                <a:cs typeface="+mn-cs"/>
-              </a:rPr>
-              <a:t>\</a:t>
-            </a:r>
-            <a:r>
-              <a:rPr lang="en-US" sz="1200" kern="1200" dirty="0" err="1">
-                <a:solidFill>
-                  <a:schemeClr val="tx1"/>
-                </a:solidFill>
-                <a:effectLst/>
-                <a:latin typeface="+mn-lt"/>
-                <a:ea typeface="+mn-ea"/>
-                <a:cs typeface="+mn-cs"/>
-              </a:rPr>
-              <a:t>qquad</a:t>
-            </a:r>
-            <a:r>
-              <a:rPr lang="en-US" sz="1200" kern="1200" dirty="0">
-                <a:solidFill>
-                  <a:schemeClr val="tx1"/>
-                </a:solidFill>
-                <a:effectLst/>
-                <a:latin typeface="+mn-lt"/>
-                <a:ea typeface="+mn-ea"/>
-                <a:cs typeface="+mn-cs"/>
-              </a:rPr>
-              <a:t> (A_{k} \x_{k} + B_{k}\u_{k})^T P_{k+1} (A_{k} \x_{k} + B_{k}\u_{k})\</a:t>
-            </a:r>
-            <a:r>
-              <a:rPr lang="en-US" sz="1200" kern="1200" dirty="0" err="1">
-                <a:solidFill>
-                  <a:schemeClr val="tx1"/>
-                </a:solidFill>
-                <a:effectLst/>
-                <a:latin typeface="+mn-lt"/>
-                <a:ea typeface="+mn-ea"/>
-                <a:cs typeface="+mn-cs"/>
-              </a:rPr>
-              <a:t>bigg</a:t>
-            </a:r>
-            <a:r>
-              <a:rPr lang="en-US" sz="1200" kern="1200" dirty="0">
-                <a:solidFill>
-                  <a:schemeClr val="tx1"/>
-                </a:solidFill>
-                <a:effectLst/>
-                <a:latin typeface="+mn-lt"/>
-                <a:ea typeface="+mn-ea"/>
-                <a:cs typeface="+mn-cs"/>
-              </a:rPr>
-              <a:t>)</a:t>
-            </a:r>
-          </a:p>
-          <a:p>
-            <a:endParaRPr lang="en-US" dirty="0"/>
-          </a:p>
-          <a:p>
-            <a:pPr marL="0" marR="0" lvl="0" indent="0" algn="l" defTabSz="914400" rtl="0" eaLnBrk="1" fontAlgn="auto" latinLnBrk="0" hangingPunct="1">
-              <a:lnSpc>
-                <a:spcPct val="100000"/>
-              </a:lnSpc>
-              <a:spcBef>
-                <a:spcPts val="0"/>
-              </a:spcBef>
-              <a:spcAft>
-                <a:spcPts val="0"/>
-              </a:spcAft>
-              <a:buClrTx/>
-              <a:buSzTx/>
-              <a:buFontTx/>
-              <a:buNone/>
-              <a:tabLst/>
-              <a:defRPr/>
-            </a:pPr>
-            <a:r>
-              <a:rPr lang="en-US" sz="1200" kern="1200" dirty="0">
-                <a:solidFill>
-                  <a:schemeClr val="tx1"/>
-                </a:solidFill>
-                <a:effectLst/>
-                <a:latin typeface="+mn-lt"/>
-                <a:ea typeface="+mn-ea"/>
-                <a:cs typeface="+mn-cs"/>
-              </a:rPr>
-              <a:t>\</a:t>
-            </a:r>
-            <a:r>
-              <a:rPr lang="en-US" sz="1200" kern="1200" dirty="0" err="1">
-                <a:solidFill>
-                  <a:schemeClr val="tx1"/>
-                </a:solidFill>
-                <a:effectLst/>
-                <a:latin typeface="+mn-lt"/>
-                <a:ea typeface="+mn-ea"/>
-                <a:cs typeface="+mn-cs"/>
-              </a:rPr>
-              <a:t>pi_k</a:t>
-            </a:r>
-            <a:r>
-              <a:rPr lang="en-US" sz="1200" kern="1200" dirty="0">
-                <a:solidFill>
-                  <a:schemeClr val="tx1"/>
-                </a:solidFill>
-                <a:effectLst/>
-                <a:latin typeface="+mn-lt"/>
-                <a:ea typeface="+mn-ea"/>
-                <a:cs typeface="+mn-cs"/>
-              </a:rPr>
-              <a:t>^*(\</a:t>
-            </a:r>
-            <a:r>
-              <a:rPr lang="en-US" sz="1200" kern="1200" dirty="0" err="1">
-                <a:solidFill>
-                  <a:schemeClr val="tx1"/>
-                </a:solidFill>
-                <a:effectLst/>
-                <a:latin typeface="+mn-lt"/>
-                <a:ea typeface="+mn-ea"/>
-                <a:cs typeface="+mn-cs"/>
-              </a:rPr>
-              <a:t>x_k</a:t>
-            </a:r>
-            <a:r>
-              <a:rPr lang="en-US" sz="1200" kern="1200" dirty="0">
-                <a:solidFill>
-                  <a:schemeClr val="tx1"/>
-                </a:solidFill>
-                <a:effectLst/>
-                <a:latin typeface="+mn-lt"/>
-                <a:ea typeface="+mn-ea"/>
-                <a:cs typeface="+mn-cs"/>
-              </a:rPr>
-              <a:t>) = </a:t>
-            </a:r>
-            <a:r>
-              <a:rPr lang="en-US" sz="1200" kern="1200" dirty="0" err="1">
-                <a:solidFill>
-                  <a:schemeClr val="tx1"/>
-                </a:solidFill>
-                <a:effectLst/>
-                <a:latin typeface="+mn-lt"/>
-                <a:ea typeface="+mn-ea"/>
-                <a:cs typeface="+mn-cs"/>
-              </a:rPr>
-              <a:t>F_k</a:t>
-            </a:r>
-            <a:r>
-              <a:rPr lang="en-US" sz="1200" kern="1200" dirty="0">
-                <a:solidFill>
-                  <a:schemeClr val="tx1"/>
-                </a:solidFill>
-                <a:effectLst/>
-                <a:latin typeface="+mn-lt"/>
-                <a:ea typeface="+mn-ea"/>
-                <a:cs typeface="+mn-cs"/>
-              </a:rPr>
-              <a:t> \</a:t>
-            </a:r>
-            <a:r>
-              <a:rPr lang="en-US" sz="1200" kern="1200" dirty="0" err="1">
-                <a:solidFill>
-                  <a:schemeClr val="tx1"/>
-                </a:solidFill>
-                <a:effectLst/>
-                <a:latin typeface="+mn-lt"/>
-                <a:ea typeface="+mn-ea"/>
-                <a:cs typeface="+mn-cs"/>
-              </a:rPr>
-              <a:t>x_k</a:t>
-            </a:r>
-            <a:endParaRPr lang="en-US" sz="1200" kern="1200" dirty="0">
-              <a:solidFill>
-                <a:schemeClr val="tx1"/>
-              </a:solidFill>
-              <a:effectLst/>
-              <a:latin typeface="+mn-lt"/>
-              <a:ea typeface="+mn-ea"/>
-              <a:cs typeface="+mn-cs"/>
-            </a:endParaRPr>
-          </a:p>
-          <a:p>
-            <a:endParaRPr lang="en-US" sz="1200" kern="1200" dirty="0">
-              <a:solidFill>
-                <a:schemeClr val="tx1"/>
-              </a:solidFill>
-              <a:effectLst/>
-              <a:latin typeface="+mn-lt"/>
-              <a:ea typeface="+mn-ea"/>
-              <a:cs typeface="+mn-cs"/>
-            </a:endParaRPr>
-          </a:p>
-          <a:p>
-            <a:endParaRPr lang="en-US" sz="1200" kern="1200" dirty="0">
-              <a:solidFill>
-                <a:schemeClr val="tx1"/>
-              </a:solidFill>
-              <a:effectLst/>
-              <a:latin typeface="+mn-lt"/>
-              <a:ea typeface="+mn-ea"/>
-              <a:cs typeface="+mn-cs"/>
-            </a:endParaRPr>
-          </a:p>
-          <a:p>
-            <a:pPr marL="0" marR="0" lvl="0" indent="0" algn="l" defTabSz="914400" rtl="0" eaLnBrk="1" fontAlgn="auto" latinLnBrk="0" hangingPunct="1">
-              <a:lnSpc>
-                <a:spcPct val="100000"/>
-              </a:lnSpc>
-              <a:spcBef>
-                <a:spcPts val="0"/>
-              </a:spcBef>
-              <a:spcAft>
-                <a:spcPts val="0"/>
-              </a:spcAft>
-              <a:buClrTx/>
-              <a:buSzTx/>
-              <a:buFontTx/>
-              <a:buNone/>
-              <a:tabLst/>
-              <a:defRPr/>
-            </a:pPr>
-            <a:r>
-              <a:rPr lang="en-US" sz="1200" kern="1200" dirty="0" err="1">
-                <a:solidFill>
-                  <a:schemeClr val="tx1"/>
-                </a:solidFill>
-                <a:effectLst/>
-                <a:latin typeface="+mn-lt"/>
-                <a:ea typeface="+mn-ea"/>
-                <a:cs typeface="+mn-cs"/>
-              </a:rPr>
-              <a:t>J_k</a:t>
-            </a:r>
-            <a:r>
-              <a:rPr lang="en-US" sz="1200" kern="1200" dirty="0">
-                <a:solidFill>
-                  <a:schemeClr val="tx1"/>
-                </a:solidFill>
-                <a:effectLst/>
-                <a:latin typeface="+mn-lt"/>
-                <a:ea typeface="+mn-ea"/>
-                <a:cs typeface="+mn-cs"/>
-              </a:rPr>
-              <a:t>^*(\</a:t>
-            </a:r>
-            <a:r>
-              <a:rPr lang="en-US" sz="1200" kern="1200" dirty="0" err="1">
-                <a:solidFill>
-                  <a:schemeClr val="tx1"/>
-                </a:solidFill>
-                <a:effectLst/>
-                <a:latin typeface="+mn-lt"/>
-                <a:ea typeface="+mn-ea"/>
-                <a:cs typeface="+mn-cs"/>
-              </a:rPr>
-              <a:t>x_k</a:t>
-            </a:r>
-            <a:r>
-              <a:rPr lang="en-US" sz="1200" kern="1200" dirty="0">
-                <a:solidFill>
-                  <a:schemeClr val="tx1"/>
-                </a:solidFill>
-                <a:effectLst/>
-                <a:latin typeface="+mn-lt"/>
-                <a:ea typeface="+mn-ea"/>
-                <a:cs typeface="+mn-cs"/>
-              </a:rPr>
-              <a:t>) = \frac{1}{2}\</a:t>
-            </a:r>
-            <a:r>
-              <a:rPr lang="en-US" sz="1200" kern="1200" dirty="0" err="1">
-                <a:solidFill>
-                  <a:schemeClr val="tx1"/>
-                </a:solidFill>
-                <a:effectLst/>
-                <a:latin typeface="+mn-lt"/>
-                <a:ea typeface="+mn-ea"/>
-                <a:cs typeface="+mn-cs"/>
-              </a:rPr>
-              <a:t>x_k^T</a:t>
-            </a:r>
-            <a:r>
-              <a:rPr lang="en-US" sz="1200" kern="1200" dirty="0">
-                <a:solidFill>
-                  <a:schemeClr val="tx1"/>
-                </a:solidFill>
-                <a:effectLst/>
-                <a:latin typeface="+mn-lt"/>
-                <a:ea typeface="+mn-ea"/>
-                <a:cs typeface="+mn-cs"/>
-              </a:rPr>
-              <a:t> </a:t>
-            </a:r>
-            <a:r>
-              <a:rPr lang="en-US" sz="1200" kern="1200" dirty="0" err="1">
-                <a:solidFill>
-                  <a:schemeClr val="tx1"/>
-                </a:solidFill>
-                <a:effectLst/>
-                <a:latin typeface="+mn-lt"/>
-                <a:ea typeface="+mn-ea"/>
-                <a:cs typeface="+mn-cs"/>
-              </a:rPr>
-              <a:t>P_k</a:t>
-            </a:r>
-            <a:r>
-              <a:rPr lang="en-US" sz="1200" kern="1200" dirty="0">
-                <a:solidFill>
-                  <a:schemeClr val="tx1"/>
-                </a:solidFill>
-                <a:effectLst/>
-                <a:latin typeface="+mn-lt"/>
-                <a:ea typeface="+mn-ea"/>
-                <a:cs typeface="+mn-cs"/>
-              </a:rPr>
-              <a:t> \</a:t>
-            </a:r>
-            <a:r>
-              <a:rPr lang="en-US" sz="1200" kern="1200" dirty="0" err="1">
-                <a:solidFill>
-                  <a:schemeClr val="tx1"/>
-                </a:solidFill>
-                <a:effectLst/>
-                <a:latin typeface="+mn-lt"/>
-                <a:ea typeface="+mn-ea"/>
-                <a:cs typeface="+mn-cs"/>
-              </a:rPr>
-              <a:t>x_k</a:t>
-            </a:r>
             <a:endParaRPr lang="en-US" dirty="0"/>
           </a:p>
         </p:txBody>
@@ -3885,1471 +1188,6 @@
           <a:bodyPr/>
           <a:lstStyle/>
           <a:p>
-            <a:r>
-              <a:rPr lang="en-US" sz="1200" kern="1200" dirty="0">
-                <a:solidFill>
-                  <a:schemeClr val="tx1"/>
-                </a:solidFill>
-                <a:effectLst/>
-                <a:latin typeface="+mn-lt"/>
-                <a:ea typeface="+mn-ea"/>
-                <a:cs typeface="+mn-cs"/>
-              </a:rPr>
-              <a:t>J_0(\x_0) &amp;= \frac{1}{2}\begin{</a:t>
-            </a:r>
-            <a:r>
-              <a:rPr lang="en-US" sz="1200" kern="1200" dirty="0" err="1">
-                <a:solidFill>
-                  <a:schemeClr val="tx1"/>
-                </a:solidFill>
-                <a:effectLst/>
-                <a:latin typeface="+mn-lt"/>
-                <a:ea typeface="+mn-ea"/>
-                <a:cs typeface="+mn-cs"/>
-              </a:rPr>
-              <a:t>bmatrix</a:t>
-            </a:r>
-            <a:r>
-              <a:rPr lang="en-US" sz="1200" kern="1200" dirty="0">
-                <a:solidFill>
-                  <a:schemeClr val="tx1"/>
-                </a:solidFill>
-                <a:effectLst/>
-                <a:latin typeface="+mn-lt"/>
-                <a:ea typeface="+mn-ea"/>
-                <a:cs typeface="+mn-cs"/>
-              </a:rPr>
-              <a:t>}\</a:t>
-            </a:r>
-            <a:r>
-              <a:rPr lang="en-US" sz="1200" kern="1200" dirty="0" err="1">
-                <a:solidFill>
-                  <a:schemeClr val="tx1"/>
-                </a:solidFill>
-                <a:effectLst/>
-                <a:latin typeface="+mn-lt"/>
-                <a:ea typeface="+mn-ea"/>
-                <a:cs typeface="+mn-cs"/>
-              </a:rPr>
-              <a:t>x_N</a:t>
-            </a:r>
-            <a:r>
-              <a:rPr lang="en-US" sz="1200" kern="1200" dirty="0">
-                <a:solidFill>
-                  <a:schemeClr val="tx1"/>
-                </a:solidFill>
-                <a:effectLst/>
-                <a:latin typeface="+mn-lt"/>
-                <a:ea typeface="+mn-ea"/>
-                <a:cs typeface="+mn-cs"/>
-              </a:rPr>
-              <a:t> \\ 1\end{</a:t>
-            </a:r>
-            <a:r>
-              <a:rPr lang="en-US" sz="1200" kern="1200" dirty="0" err="1">
-                <a:solidFill>
-                  <a:schemeClr val="tx1"/>
-                </a:solidFill>
-                <a:effectLst/>
-                <a:latin typeface="+mn-lt"/>
-                <a:ea typeface="+mn-ea"/>
-                <a:cs typeface="+mn-cs"/>
-              </a:rPr>
-              <a:t>bmatrix</a:t>
-            </a:r>
-            <a:r>
-              <a:rPr lang="en-US" sz="1200" kern="1200" dirty="0">
-                <a:solidFill>
-                  <a:schemeClr val="tx1"/>
-                </a:solidFill>
-                <a:effectLst/>
-                <a:latin typeface="+mn-lt"/>
-                <a:ea typeface="+mn-ea"/>
-                <a:cs typeface="+mn-cs"/>
-              </a:rPr>
-              <a:t>}^T \begin{</a:t>
-            </a:r>
-            <a:r>
-              <a:rPr lang="en-US" sz="1200" kern="1200" dirty="0" err="1">
-                <a:solidFill>
-                  <a:schemeClr val="tx1"/>
-                </a:solidFill>
-                <a:effectLst/>
-                <a:latin typeface="+mn-lt"/>
-                <a:ea typeface="+mn-ea"/>
-                <a:cs typeface="+mn-cs"/>
-              </a:rPr>
-              <a:t>bmatrix</a:t>
-            </a:r>
-            <a:r>
-              <a:rPr lang="en-US" sz="1200" kern="1200" dirty="0">
-                <a:solidFill>
-                  <a:schemeClr val="tx1"/>
-                </a:solidFill>
-                <a:effectLst/>
-                <a:latin typeface="+mn-lt"/>
-                <a:ea typeface="+mn-ea"/>
-                <a:cs typeface="+mn-cs"/>
-              </a:rPr>
-              <a:t>}Q_N &amp; \</a:t>
-            </a:r>
-            <a:r>
-              <a:rPr lang="en-US" sz="1200" kern="1200" dirty="0" err="1">
-                <a:solidFill>
-                  <a:schemeClr val="tx1"/>
-                </a:solidFill>
-                <a:effectLst/>
-                <a:latin typeface="+mn-lt"/>
-                <a:ea typeface="+mn-ea"/>
-                <a:cs typeface="+mn-cs"/>
-              </a:rPr>
-              <a:t>q_N</a:t>
-            </a:r>
-            <a:r>
-              <a:rPr lang="en-US" sz="1200" kern="1200" dirty="0">
-                <a:solidFill>
-                  <a:schemeClr val="tx1"/>
-                </a:solidFill>
-                <a:effectLst/>
-                <a:latin typeface="+mn-lt"/>
-                <a:ea typeface="+mn-ea"/>
-                <a:cs typeface="+mn-cs"/>
-              </a:rPr>
-              <a:t> \\ \</a:t>
-            </a:r>
-            <a:r>
-              <a:rPr lang="en-US" sz="1200" kern="1200" dirty="0" err="1">
-                <a:solidFill>
-                  <a:schemeClr val="tx1"/>
-                </a:solidFill>
-                <a:effectLst/>
-                <a:latin typeface="+mn-lt"/>
-                <a:ea typeface="+mn-ea"/>
-                <a:cs typeface="+mn-cs"/>
-              </a:rPr>
-              <a:t>q_N^T</a:t>
-            </a:r>
-            <a:r>
-              <a:rPr lang="en-US" sz="1200" kern="1200" dirty="0">
-                <a:solidFill>
-                  <a:schemeClr val="tx1"/>
-                </a:solidFill>
-                <a:effectLst/>
-                <a:latin typeface="+mn-lt"/>
-                <a:ea typeface="+mn-ea"/>
-                <a:cs typeface="+mn-cs"/>
-              </a:rPr>
-              <a:t> &amp; 2c_N \end{</a:t>
-            </a:r>
-            <a:r>
-              <a:rPr lang="en-US" sz="1200" kern="1200" dirty="0" err="1">
-                <a:solidFill>
-                  <a:schemeClr val="tx1"/>
-                </a:solidFill>
-                <a:effectLst/>
-                <a:latin typeface="+mn-lt"/>
-                <a:ea typeface="+mn-ea"/>
-                <a:cs typeface="+mn-cs"/>
-              </a:rPr>
-              <a:t>bmatrix</a:t>
-            </a:r>
-            <a:r>
-              <a:rPr lang="en-US" sz="1200" kern="1200" dirty="0">
-                <a:solidFill>
-                  <a:schemeClr val="tx1"/>
-                </a:solidFill>
-                <a:effectLst/>
-                <a:latin typeface="+mn-lt"/>
-                <a:ea typeface="+mn-ea"/>
-                <a:cs typeface="+mn-cs"/>
-              </a:rPr>
-              <a:t>}\begin{</a:t>
-            </a:r>
-            <a:r>
-              <a:rPr lang="en-US" sz="1200" kern="1200" dirty="0" err="1">
-                <a:solidFill>
-                  <a:schemeClr val="tx1"/>
-                </a:solidFill>
-                <a:effectLst/>
-                <a:latin typeface="+mn-lt"/>
-                <a:ea typeface="+mn-ea"/>
-                <a:cs typeface="+mn-cs"/>
-              </a:rPr>
-              <a:t>bmatrix</a:t>
-            </a:r>
-            <a:r>
-              <a:rPr lang="en-US" sz="1200" kern="1200" dirty="0">
-                <a:solidFill>
-                  <a:schemeClr val="tx1"/>
-                </a:solidFill>
-                <a:effectLst/>
-                <a:latin typeface="+mn-lt"/>
-                <a:ea typeface="+mn-ea"/>
-                <a:cs typeface="+mn-cs"/>
-              </a:rPr>
-              <a:t>}\</a:t>
-            </a:r>
-            <a:r>
-              <a:rPr lang="en-US" sz="1200" kern="1200" dirty="0" err="1">
-                <a:solidFill>
-                  <a:schemeClr val="tx1"/>
-                </a:solidFill>
-                <a:effectLst/>
-                <a:latin typeface="+mn-lt"/>
-                <a:ea typeface="+mn-ea"/>
-                <a:cs typeface="+mn-cs"/>
-              </a:rPr>
-              <a:t>x_N</a:t>
-            </a:r>
-            <a:r>
-              <a:rPr lang="en-US" sz="1200" kern="1200" dirty="0">
-                <a:solidFill>
-                  <a:schemeClr val="tx1"/>
-                </a:solidFill>
-                <a:effectLst/>
-                <a:latin typeface="+mn-lt"/>
-                <a:ea typeface="+mn-ea"/>
-                <a:cs typeface="+mn-cs"/>
-              </a:rPr>
-              <a:t> \\ 1\end{</a:t>
-            </a:r>
-            <a:r>
-              <a:rPr lang="en-US" sz="1200" kern="1200" dirty="0" err="1">
-                <a:solidFill>
-                  <a:schemeClr val="tx1"/>
-                </a:solidFill>
-                <a:effectLst/>
-                <a:latin typeface="+mn-lt"/>
-                <a:ea typeface="+mn-ea"/>
-                <a:cs typeface="+mn-cs"/>
-              </a:rPr>
-              <a:t>bmatrix</a:t>
-            </a:r>
-            <a:r>
-              <a:rPr lang="en-US" sz="1200" kern="1200" dirty="0">
-                <a:solidFill>
-                  <a:schemeClr val="tx1"/>
-                </a:solidFill>
-                <a:effectLst/>
-                <a:latin typeface="+mn-lt"/>
-                <a:ea typeface="+mn-ea"/>
-                <a:cs typeface="+mn-cs"/>
-              </a:rPr>
-              <a:t>} +\\</a:t>
-            </a:r>
-          </a:p>
-          <a:p>
-            <a:r>
-              <a:rPr lang="en-US" sz="1200" kern="1200" dirty="0">
-                <a:solidFill>
-                  <a:schemeClr val="tx1"/>
-                </a:solidFill>
-                <a:effectLst/>
-                <a:latin typeface="+mn-lt"/>
-                <a:ea typeface="+mn-ea"/>
-                <a:cs typeface="+mn-cs"/>
-              </a:rPr>
-              <a:t>          &amp;\</a:t>
-            </a:r>
-            <a:r>
-              <a:rPr lang="en-US" sz="1200" kern="1200" dirty="0" err="1">
-                <a:solidFill>
-                  <a:schemeClr val="tx1"/>
-                </a:solidFill>
-                <a:effectLst/>
-                <a:latin typeface="+mn-lt"/>
-                <a:ea typeface="+mn-ea"/>
-                <a:cs typeface="+mn-cs"/>
-              </a:rPr>
-              <a:t>qquad</a:t>
-            </a:r>
-            <a:r>
-              <a:rPr lang="en-US" sz="1200" kern="1200" dirty="0">
-                <a:solidFill>
-                  <a:schemeClr val="tx1"/>
-                </a:solidFill>
-                <a:effectLst/>
-                <a:latin typeface="+mn-lt"/>
-                <a:ea typeface="+mn-ea"/>
-                <a:cs typeface="+mn-cs"/>
-              </a:rPr>
-              <a:t>\frac{1}{2}\sum_{k=0}^{N-1} \left(\begin{</a:t>
-            </a:r>
-            <a:r>
-              <a:rPr lang="en-US" sz="1200" kern="1200" dirty="0" err="1">
-                <a:solidFill>
-                  <a:schemeClr val="tx1"/>
-                </a:solidFill>
-                <a:effectLst/>
-                <a:latin typeface="+mn-lt"/>
-                <a:ea typeface="+mn-ea"/>
-                <a:cs typeface="+mn-cs"/>
-              </a:rPr>
-              <a:t>bmatrix</a:t>
-            </a:r>
-            <a:r>
-              <a:rPr lang="en-US" sz="1200" kern="1200" dirty="0">
-                <a:solidFill>
-                  <a:schemeClr val="tx1"/>
-                </a:solidFill>
-                <a:effectLst/>
-                <a:latin typeface="+mn-lt"/>
-                <a:ea typeface="+mn-ea"/>
-                <a:cs typeface="+mn-cs"/>
-              </a:rPr>
-              <a:t>}\</a:t>
-            </a:r>
-            <a:r>
-              <a:rPr lang="en-US" sz="1200" kern="1200" dirty="0" err="1">
-                <a:solidFill>
-                  <a:schemeClr val="tx1"/>
-                </a:solidFill>
-                <a:effectLst/>
-                <a:latin typeface="+mn-lt"/>
-                <a:ea typeface="+mn-ea"/>
-                <a:cs typeface="+mn-cs"/>
-              </a:rPr>
-              <a:t>x_k</a:t>
-            </a:r>
-            <a:r>
-              <a:rPr lang="en-US" sz="1200" kern="1200" dirty="0">
-                <a:solidFill>
-                  <a:schemeClr val="tx1"/>
-                </a:solidFill>
-                <a:effectLst/>
-                <a:latin typeface="+mn-lt"/>
-                <a:ea typeface="+mn-ea"/>
-                <a:cs typeface="+mn-cs"/>
-              </a:rPr>
-              <a:t> \\ 1\end{</a:t>
-            </a:r>
-            <a:r>
-              <a:rPr lang="en-US" sz="1200" kern="1200" dirty="0" err="1">
-                <a:solidFill>
-                  <a:schemeClr val="tx1"/>
-                </a:solidFill>
-                <a:effectLst/>
-                <a:latin typeface="+mn-lt"/>
-                <a:ea typeface="+mn-ea"/>
-                <a:cs typeface="+mn-cs"/>
-              </a:rPr>
-              <a:t>bmatrix</a:t>
-            </a:r>
-            <a:r>
-              <a:rPr lang="en-US" sz="1200" kern="1200" dirty="0">
-                <a:solidFill>
-                  <a:schemeClr val="tx1"/>
-                </a:solidFill>
-                <a:effectLst/>
-                <a:latin typeface="+mn-lt"/>
-                <a:ea typeface="+mn-ea"/>
-                <a:cs typeface="+mn-cs"/>
-              </a:rPr>
-              <a:t>}^T \begin{</a:t>
-            </a:r>
-            <a:r>
-              <a:rPr lang="en-US" sz="1200" kern="1200" dirty="0" err="1">
-                <a:solidFill>
-                  <a:schemeClr val="tx1"/>
-                </a:solidFill>
-                <a:effectLst/>
-                <a:latin typeface="+mn-lt"/>
-                <a:ea typeface="+mn-ea"/>
-                <a:cs typeface="+mn-cs"/>
-              </a:rPr>
-              <a:t>bmatrix</a:t>
-            </a:r>
-            <a:r>
-              <a:rPr lang="en-US" sz="1200" kern="1200" dirty="0">
-                <a:solidFill>
-                  <a:schemeClr val="tx1"/>
-                </a:solidFill>
-                <a:effectLst/>
-                <a:latin typeface="+mn-lt"/>
-                <a:ea typeface="+mn-ea"/>
-                <a:cs typeface="+mn-cs"/>
-              </a:rPr>
-              <a:t>}</a:t>
-            </a:r>
-            <a:r>
-              <a:rPr lang="en-US" sz="1200" kern="1200" dirty="0" err="1">
-                <a:solidFill>
-                  <a:schemeClr val="tx1"/>
-                </a:solidFill>
-                <a:effectLst/>
-                <a:latin typeface="+mn-lt"/>
-                <a:ea typeface="+mn-ea"/>
-                <a:cs typeface="+mn-cs"/>
-              </a:rPr>
-              <a:t>Q_k</a:t>
-            </a:r>
-            <a:r>
-              <a:rPr lang="en-US" sz="1200" kern="1200" dirty="0">
-                <a:solidFill>
-                  <a:schemeClr val="tx1"/>
-                </a:solidFill>
-                <a:effectLst/>
-                <a:latin typeface="+mn-lt"/>
-                <a:ea typeface="+mn-ea"/>
-                <a:cs typeface="+mn-cs"/>
-              </a:rPr>
-              <a:t> &amp; \</a:t>
-            </a:r>
-            <a:r>
-              <a:rPr lang="en-US" sz="1200" kern="1200" dirty="0" err="1">
-                <a:solidFill>
-                  <a:schemeClr val="tx1"/>
-                </a:solidFill>
-                <a:effectLst/>
-                <a:latin typeface="+mn-lt"/>
-                <a:ea typeface="+mn-ea"/>
-                <a:cs typeface="+mn-cs"/>
-              </a:rPr>
-              <a:t>q_k</a:t>
-            </a:r>
-            <a:r>
-              <a:rPr lang="en-US" sz="1200" kern="1200" dirty="0">
-                <a:solidFill>
-                  <a:schemeClr val="tx1"/>
-                </a:solidFill>
-                <a:effectLst/>
-                <a:latin typeface="+mn-lt"/>
-                <a:ea typeface="+mn-ea"/>
-                <a:cs typeface="+mn-cs"/>
-              </a:rPr>
-              <a:t> \\ \</a:t>
-            </a:r>
-            <a:r>
-              <a:rPr lang="en-US" sz="1200" kern="1200" dirty="0" err="1">
-                <a:solidFill>
-                  <a:schemeClr val="tx1"/>
-                </a:solidFill>
-                <a:effectLst/>
-                <a:latin typeface="+mn-lt"/>
-                <a:ea typeface="+mn-ea"/>
-                <a:cs typeface="+mn-cs"/>
-              </a:rPr>
-              <a:t>q_k^T</a:t>
-            </a:r>
-            <a:r>
-              <a:rPr lang="en-US" sz="1200" kern="1200" dirty="0">
-                <a:solidFill>
-                  <a:schemeClr val="tx1"/>
-                </a:solidFill>
-                <a:effectLst/>
-                <a:latin typeface="+mn-lt"/>
-                <a:ea typeface="+mn-ea"/>
-                <a:cs typeface="+mn-cs"/>
-              </a:rPr>
-              <a:t> &amp; 2c_k \end{</a:t>
-            </a:r>
-            <a:r>
-              <a:rPr lang="en-US" sz="1200" kern="1200" dirty="0" err="1">
-                <a:solidFill>
-                  <a:schemeClr val="tx1"/>
-                </a:solidFill>
-                <a:effectLst/>
-                <a:latin typeface="+mn-lt"/>
-                <a:ea typeface="+mn-ea"/>
-                <a:cs typeface="+mn-cs"/>
-              </a:rPr>
-              <a:t>bmatrix</a:t>
-            </a:r>
-            <a:r>
-              <a:rPr lang="en-US" sz="1200" kern="1200" dirty="0">
-                <a:solidFill>
-                  <a:schemeClr val="tx1"/>
-                </a:solidFill>
-                <a:effectLst/>
-                <a:latin typeface="+mn-lt"/>
-                <a:ea typeface="+mn-ea"/>
-                <a:cs typeface="+mn-cs"/>
-              </a:rPr>
-              <a:t>} \begin{</a:t>
-            </a:r>
-            <a:r>
-              <a:rPr lang="en-US" sz="1200" kern="1200" dirty="0" err="1">
-                <a:solidFill>
-                  <a:schemeClr val="tx1"/>
-                </a:solidFill>
-                <a:effectLst/>
-                <a:latin typeface="+mn-lt"/>
-                <a:ea typeface="+mn-ea"/>
-                <a:cs typeface="+mn-cs"/>
-              </a:rPr>
-              <a:t>bmatrix</a:t>
-            </a:r>
-            <a:r>
-              <a:rPr lang="en-US" sz="1200" kern="1200" dirty="0">
-                <a:solidFill>
-                  <a:schemeClr val="tx1"/>
-                </a:solidFill>
-                <a:effectLst/>
-                <a:latin typeface="+mn-lt"/>
-                <a:ea typeface="+mn-ea"/>
-                <a:cs typeface="+mn-cs"/>
-              </a:rPr>
-              <a:t>}\</a:t>
-            </a:r>
-            <a:r>
-              <a:rPr lang="en-US" sz="1200" kern="1200" dirty="0" err="1">
-                <a:solidFill>
-                  <a:schemeClr val="tx1"/>
-                </a:solidFill>
-                <a:effectLst/>
-                <a:latin typeface="+mn-lt"/>
-                <a:ea typeface="+mn-ea"/>
-                <a:cs typeface="+mn-cs"/>
-              </a:rPr>
-              <a:t>x_k</a:t>
-            </a:r>
-            <a:r>
-              <a:rPr lang="en-US" sz="1200" kern="1200" dirty="0">
-                <a:solidFill>
-                  <a:schemeClr val="tx1"/>
-                </a:solidFill>
-                <a:effectLst/>
-                <a:latin typeface="+mn-lt"/>
-                <a:ea typeface="+mn-ea"/>
-                <a:cs typeface="+mn-cs"/>
-              </a:rPr>
-              <a:t> \\ 1\end{</a:t>
-            </a:r>
-            <a:r>
-              <a:rPr lang="en-US" sz="1200" kern="1200" dirty="0" err="1">
-                <a:solidFill>
-                  <a:schemeClr val="tx1"/>
-                </a:solidFill>
-                <a:effectLst/>
-                <a:latin typeface="+mn-lt"/>
-                <a:ea typeface="+mn-ea"/>
-                <a:cs typeface="+mn-cs"/>
-              </a:rPr>
-              <a:t>bmatrix</a:t>
-            </a:r>
-            <a:r>
-              <a:rPr lang="en-US" sz="1200" kern="1200" dirty="0">
-                <a:solidFill>
-                  <a:schemeClr val="tx1"/>
-                </a:solidFill>
-                <a:effectLst/>
-                <a:latin typeface="+mn-lt"/>
-                <a:ea typeface="+mn-ea"/>
-                <a:cs typeface="+mn-cs"/>
-              </a:rPr>
-              <a:t>} + \</a:t>
-            </a:r>
-            <a:r>
-              <a:rPr lang="en-US" sz="1200" kern="1200" dirty="0" err="1">
-                <a:solidFill>
-                  <a:schemeClr val="tx1"/>
-                </a:solidFill>
-                <a:effectLst/>
-                <a:latin typeface="+mn-lt"/>
-                <a:ea typeface="+mn-ea"/>
-                <a:cs typeface="+mn-cs"/>
-              </a:rPr>
-              <a:t>u_k^T</a:t>
-            </a:r>
-            <a:r>
-              <a:rPr lang="en-US" sz="1200" kern="1200" dirty="0">
-                <a:solidFill>
-                  <a:schemeClr val="tx1"/>
-                </a:solidFill>
-                <a:effectLst/>
-                <a:latin typeface="+mn-lt"/>
-                <a:ea typeface="+mn-ea"/>
-                <a:cs typeface="+mn-cs"/>
-              </a:rPr>
-              <a:t> </a:t>
-            </a:r>
-            <a:r>
-              <a:rPr lang="en-US" sz="1200" kern="1200" dirty="0" err="1">
-                <a:solidFill>
-                  <a:schemeClr val="tx1"/>
-                </a:solidFill>
-                <a:effectLst/>
-                <a:latin typeface="+mn-lt"/>
-                <a:ea typeface="+mn-ea"/>
-                <a:cs typeface="+mn-cs"/>
-              </a:rPr>
-              <a:t>R_k</a:t>
-            </a:r>
-            <a:r>
-              <a:rPr lang="en-US" sz="1200" kern="1200" dirty="0">
-                <a:solidFill>
-                  <a:schemeClr val="tx1"/>
-                </a:solidFill>
-                <a:effectLst/>
-                <a:latin typeface="+mn-lt"/>
-                <a:ea typeface="+mn-ea"/>
-                <a:cs typeface="+mn-cs"/>
-              </a:rPr>
-              <a:t> \</a:t>
-            </a:r>
-            <a:r>
-              <a:rPr lang="en-US" sz="1200" kern="1200" dirty="0" err="1">
-                <a:solidFill>
-                  <a:schemeClr val="tx1"/>
-                </a:solidFill>
-                <a:effectLst/>
-                <a:latin typeface="+mn-lt"/>
-                <a:ea typeface="+mn-ea"/>
-                <a:cs typeface="+mn-cs"/>
-              </a:rPr>
-              <a:t>u_k</a:t>
-            </a:r>
-            <a:r>
-              <a:rPr lang="en-US" sz="1200" kern="1200" dirty="0">
-                <a:solidFill>
-                  <a:schemeClr val="tx1"/>
-                </a:solidFill>
-                <a:effectLst/>
-                <a:latin typeface="+mn-lt"/>
-                <a:ea typeface="+mn-ea"/>
-                <a:cs typeface="+mn-cs"/>
-              </a:rPr>
-              <a:t> + 2 \begin{</a:t>
-            </a:r>
-            <a:r>
-              <a:rPr lang="en-US" sz="1200" kern="1200" dirty="0" err="1">
-                <a:solidFill>
-                  <a:schemeClr val="tx1"/>
-                </a:solidFill>
-                <a:effectLst/>
-                <a:latin typeface="+mn-lt"/>
-                <a:ea typeface="+mn-ea"/>
-                <a:cs typeface="+mn-cs"/>
-              </a:rPr>
-              <a:t>bmatrix</a:t>
-            </a:r>
-            <a:r>
-              <a:rPr lang="en-US" sz="1200" kern="1200" dirty="0">
-                <a:solidFill>
-                  <a:schemeClr val="tx1"/>
-                </a:solidFill>
-                <a:effectLst/>
-                <a:latin typeface="+mn-lt"/>
-                <a:ea typeface="+mn-ea"/>
-                <a:cs typeface="+mn-cs"/>
-              </a:rPr>
-              <a:t>}\</a:t>
-            </a:r>
-            <a:r>
-              <a:rPr lang="en-US" sz="1200" kern="1200" dirty="0" err="1">
-                <a:solidFill>
-                  <a:schemeClr val="tx1"/>
-                </a:solidFill>
-                <a:effectLst/>
-                <a:latin typeface="+mn-lt"/>
-                <a:ea typeface="+mn-ea"/>
-                <a:cs typeface="+mn-cs"/>
-              </a:rPr>
-              <a:t>x_k</a:t>
-            </a:r>
-            <a:r>
-              <a:rPr lang="en-US" sz="1200" kern="1200" dirty="0">
-                <a:solidFill>
-                  <a:schemeClr val="tx1"/>
-                </a:solidFill>
-                <a:effectLst/>
-                <a:latin typeface="+mn-lt"/>
-                <a:ea typeface="+mn-ea"/>
-                <a:cs typeface="+mn-cs"/>
-              </a:rPr>
-              <a:t> \\ 1\end{</a:t>
-            </a:r>
-            <a:r>
-              <a:rPr lang="en-US" sz="1200" kern="1200" dirty="0" err="1">
-                <a:solidFill>
-                  <a:schemeClr val="tx1"/>
-                </a:solidFill>
-                <a:effectLst/>
-                <a:latin typeface="+mn-lt"/>
-                <a:ea typeface="+mn-ea"/>
-                <a:cs typeface="+mn-cs"/>
-              </a:rPr>
-              <a:t>bmatrix</a:t>
-            </a:r>
-            <a:r>
-              <a:rPr lang="en-US" sz="1200" kern="1200" dirty="0">
-                <a:solidFill>
-                  <a:schemeClr val="tx1"/>
-                </a:solidFill>
-                <a:effectLst/>
-                <a:latin typeface="+mn-lt"/>
-                <a:ea typeface="+mn-ea"/>
-                <a:cs typeface="+mn-cs"/>
-              </a:rPr>
-              <a:t>}^T \begin{</a:t>
-            </a:r>
-            <a:r>
-              <a:rPr lang="en-US" sz="1200" kern="1200" dirty="0" err="1">
-                <a:solidFill>
-                  <a:schemeClr val="tx1"/>
-                </a:solidFill>
-                <a:effectLst/>
-                <a:latin typeface="+mn-lt"/>
-                <a:ea typeface="+mn-ea"/>
-                <a:cs typeface="+mn-cs"/>
-              </a:rPr>
-              <a:t>bmatrix</a:t>
-            </a:r>
-            <a:r>
-              <a:rPr lang="en-US" sz="1200" kern="1200" dirty="0">
-                <a:solidFill>
-                  <a:schemeClr val="tx1"/>
-                </a:solidFill>
-                <a:effectLst/>
-                <a:latin typeface="+mn-lt"/>
-                <a:ea typeface="+mn-ea"/>
-                <a:cs typeface="+mn-cs"/>
-              </a:rPr>
-              <a:t>}</a:t>
-            </a:r>
-            <a:r>
-              <a:rPr lang="en-US" sz="1200" kern="1200" dirty="0" err="1">
-                <a:solidFill>
-                  <a:schemeClr val="tx1"/>
-                </a:solidFill>
-                <a:effectLst/>
-                <a:latin typeface="+mn-lt"/>
-                <a:ea typeface="+mn-ea"/>
-                <a:cs typeface="+mn-cs"/>
-              </a:rPr>
-              <a:t>H_k</a:t>
-            </a:r>
-            <a:r>
-              <a:rPr lang="en-US" sz="1200" kern="1200" dirty="0">
-                <a:solidFill>
-                  <a:schemeClr val="tx1"/>
-                </a:solidFill>
-                <a:effectLst/>
-                <a:latin typeface="+mn-lt"/>
-                <a:ea typeface="+mn-ea"/>
-                <a:cs typeface="+mn-cs"/>
-              </a:rPr>
-              <a:t> \\ \</a:t>
-            </a:r>
-            <a:r>
-              <a:rPr lang="en-US" sz="1200" kern="1200" dirty="0" err="1">
-                <a:solidFill>
-                  <a:schemeClr val="tx1"/>
-                </a:solidFill>
-                <a:effectLst/>
-                <a:latin typeface="+mn-lt"/>
-                <a:ea typeface="+mn-ea"/>
-                <a:cs typeface="+mn-cs"/>
-              </a:rPr>
-              <a:t>r_k^T</a:t>
-            </a:r>
-            <a:r>
-              <a:rPr lang="en-US" sz="1200" kern="1200" dirty="0">
-                <a:solidFill>
-                  <a:schemeClr val="tx1"/>
-                </a:solidFill>
-                <a:effectLst/>
-                <a:latin typeface="+mn-lt"/>
-                <a:ea typeface="+mn-ea"/>
-                <a:cs typeface="+mn-cs"/>
-              </a:rPr>
-              <a:t>\end{</a:t>
-            </a:r>
-            <a:r>
-              <a:rPr lang="en-US" sz="1200" kern="1200" dirty="0" err="1">
-                <a:solidFill>
-                  <a:schemeClr val="tx1"/>
-                </a:solidFill>
-                <a:effectLst/>
-                <a:latin typeface="+mn-lt"/>
-                <a:ea typeface="+mn-ea"/>
-                <a:cs typeface="+mn-cs"/>
-              </a:rPr>
-              <a:t>bmatrix</a:t>
-            </a:r>
-            <a:r>
-              <a:rPr lang="en-US" sz="1200" kern="1200" dirty="0">
-                <a:solidFill>
-                  <a:schemeClr val="tx1"/>
-                </a:solidFill>
-                <a:effectLst/>
-                <a:latin typeface="+mn-lt"/>
-                <a:ea typeface="+mn-ea"/>
-                <a:cs typeface="+mn-cs"/>
-              </a:rPr>
-              <a:t>} \</a:t>
-            </a:r>
-            <a:r>
-              <a:rPr lang="en-US" sz="1200" kern="1200" dirty="0" err="1">
-                <a:solidFill>
-                  <a:schemeClr val="tx1"/>
-                </a:solidFill>
-                <a:effectLst/>
-                <a:latin typeface="+mn-lt"/>
-                <a:ea typeface="+mn-ea"/>
-                <a:cs typeface="+mn-cs"/>
-              </a:rPr>
-              <a:t>u_k</a:t>
-            </a:r>
-            <a:r>
-              <a:rPr lang="en-US" sz="1200" kern="1200" dirty="0">
-                <a:solidFill>
-                  <a:schemeClr val="tx1"/>
-                </a:solidFill>
-                <a:effectLst/>
-                <a:latin typeface="+mn-lt"/>
-                <a:ea typeface="+mn-ea"/>
-                <a:cs typeface="+mn-cs"/>
-              </a:rPr>
-              <a:t>\right)</a:t>
-            </a:r>
-          </a:p>
-          <a:p>
-            <a:endParaRPr lang="en-US" sz="1200" kern="1200" dirty="0">
-              <a:solidFill>
-                <a:schemeClr val="tx1"/>
-              </a:solidFill>
-              <a:effectLst/>
-              <a:latin typeface="+mn-lt"/>
-              <a:ea typeface="+mn-ea"/>
-              <a:cs typeface="+mn-cs"/>
-            </a:endParaRPr>
-          </a:p>
-          <a:p>
-            <a:pPr marL="0" marR="0" lvl="0" indent="0" algn="l" defTabSz="914400" rtl="0" eaLnBrk="1" fontAlgn="auto" latinLnBrk="0" hangingPunct="1">
-              <a:lnSpc>
-                <a:spcPct val="100000"/>
-              </a:lnSpc>
-              <a:spcBef>
-                <a:spcPts val="0"/>
-              </a:spcBef>
-              <a:spcAft>
-                <a:spcPts val="0"/>
-              </a:spcAft>
-              <a:buClrTx/>
-              <a:buSzTx/>
-              <a:buFontTx/>
-              <a:buNone/>
-              <a:tabLst/>
-              <a:defRPr/>
-            </a:pPr>
-            <a:r>
-              <a:rPr lang="en-US" sz="1200" kern="1200" dirty="0">
-                <a:solidFill>
-                  <a:schemeClr val="tx1"/>
-                </a:solidFill>
-                <a:effectLst/>
-                <a:latin typeface="+mn-lt"/>
-                <a:ea typeface="+mn-ea"/>
-                <a:cs typeface="+mn-cs"/>
-              </a:rPr>
-              <a:t>\</a:t>
-            </a:r>
-            <a:r>
-              <a:rPr lang="en-US" sz="1200" kern="1200" dirty="0" err="1">
-                <a:solidFill>
-                  <a:schemeClr val="tx1"/>
-                </a:solidFill>
-                <a:effectLst/>
-                <a:latin typeface="+mn-lt"/>
-                <a:ea typeface="+mn-ea"/>
-                <a:cs typeface="+mn-cs"/>
-              </a:rPr>
-              <a:t>pi_k</a:t>
-            </a:r>
-            <a:r>
-              <a:rPr lang="en-US" sz="1200" kern="1200" dirty="0">
-                <a:solidFill>
-                  <a:schemeClr val="tx1"/>
-                </a:solidFill>
-                <a:effectLst/>
-                <a:latin typeface="+mn-lt"/>
-                <a:ea typeface="+mn-ea"/>
-                <a:cs typeface="+mn-cs"/>
-              </a:rPr>
-              <a:t>^*(\</a:t>
-            </a:r>
-            <a:r>
-              <a:rPr lang="en-US" sz="1200" kern="1200" dirty="0" err="1">
-                <a:solidFill>
-                  <a:schemeClr val="tx1"/>
-                </a:solidFill>
-                <a:effectLst/>
-                <a:latin typeface="+mn-lt"/>
-                <a:ea typeface="+mn-ea"/>
-                <a:cs typeface="+mn-cs"/>
-              </a:rPr>
-              <a:t>x_k</a:t>
-            </a:r>
-            <a:r>
-              <a:rPr lang="en-US" sz="1200" kern="1200" dirty="0">
-                <a:solidFill>
-                  <a:schemeClr val="tx1"/>
-                </a:solidFill>
-                <a:effectLst/>
-                <a:latin typeface="+mn-lt"/>
-                <a:ea typeface="+mn-ea"/>
-                <a:cs typeface="+mn-cs"/>
-              </a:rPr>
-              <a:t>) = \begin{</a:t>
-            </a:r>
-            <a:r>
-              <a:rPr lang="en-US" sz="1200" kern="1200" dirty="0" err="1">
-                <a:solidFill>
-                  <a:schemeClr val="tx1"/>
-                </a:solidFill>
-                <a:effectLst/>
-                <a:latin typeface="+mn-lt"/>
-                <a:ea typeface="+mn-ea"/>
-                <a:cs typeface="+mn-cs"/>
-              </a:rPr>
-              <a:t>bmatrix</a:t>
-            </a:r>
-            <a:r>
-              <a:rPr lang="en-US" sz="1200" kern="1200" dirty="0">
-                <a:solidFill>
-                  <a:schemeClr val="tx1"/>
-                </a:solidFill>
-                <a:effectLst/>
-                <a:latin typeface="+mn-lt"/>
-                <a:ea typeface="+mn-ea"/>
-                <a:cs typeface="+mn-cs"/>
-              </a:rPr>
-              <a:t>}</a:t>
-            </a:r>
-            <a:r>
-              <a:rPr lang="en-US" sz="1200" kern="1200" dirty="0" err="1">
-                <a:solidFill>
-                  <a:schemeClr val="tx1"/>
-                </a:solidFill>
-                <a:effectLst/>
-                <a:latin typeface="+mn-lt"/>
-                <a:ea typeface="+mn-ea"/>
-                <a:cs typeface="+mn-cs"/>
-              </a:rPr>
-              <a:t>L_k</a:t>
-            </a:r>
-            <a:r>
-              <a:rPr lang="en-US" sz="1200" kern="1200" dirty="0">
-                <a:solidFill>
-                  <a:schemeClr val="tx1"/>
-                </a:solidFill>
-                <a:effectLst/>
-                <a:latin typeface="+mn-lt"/>
-                <a:ea typeface="+mn-ea"/>
-                <a:cs typeface="+mn-cs"/>
-              </a:rPr>
-              <a:t> &amp; \</a:t>
-            </a:r>
-            <a:r>
-              <a:rPr lang="en-US" sz="1200" kern="1200" dirty="0" err="1">
-                <a:solidFill>
-                  <a:schemeClr val="tx1"/>
-                </a:solidFill>
-                <a:effectLst/>
-                <a:latin typeface="+mn-lt"/>
-                <a:ea typeface="+mn-ea"/>
-                <a:cs typeface="+mn-cs"/>
-              </a:rPr>
-              <a:t>ell_k</a:t>
-            </a:r>
-            <a:r>
-              <a:rPr lang="en-US" sz="1200" kern="1200" dirty="0">
-                <a:solidFill>
-                  <a:schemeClr val="tx1"/>
-                </a:solidFill>
-                <a:effectLst/>
-                <a:latin typeface="+mn-lt"/>
-                <a:ea typeface="+mn-ea"/>
-                <a:cs typeface="+mn-cs"/>
-              </a:rPr>
-              <a:t> \end{</a:t>
-            </a:r>
-            <a:r>
-              <a:rPr lang="en-US" sz="1200" kern="1200" dirty="0" err="1">
-                <a:solidFill>
-                  <a:schemeClr val="tx1"/>
-                </a:solidFill>
-                <a:effectLst/>
-                <a:latin typeface="+mn-lt"/>
-                <a:ea typeface="+mn-ea"/>
-                <a:cs typeface="+mn-cs"/>
-              </a:rPr>
-              <a:t>bmatrix</a:t>
-            </a:r>
-            <a:r>
-              <a:rPr lang="en-US" sz="1200" kern="1200" dirty="0">
-                <a:solidFill>
-                  <a:schemeClr val="tx1"/>
-                </a:solidFill>
-                <a:effectLst/>
-                <a:latin typeface="+mn-lt"/>
-                <a:ea typeface="+mn-ea"/>
-                <a:cs typeface="+mn-cs"/>
-              </a:rPr>
-              <a:t>} \begin{</a:t>
-            </a:r>
-            <a:r>
-              <a:rPr lang="en-US" sz="1200" kern="1200" dirty="0" err="1">
-                <a:solidFill>
-                  <a:schemeClr val="tx1"/>
-                </a:solidFill>
-                <a:effectLst/>
-                <a:latin typeface="+mn-lt"/>
-                <a:ea typeface="+mn-ea"/>
-                <a:cs typeface="+mn-cs"/>
-              </a:rPr>
-              <a:t>bmatrix</a:t>
-            </a:r>
-            <a:r>
-              <a:rPr lang="en-US" sz="1200" kern="1200" dirty="0">
-                <a:solidFill>
-                  <a:schemeClr val="tx1"/>
-                </a:solidFill>
-                <a:effectLst/>
-                <a:latin typeface="+mn-lt"/>
-                <a:ea typeface="+mn-ea"/>
-                <a:cs typeface="+mn-cs"/>
-              </a:rPr>
-              <a:t>}\</a:t>
-            </a:r>
-            <a:r>
-              <a:rPr lang="en-US" sz="1200" kern="1200" dirty="0" err="1">
-                <a:solidFill>
-                  <a:schemeClr val="tx1"/>
-                </a:solidFill>
-                <a:effectLst/>
-                <a:latin typeface="+mn-lt"/>
-                <a:ea typeface="+mn-ea"/>
-                <a:cs typeface="+mn-cs"/>
-              </a:rPr>
-              <a:t>x_k</a:t>
-            </a:r>
-            <a:r>
-              <a:rPr lang="en-US" sz="1200" kern="1200" dirty="0">
-                <a:solidFill>
-                  <a:schemeClr val="tx1"/>
-                </a:solidFill>
-                <a:effectLst/>
-                <a:latin typeface="+mn-lt"/>
-                <a:ea typeface="+mn-ea"/>
-                <a:cs typeface="+mn-cs"/>
-              </a:rPr>
-              <a:t> \\ 1 \end{</a:t>
-            </a:r>
-            <a:r>
-              <a:rPr lang="en-US" sz="1200" kern="1200" dirty="0" err="1">
-                <a:solidFill>
-                  <a:schemeClr val="tx1"/>
-                </a:solidFill>
-                <a:effectLst/>
-                <a:latin typeface="+mn-lt"/>
-                <a:ea typeface="+mn-ea"/>
-                <a:cs typeface="+mn-cs"/>
-              </a:rPr>
-              <a:t>bmatrix</a:t>
-            </a:r>
-            <a:r>
-              <a:rPr lang="en-US" sz="1200" kern="1200" dirty="0">
-                <a:solidFill>
-                  <a:schemeClr val="tx1"/>
-                </a:solidFill>
-                <a:effectLst/>
-                <a:latin typeface="+mn-lt"/>
-                <a:ea typeface="+mn-ea"/>
-                <a:cs typeface="+mn-cs"/>
-              </a:rPr>
-              <a:t>}</a:t>
-            </a:r>
-          </a:p>
-          <a:p>
-            <a:pPr marL="0" marR="0" lvl="0" indent="0" algn="l" defTabSz="914400" rtl="0" eaLnBrk="1" fontAlgn="auto" latinLnBrk="0" hangingPunct="1">
-              <a:lnSpc>
-                <a:spcPct val="100000"/>
-              </a:lnSpc>
-              <a:spcBef>
-                <a:spcPts val="0"/>
-              </a:spcBef>
-              <a:spcAft>
-                <a:spcPts val="0"/>
-              </a:spcAft>
-              <a:buClrTx/>
-              <a:buSzTx/>
-              <a:buFontTx/>
-              <a:buNone/>
-              <a:tabLst/>
-              <a:defRPr/>
-            </a:pPr>
-            <a:endParaRPr lang="en-US" sz="1200" kern="1200" dirty="0">
-              <a:solidFill>
-                <a:schemeClr val="tx1"/>
-              </a:solidFill>
-              <a:effectLst/>
-              <a:latin typeface="+mn-lt"/>
-              <a:ea typeface="+mn-ea"/>
-              <a:cs typeface="+mn-cs"/>
-            </a:endParaRPr>
-          </a:p>
-          <a:p>
-            <a:pPr marL="0" marR="0" lvl="0" indent="0" algn="l" defTabSz="914400" rtl="0" eaLnBrk="1" fontAlgn="auto" latinLnBrk="0" hangingPunct="1">
-              <a:lnSpc>
-                <a:spcPct val="100000"/>
-              </a:lnSpc>
-              <a:spcBef>
-                <a:spcPts val="0"/>
-              </a:spcBef>
-              <a:spcAft>
-                <a:spcPts val="0"/>
-              </a:spcAft>
-              <a:buClrTx/>
-              <a:buSzTx/>
-              <a:buFontTx/>
-              <a:buNone/>
-              <a:tabLst/>
-              <a:defRPr/>
-            </a:pPr>
-            <a:r>
-              <a:rPr lang="en-US" sz="1200" kern="1200" dirty="0" err="1">
-                <a:solidFill>
-                  <a:schemeClr val="tx1"/>
-                </a:solidFill>
-                <a:effectLst/>
-                <a:latin typeface="+mn-lt"/>
-                <a:ea typeface="+mn-ea"/>
-                <a:cs typeface="+mn-cs"/>
-              </a:rPr>
-              <a:t>J_k</a:t>
-            </a:r>
-            <a:r>
-              <a:rPr lang="en-US" sz="1200" kern="1200" dirty="0">
-                <a:solidFill>
-                  <a:schemeClr val="tx1"/>
-                </a:solidFill>
-                <a:effectLst/>
-                <a:latin typeface="+mn-lt"/>
-                <a:ea typeface="+mn-ea"/>
-                <a:cs typeface="+mn-cs"/>
-              </a:rPr>
-              <a:t>^*(\</a:t>
-            </a:r>
-            <a:r>
-              <a:rPr lang="en-US" sz="1200" kern="1200" dirty="0" err="1">
-                <a:solidFill>
-                  <a:schemeClr val="tx1"/>
-                </a:solidFill>
-                <a:effectLst/>
-                <a:latin typeface="+mn-lt"/>
-                <a:ea typeface="+mn-ea"/>
-                <a:cs typeface="+mn-cs"/>
-              </a:rPr>
-              <a:t>x_k</a:t>
-            </a:r>
-            <a:r>
-              <a:rPr lang="en-US" sz="1200" kern="1200" dirty="0">
-                <a:solidFill>
-                  <a:schemeClr val="tx1"/>
-                </a:solidFill>
-                <a:effectLst/>
-                <a:latin typeface="+mn-lt"/>
-                <a:ea typeface="+mn-ea"/>
-                <a:cs typeface="+mn-cs"/>
-              </a:rPr>
-              <a:t>) = \frac{1}{2}\begin{</a:t>
-            </a:r>
-            <a:r>
-              <a:rPr lang="en-US" sz="1200" kern="1200" dirty="0" err="1">
-                <a:solidFill>
-                  <a:schemeClr val="tx1"/>
-                </a:solidFill>
-                <a:effectLst/>
-                <a:latin typeface="+mn-lt"/>
-                <a:ea typeface="+mn-ea"/>
-                <a:cs typeface="+mn-cs"/>
-              </a:rPr>
-              <a:t>bmatrix</a:t>
-            </a:r>
-            <a:r>
-              <a:rPr lang="en-US" sz="1200" kern="1200" dirty="0">
-                <a:solidFill>
-                  <a:schemeClr val="tx1"/>
-                </a:solidFill>
-                <a:effectLst/>
-                <a:latin typeface="+mn-lt"/>
-                <a:ea typeface="+mn-ea"/>
-                <a:cs typeface="+mn-cs"/>
-              </a:rPr>
-              <a:t>}\</a:t>
-            </a:r>
-            <a:r>
-              <a:rPr lang="en-US" sz="1200" kern="1200" dirty="0" err="1">
-                <a:solidFill>
-                  <a:schemeClr val="tx1"/>
-                </a:solidFill>
-                <a:effectLst/>
-                <a:latin typeface="+mn-lt"/>
-                <a:ea typeface="+mn-ea"/>
-                <a:cs typeface="+mn-cs"/>
-              </a:rPr>
-              <a:t>x_k</a:t>
-            </a:r>
-            <a:r>
-              <a:rPr lang="en-US" sz="1200" kern="1200" dirty="0">
-                <a:solidFill>
-                  <a:schemeClr val="tx1"/>
-                </a:solidFill>
-                <a:effectLst/>
-                <a:latin typeface="+mn-lt"/>
-                <a:ea typeface="+mn-ea"/>
-                <a:cs typeface="+mn-cs"/>
-              </a:rPr>
-              <a:t> \\ 1 \end{</a:t>
-            </a:r>
-            <a:r>
-              <a:rPr lang="en-US" sz="1200" kern="1200" dirty="0" err="1">
-                <a:solidFill>
-                  <a:schemeClr val="tx1"/>
-                </a:solidFill>
-                <a:effectLst/>
-                <a:latin typeface="+mn-lt"/>
-                <a:ea typeface="+mn-ea"/>
-                <a:cs typeface="+mn-cs"/>
-              </a:rPr>
-              <a:t>bmatrix</a:t>
-            </a:r>
-            <a:r>
-              <a:rPr lang="en-US" sz="1200" kern="1200" dirty="0">
-                <a:solidFill>
-                  <a:schemeClr val="tx1"/>
-                </a:solidFill>
-                <a:effectLst/>
-                <a:latin typeface="+mn-lt"/>
-                <a:ea typeface="+mn-ea"/>
-                <a:cs typeface="+mn-cs"/>
-              </a:rPr>
-              <a:t>}^T \begin{</a:t>
-            </a:r>
-            <a:r>
-              <a:rPr lang="en-US" sz="1200" kern="1200" dirty="0" err="1">
-                <a:solidFill>
-                  <a:schemeClr val="tx1"/>
-                </a:solidFill>
-                <a:effectLst/>
-                <a:latin typeface="+mn-lt"/>
-                <a:ea typeface="+mn-ea"/>
-                <a:cs typeface="+mn-cs"/>
-              </a:rPr>
-              <a:t>bmatrix</a:t>
-            </a:r>
-            <a:r>
-              <a:rPr lang="en-US" sz="1200" kern="1200" dirty="0">
-                <a:solidFill>
-                  <a:schemeClr val="tx1"/>
-                </a:solidFill>
-                <a:effectLst/>
-                <a:latin typeface="+mn-lt"/>
-                <a:ea typeface="+mn-ea"/>
-                <a:cs typeface="+mn-cs"/>
-              </a:rPr>
-              <a:t>}</a:t>
-            </a:r>
-            <a:r>
-              <a:rPr lang="en-US" sz="1200" kern="1200" dirty="0" err="1">
-                <a:solidFill>
-                  <a:schemeClr val="tx1"/>
-                </a:solidFill>
-                <a:effectLst/>
-                <a:latin typeface="+mn-lt"/>
-                <a:ea typeface="+mn-ea"/>
-                <a:cs typeface="+mn-cs"/>
-              </a:rPr>
-              <a:t>P_k</a:t>
-            </a:r>
-            <a:r>
-              <a:rPr lang="en-US" sz="1200" kern="1200" dirty="0">
-                <a:solidFill>
-                  <a:schemeClr val="tx1"/>
-                </a:solidFill>
-                <a:effectLst/>
-                <a:latin typeface="+mn-lt"/>
-                <a:ea typeface="+mn-ea"/>
-                <a:cs typeface="+mn-cs"/>
-              </a:rPr>
-              <a:t> &amp; \</a:t>
-            </a:r>
-            <a:r>
-              <a:rPr lang="en-US" sz="1200" kern="1200" dirty="0" err="1">
-                <a:solidFill>
-                  <a:schemeClr val="tx1"/>
-                </a:solidFill>
-                <a:effectLst/>
-                <a:latin typeface="+mn-lt"/>
-                <a:ea typeface="+mn-ea"/>
-                <a:cs typeface="+mn-cs"/>
-              </a:rPr>
-              <a:t>p_k</a:t>
-            </a:r>
-            <a:r>
-              <a:rPr lang="en-US" sz="1200" kern="1200" dirty="0">
-                <a:solidFill>
-                  <a:schemeClr val="tx1"/>
-                </a:solidFill>
-                <a:effectLst/>
-                <a:latin typeface="+mn-lt"/>
-                <a:ea typeface="+mn-ea"/>
-                <a:cs typeface="+mn-cs"/>
-              </a:rPr>
-              <a:t> \\ \</a:t>
-            </a:r>
-            <a:r>
-              <a:rPr lang="en-US" sz="1200" kern="1200" dirty="0" err="1">
-                <a:solidFill>
-                  <a:schemeClr val="tx1"/>
-                </a:solidFill>
-                <a:effectLst/>
-                <a:latin typeface="+mn-lt"/>
-                <a:ea typeface="+mn-ea"/>
-                <a:cs typeface="+mn-cs"/>
-              </a:rPr>
-              <a:t>p_k^T</a:t>
-            </a:r>
-            <a:r>
-              <a:rPr lang="en-US" sz="1200" kern="1200" dirty="0">
-                <a:solidFill>
-                  <a:schemeClr val="tx1"/>
-                </a:solidFill>
-                <a:effectLst/>
-                <a:latin typeface="+mn-lt"/>
-                <a:ea typeface="+mn-ea"/>
-                <a:cs typeface="+mn-cs"/>
-              </a:rPr>
-              <a:t> &amp; 2p_k\end{</a:t>
-            </a:r>
-            <a:r>
-              <a:rPr lang="en-US" sz="1200" kern="1200" dirty="0" err="1">
-                <a:solidFill>
-                  <a:schemeClr val="tx1"/>
-                </a:solidFill>
-                <a:effectLst/>
-                <a:latin typeface="+mn-lt"/>
-                <a:ea typeface="+mn-ea"/>
-                <a:cs typeface="+mn-cs"/>
-              </a:rPr>
-              <a:t>bmatrix</a:t>
-            </a:r>
-            <a:r>
-              <a:rPr lang="en-US" sz="1200" kern="1200" dirty="0">
-                <a:solidFill>
-                  <a:schemeClr val="tx1"/>
-                </a:solidFill>
-                <a:effectLst/>
-                <a:latin typeface="+mn-lt"/>
-                <a:ea typeface="+mn-ea"/>
-                <a:cs typeface="+mn-cs"/>
-              </a:rPr>
-              <a:t>}\begin{</a:t>
-            </a:r>
-            <a:r>
-              <a:rPr lang="en-US" sz="1200" kern="1200" dirty="0" err="1">
-                <a:solidFill>
-                  <a:schemeClr val="tx1"/>
-                </a:solidFill>
-                <a:effectLst/>
-                <a:latin typeface="+mn-lt"/>
-                <a:ea typeface="+mn-ea"/>
-                <a:cs typeface="+mn-cs"/>
-              </a:rPr>
-              <a:t>bmatrix</a:t>
-            </a:r>
-            <a:r>
-              <a:rPr lang="en-US" sz="1200" kern="1200" dirty="0">
-                <a:solidFill>
-                  <a:schemeClr val="tx1"/>
-                </a:solidFill>
-                <a:effectLst/>
-                <a:latin typeface="+mn-lt"/>
-                <a:ea typeface="+mn-ea"/>
-                <a:cs typeface="+mn-cs"/>
-              </a:rPr>
-              <a:t>}\</a:t>
-            </a:r>
-            <a:r>
-              <a:rPr lang="en-US" sz="1200" kern="1200" dirty="0" err="1">
-                <a:solidFill>
-                  <a:schemeClr val="tx1"/>
-                </a:solidFill>
-                <a:effectLst/>
-                <a:latin typeface="+mn-lt"/>
-                <a:ea typeface="+mn-ea"/>
-                <a:cs typeface="+mn-cs"/>
-              </a:rPr>
-              <a:t>x_k</a:t>
-            </a:r>
-            <a:r>
-              <a:rPr lang="en-US" sz="1200" kern="1200" dirty="0">
-                <a:solidFill>
-                  <a:schemeClr val="tx1"/>
-                </a:solidFill>
-                <a:effectLst/>
-                <a:latin typeface="+mn-lt"/>
-                <a:ea typeface="+mn-ea"/>
-                <a:cs typeface="+mn-cs"/>
-              </a:rPr>
-              <a:t> \\ 1 \end{</a:t>
-            </a:r>
-            <a:r>
-              <a:rPr lang="en-US" sz="1200" kern="1200" dirty="0" err="1">
-                <a:solidFill>
-                  <a:schemeClr val="tx1"/>
-                </a:solidFill>
-                <a:effectLst/>
-                <a:latin typeface="+mn-lt"/>
-                <a:ea typeface="+mn-ea"/>
-                <a:cs typeface="+mn-cs"/>
-              </a:rPr>
-              <a:t>bmatrix</a:t>
-            </a:r>
-            <a:r>
-              <a:rPr lang="en-US" sz="1200" kern="1200" dirty="0">
-                <a:solidFill>
-                  <a:schemeClr val="tx1"/>
-                </a:solidFill>
-                <a:effectLst/>
-                <a:latin typeface="+mn-lt"/>
-                <a:ea typeface="+mn-ea"/>
-                <a:cs typeface="+mn-cs"/>
-              </a:rPr>
-              <a:t>}</a:t>
-            </a:r>
-          </a:p>
-          <a:p>
-            <a:pPr marL="0" marR="0" lvl="0" indent="0" algn="l" defTabSz="914400" rtl="0" eaLnBrk="1" fontAlgn="auto" latinLnBrk="0" hangingPunct="1">
-              <a:lnSpc>
-                <a:spcPct val="100000"/>
-              </a:lnSpc>
-              <a:spcBef>
-                <a:spcPts val="0"/>
-              </a:spcBef>
-              <a:spcAft>
-                <a:spcPts val="0"/>
-              </a:spcAft>
-              <a:buClrTx/>
-              <a:buSzTx/>
-              <a:buFontTx/>
-              <a:buNone/>
-              <a:tabLst/>
-              <a:defRPr/>
-            </a:pPr>
-            <a:endParaRPr lang="en-US" sz="1200" kern="1200" dirty="0">
-              <a:solidFill>
-                <a:schemeClr val="tx1"/>
-              </a:solidFill>
-              <a:effectLst/>
-              <a:latin typeface="+mn-lt"/>
-              <a:ea typeface="+mn-ea"/>
-              <a:cs typeface="+mn-cs"/>
-            </a:endParaRPr>
-          </a:p>
-          <a:p>
             <a:endParaRPr lang="en-US" sz="1200" kern="1200" dirty="0">
               <a:solidFill>
                 <a:schemeClr val="tx1"/>
@@ -5627,901 +1465,7 @@
               <a:tabLst/>
               <a:defRPr/>
             </a:pPr>
-            <a:r>
-              <a:rPr lang="en-US" sz="1200" kern="1200">
-                <a:solidFill>
-                  <a:schemeClr val="tx1"/>
-                </a:solidFill>
-                <a:effectLst/>
-                <a:latin typeface="+mn-lt"/>
-                <a:ea typeface="+mn-ea"/>
-                <a:cs typeface="+mn-cs"/>
-              </a:rPr>
-              <a:t>\x_{k+1} \</a:t>
-            </a:r>
-            <a:r>
-              <a:rPr lang="en-US" sz="1200" kern="1200" err="1">
-                <a:solidFill>
-                  <a:schemeClr val="tx1"/>
-                </a:solidFill>
-                <a:effectLst/>
-                <a:latin typeface="+mn-lt"/>
-                <a:ea typeface="+mn-ea"/>
-                <a:cs typeface="+mn-cs"/>
-              </a:rPr>
-              <a:t>approx</a:t>
-            </a:r>
-            <a:r>
-              <a:rPr lang="en-US" sz="1200" kern="1200">
-                <a:solidFill>
-                  <a:schemeClr val="tx1"/>
-                </a:solidFill>
-                <a:effectLst/>
-                <a:latin typeface="+mn-lt"/>
-                <a:ea typeface="+mn-ea"/>
-                <a:cs typeface="+mn-cs"/>
-              </a:rPr>
-              <a:t> \underbrace{f(\bar\</a:t>
-            </a:r>
-            <a:r>
-              <a:rPr lang="en-US" sz="1200" kern="1200" err="1">
-                <a:solidFill>
-                  <a:schemeClr val="tx1"/>
-                </a:solidFill>
-                <a:effectLst/>
-                <a:latin typeface="+mn-lt"/>
-                <a:ea typeface="+mn-ea"/>
-                <a:cs typeface="+mn-cs"/>
-              </a:rPr>
-              <a:t>x_k</a:t>
-            </a:r>
-            <a:r>
-              <a:rPr lang="en-US" sz="1200" kern="1200">
-                <a:solidFill>
-                  <a:schemeClr val="tx1"/>
-                </a:solidFill>
-                <a:effectLst/>
-                <a:latin typeface="+mn-lt"/>
-                <a:ea typeface="+mn-ea"/>
-                <a:cs typeface="+mn-cs"/>
-              </a:rPr>
-              <a:t>, \bar\</a:t>
-            </a:r>
-            <a:r>
-              <a:rPr lang="en-US" sz="1200" kern="1200" err="1">
-                <a:solidFill>
-                  <a:schemeClr val="tx1"/>
-                </a:solidFill>
-                <a:effectLst/>
-                <a:latin typeface="+mn-lt"/>
-                <a:ea typeface="+mn-ea"/>
-                <a:cs typeface="+mn-cs"/>
-              </a:rPr>
-              <a:t>u_k</a:t>
-            </a:r>
-            <a:r>
-              <a:rPr lang="en-US" sz="1200" kern="1200">
-                <a:solidFill>
-                  <a:schemeClr val="tx1"/>
-                </a:solidFill>
-                <a:effectLst/>
-                <a:latin typeface="+mn-lt"/>
-                <a:ea typeface="+mn-ea"/>
-                <a:cs typeface="+mn-cs"/>
-              </a:rPr>
-              <a:t>)}_{\bar\x_{k+1}} + \underbrace{f_\x(\bar\</a:t>
-            </a:r>
-            <a:r>
-              <a:rPr lang="en-US" sz="1200" kern="1200" err="1">
-                <a:solidFill>
-                  <a:schemeClr val="tx1"/>
-                </a:solidFill>
-                <a:effectLst/>
-                <a:latin typeface="+mn-lt"/>
-                <a:ea typeface="+mn-ea"/>
-                <a:cs typeface="+mn-cs"/>
-              </a:rPr>
-              <a:t>x_k</a:t>
-            </a:r>
-            <a:r>
-              <a:rPr lang="en-US" sz="1200" kern="1200">
-                <a:solidFill>
-                  <a:schemeClr val="tx1"/>
-                </a:solidFill>
-                <a:effectLst/>
-                <a:latin typeface="+mn-lt"/>
-                <a:ea typeface="+mn-ea"/>
-                <a:cs typeface="+mn-cs"/>
-              </a:rPr>
-              <a:t>, \bar\</a:t>
-            </a:r>
-            <a:r>
-              <a:rPr lang="en-US" sz="1200" kern="1200" err="1">
-                <a:solidFill>
-                  <a:schemeClr val="tx1"/>
-                </a:solidFill>
-                <a:effectLst/>
-                <a:latin typeface="+mn-lt"/>
-                <a:ea typeface="+mn-ea"/>
-                <a:cs typeface="+mn-cs"/>
-              </a:rPr>
-              <a:t>u_k</a:t>
-            </a:r>
-            <a:r>
-              <a:rPr lang="en-US" sz="1200" kern="1200">
-                <a:solidFill>
-                  <a:schemeClr val="tx1"/>
-                </a:solidFill>
-                <a:effectLst/>
-                <a:latin typeface="+mn-lt"/>
-                <a:ea typeface="+mn-ea"/>
-                <a:cs typeface="+mn-cs"/>
-              </a:rPr>
-              <a:t>)}_{</a:t>
-            </a:r>
-            <a:r>
-              <a:rPr lang="en-US" sz="1200" kern="1200" err="1">
-                <a:solidFill>
-                  <a:schemeClr val="tx1"/>
-                </a:solidFill>
-                <a:effectLst/>
-                <a:latin typeface="+mn-lt"/>
-                <a:ea typeface="+mn-ea"/>
-                <a:cs typeface="+mn-cs"/>
-              </a:rPr>
-              <a:t>A_k</a:t>
-            </a:r>
-            <a:r>
-              <a:rPr lang="en-US" sz="1200" kern="1200">
-                <a:solidFill>
-                  <a:schemeClr val="tx1"/>
-                </a:solidFill>
-                <a:effectLst/>
-                <a:latin typeface="+mn-lt"/>
-                <a:ea typeface="+mn-ea"/>
-                <a:cs typeface="+mn-cs"/>
-              </a:rPr>
-              <a:t>}\delta\</a:t>
-            </a:r>
-            <a:r>
-              <a:rPr lang="en-US" sz="1200" kern="1200" err="1">
-                <a:solidFill>
-                  <a:schemeClr val="tx1"/>
-                </a:solidFill>
-                <a:effectLst/>
-                <a:latin typeface="+mn-lt"/>
-                <a:ea typeface="+mn-ea"/>
-                <a:cs typeface="+mn-cs"/>
-              </a:rPr>
-              <a:t>x_k</a:t>
-            </a:r>
-            <a:r>
-              <a:rPr lang="en-US" sz="1200" kern="1200">
-                <a:solidFill>
-                  <a:schemeClr val="tx1"/>
-                </a:solidFill>
-                <a:effectLst/>
-                <a:latin typeface="+mn-lt"/>
-                <a:ea typeface="+mn-ea"/>
-                <a:cs typeface="+mn-cs"/>
-              </a:rPr>
-              <a:t> + \underbrace{f_\u(\bar\</a:t>
-            </a:r>
-            <a:r>
-              <a:rPr lang="en-US" sz="1200" kern="1200" err="1">
-                <a:solidFill>
-                  <a:schemeClr val="tx1"/>
-                </a:solidFill>
-                <a:effectLst/>
-                <a:latin typeface="+mn-lt"/>
-                <a:ea typeface="+mn-ea"/>
-                <a:cs typeface="+mn-cs"/>
-              </a:rPr>
-              <a:t>x_k</a:t>
-            </a:r>
-            <a:r>
-              <a:rPr lang="en-US" sz="1200" kern="1200">
-                <a:solidFill>
-                  <a:schemeClr val="tx1"/>
-                </a:solidFill>
-                <a:effectLst/>
-                <a:latin typeface="+mn-lt"/>
-                <a:ea typeface="+mn-ea"/>
-                <a:cs typeface="+mn-cs"/>
-              </a:rPr>
-              <a:t>, \bar\</a:t>
-            </a:r>
-            <a:r>
-              <a:rPr lang="en-US" sz="1200" kern="1200" err="1">
-                <a:solidFill>
-                  <a:schemeClr val="tx1"/>
-                </a:solidFill>
-                <a:effectLst/>
-                <a:latin typeface="+mn-lt"/>
-                <a:ea typeface="+mn-ea"/>
-                <a:cs typeface="+mn-cs"/>
-              </a:rPr>
-              <a:t>u_k</a:t>
-            </a:r>
-            <a:r>
-              <a:rPr lang="en-US" sz="1200" kern="1200">
-                <a:solidFill>
-                  <a:schemeClr val="tx1"/>
-                </a:solidFill>
-                <a:effectLst/>
-                <a:latin typeface="+mn-lt"/>
-                <a:ea typeface="+mn-ea"/>
-                <a:cs typeface="+mn-cs"/>
-              </a:rPr>
-              <a:t>)}_{</a:t>
-            </a:r>
-            <a:r>
-              <a:rPr lang="en-US" sz="1200" kern="1200" err="1">
-                <a:solidFill>
-                  <a:schemeClr val="tx1"/>
-                </a:solidFill>
-                <a:effectLst/>
-                <a:latin typeface="+mn-lt"/>
-                <a:ea typeface="+mn-ea"/>
-                <a:cs typeface="+mn-cs"/>
-              </a:rPr>
-              <a:t>B_k</a:t>
-            </a:r>
-            <a:r>
-              <a:rPr lang="en-US" sz="1200" kern="1200">
-                <a:solidFill>
-                  <a:schemeClr val="tx1"/>
-                </a:solidFill>
-                <a:effectLst/>
-                <a:latin typeface="+mn-lt"/>
-                <a:ea typeface="+mn-ea"/>
-                <a:cs typeface="+mn-cs"/>
-              </a:rPr>
-              <a:t>}\delta\</a:t>
-            </a:r>
-            <a:r>
-              <a:rPr lang="en-US" sz="1200" kern="1200" err="1">
-                <a:solidFill>
-                  <a:schemeClr val="tx1"/>
-                </a:solidFill>
-                <a:effectLst/>
-                <a:latin typeface="+mn-lt"/>
-                <a:ea typeface="+mn-ea"/>
-                <a:cs typeface="+mn-cs"/>
-              </a:rPr>
-              <a:t>u_k</a:t>
-            </a:r>
-            <a:endParaRPr lang="en-US" sz="1200" kern="1200">
-              <a:solidFill>
-                <a:schemeClr val="tx1"/>
-              </a:solidFill>
-              <a:effectLst/>
-              <a:latin typeface="+mn-lt"/>
-              <a:ea typeface="+mn-ea"/>
-              <a:cs typeface="+mn-cs"/>
-            </a:endParaRPr>
-          </a:p>
-          <a:p>
-            <a:endParaRPr lang="en-US" sz="1200" kern="1200">
-              <a:solidFill>
-                <a:schemeClr val="tx1"/>
-              </a:solidFill>
-              <a:effectLst/>
-              <a:latin typeface="+mn-lt"/>
-              <a:ea typeface="+mn-ea"/>
-              <a:cs typeface="+mn-cs"/>
-            </a:endParaRPr>
-          </a:p>
-          <a:p>
-            <a:endParaRPr lang="en-US" sz="1200" kern="1200">
-              <a:solidFill>
-                <a:schemeClr val="tx1"/>
-              </a:solidFill>
-              <a:effectLst/>
-              <a:latin typeface="+mn-lt"/>
-              <a:ea typeface="+mn-ea"/>
-              <a:cs typeface="+mn-cs"/>
-            </a:endParaRPr>
-          </a:p>
-          <a:p>
-            <a:r>
-              <a:rPr lang="en-US" sz="1200" kern="1200">
-                <a:solidFill>
-                  <a:schemeClr val="tx1"/>
-                </a:solidFill>
-                <a:effectLst/>
-                <a:latin typeface="+mn-lt"/>
-                <a:ea typeface="+mn-ea"/>
-                <a:cs typeface="+mn-cs"/>
-              </a:rPr>
-              <a:t>c(\delta\</a:t>
-            </a:r>
-            <a:r>
-              <a:rPr lang="en-US" sz="1200" kern="1200" err="1">
-                <a:solidFill>
-                  <a:schemeClr val="tx1"/>
-                </a:solidFill>
-                <a:effectLst/>
-                <a:latin typeface="+mn-lt"/>
-                <a:ea typeface="+mn-ea"/>
-                <a:cs typeface="+mn-cs"/>
-              </a:rPr>
-              <a:t>x_k</a:t>
-            </a:r>
-            <a:r>
-              <a:rPr lang="en-US" sz="1200" kern="1200">
-                <a:solidFill>
-                  <a:schemeClr val="tx1"/>
-                </a:solidFill>
-                <a:effectLst/>
-                <a:latin typeface="+mn-lt"/>
-                <a:ea typeface="+mn-ea"/>
-                <a:cs typeface="+mn-cs"/>
-              </a:rPr>
-              <a:t>, \delta\</a:t>
-            </a:r>
-            <a:r>
-              <a:rPr lang="en-US" sz="1200" kern="1200" err="1">
-                <a:solidFill>
-                  <a:schemeClr val="tx1"/>
-                </a:solidFill>
-                <a:effectLst/>
-                <a:latin typeface="+mn-lt"/>
-                <a:ea typeface="+mn-ea"/>
-                <a:cs typeface="+mn-cs"/>
-              </a:rPr>
-              <a:t>u_k</a:t>
-            </a:r>
-            <a:r>
-              <a:rPr lang="en-US" sz="1200" kern="1200">
-                <a:solidFill>
-                  <a:schemeClr val="tx1"/>
-                </a:solidFill>
-                <a:effectLst/>
-                <a:latin typeface="+mn-lt"/>
-                <a:ea typeface="+mn-ea"/>
-                <a:cs typeface="+mn-cs"/>
-              </a:rPr>
-              <a:t>) \</a:t>
-            </a:r>
-            <a:r>
-              <a:rPr lang="en-US" sz="1200" kern="1200" err="1">
-                <a:solidFill>
-                  <a:schemeClr val="tx1"/>
-                </a:solidFill>
-                <a:effectLst/>
-                <a:latin typeface="+mn-lt"/>
-                <a:ea typeface="+mn-ea"/>
-                <a:cs typeface="+mn-cs"/>
-              </a:rPr>
-              <a:t>approx</a:t>
-            </a:r>
-            <a:endParaRPr lang="en-US" sz="1200" kern="1200">
-              <a:solidFill>
-                <a:schemeClr val="tx1"/>
-              </a:solidFill>
-              <a:effectLst/>
-              <a:latin typeface="+mn-lt"/>
-              <a:ea typeface="+mn-ea"/>
-              <a:cs typeface="+mn-cs"/>
-            </a:endParaRPr>
-          </a:p>
-          <a:p>
-            <a:r>
-              <a:rPr lang="en-US" sz="1200" kern="1200" err="1">
-                <a:solidFill>
-                  <a:schemeClr val="tx1"/>
-                </a:solidFill>
-                <a:effectLst/>
-                <a:latin typeface="+mn-lt"/>
-                <a:ea typeface="+mn-ea"/>
-                <a:cs typeface="+mn-cs"/>
-              </a:rPr>
-              <a:t>c_k</a:t>
-            </a:r>
-            <a:r>
-              <a:rPr lang="en-US" sz="1200" kern="1200">
-                <a:solidFill>
-                  <a:schemeClr val="tx1"/>
-                </a:solidFill>
-                <a:effectLst/>
-                <a:latin typeface="+mn-lt"/>
-                <a:ea typeface="+mn-ea"/>
-                <a:cs typeface="+mn-cs"/>
-              </a:rPr>
-              <a:t> +</a:t>
-            </a:r>
-          </a:p>
-          <a:p>
-            <a:r>
-              <a:rPr lang="en-US" sz="1200" kern="1200">
-                <a:solidFill>
-                  <a:schemeClr val="tx1"/>
-                </a:solidFill>
-                <a:effectLst/>
-                <a:latin typeface="+mn-lt"/>
-                <a:ea typeface="+mn-ea"/>
-                <a:cs typeface="+mn-cs"/>
-              </a:rPr>
-              <a:t>\underbrace{c_{\</a:t>
-            </a:r>
-            <a:r>
-              <a:rPr lang="en-US" sz="1200" kern="1200" err="1">
-                <a:solidFill>
-                  <a:schemeClr val="tx1"/>
-                </a:solidFill>
-                <a:effectLst/>
-                <a:latin typeface="+mn-lt"/>
-                <a:ea typeface="+mn-ea"/>
-                <a:cs typeface="+mn-cs"/>
-              </a:rPr>
-              <a:t>x,k</a:t>
-            </a:r>
-            <a:r>
-              <a:rPr lang="en-US" sz="1200" kern="1200">
-                <a:solidFill>
-                  <a:schemeClr val="tx1"/>
-                </a:solidFill>
-                <a:effectLst/>
-                <a:latin typeface="+mn-lt"/>
-                <a:ea typeface="+mn-ea"/>
-                <a:cs typeface="+mn-cs"/>
-              </a:rPr>
-              <a:t>}^T}_{\</a:t>
-            </a:r>
-            <a:r>
-              <a:rPr lang="en-US" sz="1200" kern="1200" err="1">
-                <a:solidFill>
-                  <a:schemeClr val="tx1"/>
-                </a:solidFill>
-                <a:effectLst/>
-                <a:latin typeface="+mn-lt"/>
-                <a:ea typeface="+mn-ea"/>
-                <a:cs typeface="+mn-cs"/>
-              </a:rPr>
-              <a:t>mathbf</a:t>
-            </a:r>
-            <a:r>
-              <a:rPr lang="en-US" sz="1200" kern="1200">
-                <a:solidFill>
-                  <a:schemeClr val="tx1"/>
-                </a:solidFill>
-                <a:effectLst/>
-                <a:latin typeface="+mn-lt"/>
-                <a:ea typeface="+mn-ea"/>
-                <a:cs typeface="+mn-cs"/>
-              </a:rPr>
-              <a:t>{q}_k} \delta\</a:t>
-            </a:r>
-            <a:r>
-              <a:rPr lang="en-US" sz="1200" kern="1200" err="1">
-                <a:solidFill>
-                  <a:schemeClr val="tx1"/>
-                </a:solidFill>
-                <a:effectLst/>
-                <a:latin typeface="+mn-lt"/>
-                <a:ea typeface="+mn-ea"/>
-                <a:cs typeface="+mn-cs"/>
-              </a:rPr>
-              <a:t>x_k</a:t>
-            </a:r>
-            <a:r>
-              <a:rPr lang="en-US" sz="1200" kern="1200">
-                <a:solidFill>
-                  <a:schemeClr val="tx1"/>
-                </a:solidFill>
-                <a:effectLst/>
-                <a:latin typeface="+mn-lt"/>
-                <a:ea typeface="+mn-ea"/>
-                <a:cs typeface="+mn-cs"/>
-              </a:rPr>
-              <a:t> +</a:t>
-            </a:r>
-          </a:p>
-          <a:p>
-            <a:r>
-              <a:rPr lang="en-US" sz="1200" kern="1200">
-                <a:solidFill>
-                  <a:schemeClr val="tx1"/>
-                </a:solidFill>
-                <a:effectLst/>
-                <a:latin typeface="+mn-lt"/>
-                <a:ea typeface="+mn-ea"/>
-                <a:cs typeface="+mn-cs"/>
-              </a:rPr>
-              <a:t>\underbrace{c_{\</a:t>
-            </a:r>
-            <a:r>
-              <a:rPr lang="en-US" sz="1200" kern="1200" err="1">
-                <a:solidFill>
-                  <a:schemeClr val="tx1"/>
-                </a:solidFill>
-                <a:effectLst/>
-                <a:latin typeface="+mn-lt"/>
-                <a:ea typeface="+mn-ea"/>
-                <a:cs typeface="+mn-cs"/>
-              </a:rPr>
-              <a:t>u,k</a:t>
-            </a:r>
-            <a:r>
-              <a:rPr lang="en-US" sz="1200" kern="1200">
-                <a:solidFill>
-                  <a:schemeClr val="tx1"/>
-                </a:solidFill>
-                <a:effectLst/>
-                <a:latin typeface="+mn-lt"/>
-                <a:ea typeface="+mn-ea"/>
-                <a:cs typeface="+mn-cs"/>
-              </a:rPr>
-              <a:t>}^T}_{\</a:t>
-            </a:r>
-            <a:r>
-              <a:rPr lang="en-US" sz="1200" kern="1200" err="1">
-                <a:solidFill>
-                  <a:schemeClr val="tx1"/>
-                </a:solidFill>
-                <a:effectLst/>
-                <a:latin typeface="+mn-lt"/>
-                <a:ea typeface="+mn-ea"/>
-                <a:cs typeface="+mn-cs"/>
-              </a:rPr>
-              <a:t>mathbf</a:t>
-            </a:r>
-            <a:r>
-              <a:rPr lang="en-US" sz="1200" kern="1200">
-                <a:solidFill>
-                  <a:schemeClr val="tx1"/>
-                </a:solidFill>
-                <a:effectLst/>
-                <a:latin typeface="+mn-lt"/>
-                <a:ea typeface="+mn-ea"/>
-                <a:cs typeface="+mn-cs"/>
-              </a:rPr>
-              <a:t>{r}_k} \delta\</a:t>
-            </a:r>
-            <a:r>
-              <a:rPr lang="en-US" sz="1200" kern="1200" err="1">
-                <a:solidFill>
-                  <a:schemeClr val="tx1"/>
-                </a:solidFill>
-                <a:effectLst/>
-                <a:latin typeface="+mn-lt"/>
-                <a:ea typeface="+mn-ea"/>
-                <a:cs typeface="+mn-cs"/>
-              </a:rPr>
-              <a:t>u_k</a:t>
-            </a:r>
-            <a:r>
-              <a:rPr lang="en-US" sz="1200" kern="1200">
-                <a:solidFill>
-                  <a:schemeClr val="tx1"/>
-                </a:solidFill>
-                <a:effectLst/>
-                <a:latin typeface="+mn-lt"/>
-                <a:ea typeface="+mn-ea"/>
-                <a:cs typeface="+mn-cs"/>
-              </a:rPr>
-              <a:t> +</a:t>
-            </a:r>
-          </a:p>
-          <a:p>
-            <a:r>
-              <a:rPr lang="en-US" sz="1200" kern="1200">
-                <a:solidFill>
-                  <a:schemeClr val="tx1"/>
-                </a:solidFill>
-                <a:effectLst/>
-                <a:latin typeface="+mn-lt"/>
-                <a:ea typeface="+mn-ea"/>
-                <a:cs typeface="+mn-cs"/>
-              </a:rPr>
-              <a:t>\frac{1}{2}\delta\</a:t>
-            </a:r>
-            <a:r>
-              <a:rPr lang="en-US" sz="1200" kern="1200" err="1">
-                <a:solidFill>
-                  <a:schemeClr val="tx1"/>
-                </a:solidFill>
-                <a:effectLst/>
-                <a:latin typeface="+mn-lt"/>
-                <a:ea typeface="+mn-ea"/>
-                <a:cs typeface="+mn-cs"/>
-              </a:rPr>
-              <a:t>x_k^T</a:t>
-            </a:r>
-            <a:r>
-              <a:rPr lang="en-US" sz="1200" kern="1200">
-                <a:solidFill>
-                  <a:schemeClr val="tx1"/>
-                </a:solidFill>
-                <a:effectLst/>
-                <a:latin typeface="+mn-lt"/>
-                <a:ea typeface="+mn-ea"/>
-                <a:cs typeface="+mn-cs"/>
-              </a:rPr>
-              <a:t>\underbrace{c_{\x\</a:t>
-            </a:r>
-            <a:r>
-              <a:rPr lang="en-US" sz="1200" kern="1200" err="1">
-                <a:solidFill>
-                  <a:schemeClr val="tx1"/>
-                </a:solidFill>
-                <a:effectLst/>
-                <a:latin typeface="+mn-lt"/>
-                <a:ea typeface="+mn-ea"/>
-                <a:cs typeface="+mn-cs"/>
-              </a:rPr>
-              <a:t>x,k</a:t>
-            </a:r>
-            <a:r>
-              <a:rPr lang="en-US" sz="1200" kern="1200">
-                <a:solidFill>
-                  <a:schemeClr val="tx1"/>
-                </a:solidFill>
-                <a:effectLst/>
-                <a:latin typeface="+mn-lt"/>
-                <a:ea typeface="+mn-ea"/>
-                <a:cs typeface="+mn-cs"/>
-              </a:rPr>
-              <a:t>}}_{</a:t>
-            </a:r>
-            <a:r>
-              <a:rPr lang="en-US" sz="1200" kern="1200" err="1">
-                <a:solidFill>
-                  <a:schemeClr val="tx1"/>
-                </a:solidFill>
-                <a:effectLst/>
-                <a:latin typeface="+mn-lt"/>
-                <a:ea typeface="+mn-ea"/>
-                <a:cs typeface="+mn-cs"/>
-              </a:rPr>
-              <a:t>Q_k</a:t>
-            </a:r>
-            <a:r>
-              <a:rPr lang="en-US" sz="1200" kern="1200">
-                <a:solidFill>
-                  <a:schemeClr val="tx1"/>
-                </a:solidFill>
-                <a:effectLst/>
-                <a:latin typeface="+mn-lt"/>
-                <a:ea typeface="+mn-ea"/>
-                <a:cs typeface="+mn-cs"/>
-              </a:rPr>
-              <a:t>} \delta\</a:t>
-            </a:r>
-            <a:r>
-              <a:rPr lang="en-US" sz="1200" kern="1200" err="1">
-                <a:solidFill>
-                  <a:schemeClr val="tx1"/>
-                </a:solidFill>
-                <a:effectLst/>
-                <a:latin typeface="+mn-lt"/>
-                <a:ea typeface="+mn-ea"/>
-                <a:cs typeface="+mn-cs"/>
-              </a:rPr>
-              <a:t>x_k</a:t>
-            </a:r>
-            <a:r>
-              <a:rPr lang="en-US" sz="1200" kern="1200">
-                <a:solidFill>
-                  <a:schemeClr val="tx1"/>
-                </a:solidFill>
-                <a:effectLst/>
-                <a:latin typeface="+mn-lt"/>
-                <a:ea typeface="+mn-ea"/>
-                <a:cs typeface="+mn-cs"/>
-              </a:rPr>
-              <a:t> +</a:t>
-            </a:r>
-          </a:p>
-          <a:p>
-            <a:r>
-              <a:rPr lang="en-US" sz="1200" kern="1200">
-                <a:solidFill>
-                  <a:schemeClr val="tx1"/>
-                </a:solidFill>
-                <a:effectLst/>
-                <a:latin typeface="+mn-lt"/>
-                <a:ea typeface="+mn-ea"/>
-                <a:cs typeface="+mn-cs"/>
-              </a:rPr>
-              <a:t>\frac{1}{2}\delta\</a:t>
-            </a:r>
-            <a:r>
-              <a:rPr lang="en-US" sz="1200" kern="1200" err="1">
-                <a:solidFill>
-                  <a:schemeClr val="tx1"/>
-                </a:solidFill>
-                <a:effectLst/>
-                <a:latin typeface="+mn-lt"/>
-                <a:ea typeface="+mn-ea"/>
-                <a:cs typeface="+mn-cs"/>
-              </a:rPr>
-              <a:t>u_k^T</a:t>
-            </a:r>
-            <a:r>
-              <a:rPr lang="en-US" sz="1200" kern="1200">
-                <a:solidFill>
-                  <a:schemeClr val="tx1"/>
-                </a:solidFill>
-                <a:effectLst/>
-                <a:latin typeface="+mn-lt"/>
-                <a:ea typeface="+mn-ea"/>
-                <a:cs typeface="+mn-cs"/>
-              </a:rPr>
-              <a:t>\underbrace{c_{\u\</a:t>
-            </a:r>
-            <a:r>
-              <a:rPr lang="en-US" sz="1200" kern="1200" err="1">
-                <a:solidFill>
-                  <a:schemeClr val="tx1"/>
-                </a:solidFill>
-                <a:effectLst/>
-                <a:latin typeface="+mn-lt"/>
-                <a:ea typeface="+mn-ea"/>
-                <a:cs typeface="+mn-cs"/>
-              </a:rPr>
-              <a:t>u,k</a:t>
-            </a:r>
-            <a:r>
-              <a:rPr lang="en-US" sz="1200" kern="1200">
-                <a:solidFill>
-                  <a:schemeClr val="tx1"/>
-                </a:solidFill>
-                <a:effectLst/>
-                <a:latin typeface="+mn-lt"/>
-                <a:ea typeface="+mn-ea"/>
-                <a:cs typeface="+mn-cs"/>
-              </a:rPr>
-              <a:t>}}_{</a:t>
-            </a:r>
-            <a:r>
-              <a:rPr lang="en-US" sz="1200" kern="1200" err="1">
-                <a:solidFill>
-                  <a:schemeClr val="tx1"/>
-                </a:solidFill>
-                <a:effectLst/>
-                <a:latin typeface="+mn-lt"/>
-                <a:ea typeface="+mn-ea"/>
-                <a:cs typeface="+mn-cs"/>
-              </a:rPr>
-              <a:t>R_k</a:t>
-            </a:r>
-            <a:r>
-              <a:rPr lang="en-US" sz="1200" kern="1200">
-                <a:solidFill>
-                  <a:schemeClr val="tx1"/>
-                </a:solidFill>
-                <a:effectLst/>
-                <a:latin typeface="+mn-lt"/>
-                <a:ea typeface="+mn-ea"/>
-                <a:cs typeface="+mn-cs"/>
-              </a:rPr>
-              <a:t>} \delta\</a:t>
-            </a:r>
-            <a:r>
-              <a:rPr lang="en-US" sz="1200" kern="1200" err="1">
-                <a:solidFill>
-                  <a:schemeClr val="tx1"/>
-                </a:solidFill>
-                <a:effectLst/>
-                <a:latin typeface="+mn-lt"/>
-                <a:ea typeface="+mn-ea"/>
-                <a:cs typeface="+mn-cs"/>
-              </a:rPr>
-              <a:t>u_k</a:t>
-            </a:r>
-            <a:r>
-              <a:rPr lang="en-US" sz="1200" kern="1200">
-                <a:solidFill>
-                  <a:schemeClr val="tx1"/>
-                </a:solidFill>
-                <a:effectLst/>
-                <a:latin typeface="+mn-lt"/>
-                <a:ea typeface="+mn-ea"/>
-                <a:cs typeface="+mn-cs"/>
-              </a:rPr>
-              <a:t> +</a:t>
-            </a:r>
-          </a:p>
-          <a:p>
-            <a:r>
-              <a:rPr lang="en-US" sz="1200" kern="1200">
-                <a:solidFill>
-                  <a:schemeClr val="tx1"/>
-                </a:solidFill>
-                <a:effectLst/>
-                <a:latin typeface="+mn-lt"/>
-                <a:ea typeface="+mn-ea"/>
-                <a:cs typeface="+mn-cs"/>
-              </a:rPr>
-              <a:t>\delta\</a:t>
-            </a:r>
-            <a:r>
-              <a:rPr lang="en-US" sz="1200" kern="1200" err="1">
-                <a:solidFill>
-                  <a:schemeClr val="tx1"/>
-                </a:solidFill>
-                <a:effectLst/>
-                <a:latin typeface="+mn-lt"/>
-                <a:ea typeface="+mn-ea"/>
-                <a:cs typeface="+mn-cs"/>
-              </a:rPr>
-              <a:t>x_k^T</a:t>
-            </a:r>
-            <a:r>
-              <a:rPr lang="en-US" sz="1200" kern="1200">
-                <a:solidFill>
-                  <a:schemeClr val="tx1"/>
-                </a:solidFill>
-                <a:effectLst/>
-                <a:latin typeface="+mn-lt"/>
-                <a:ea typeface="+mn-ea"/>
-                <a:cs typeface="+mn-cs"/>
-              </a:rPr>
-              <a:t>\underbrace{c_{\x\</a:t>
-            </a:r>
-            <a:r>
-              <a:rPr lang="en-US" sz="1200" kern="1200" err="1">
-                <a:solidFill>
-                  <a:schemeClr val="tx1"/>
-                </a:solidFill>
-                <a:effectLst/>
-                <a:latin typeface="+mn-lt"/>
-                <a:ea typeface="+mn-ea"/>
-                <a:cs typeface="+mn-cs"/>
-              </a:rPr>
-              <a:t>u,k</a:t>
-            </a:r>
-            <a:r>
-              <a:rPr lang="en-US" sz="1200" kern="1200">
-                <a:solidFill>
-                  <a:schemeClr val="tx1"/>
-                </a:solidFill>
-                <a:effectLst/>
-                <a:latin typeface="+mn-lt"/>
-                <a:ea typeface="+mn-ea"/>
-                <a:cs typeface="+mn-cs"/>
-              </a:rPr>
-              <a:t>}}_{</a:t>
-            </a:r>
-            <a:r>
-              <a:rPr lang="en-US" sz="1200" kern="1200" err="1">
-                <a:solidFill>
-                  <a:schemeClr val="tx1"/>
-                </a:solidFill>
-                <a:effectLst/>
-                <a:latin typeface="+mn-lt"/>
-                <a:ea typeface="+mn-ea"/>
-                <a:cs typeface="+mn-cs"/>
-              </a:rPr>
-              <a:t>H_k</a:t>
-            </a:r>
-            <a:r>
-              <a:rPr lang="en-US" sz="1200" kern="1200">
-                <a:solidFill>
-                  <a:schemeClr val="tx1"/>
-                </a:solidFill>
-                <a:effectLst/>
-                <a:latin typeface="+mn-lt"/>
-                <a:ea typeface="+mn-ea"/>
-                <a:cs typeface="+mn-cs"/>
-              </a:rPr>
-              <a:t>} \delta\</a:t>
-            </a:r>
-            <a:r>
-              <a:rPr lang="en-US" sz="1200" kern="1200" err="1">
-                <a:solidFill>
-                  <a:schemeClr val="tx1"/>
-                </a:solidFill>
-                <a:effectLst/>
-                <a:latin typeface="+mn-lt"/>
-                <a:ea typeface="+mn-ea"/>
-                <a:cs typeface="+mn-cs"/>
-              </a:rPr>
-              <a:t>u_k</a:t>
-            </a:r>
-            <a:endParaRPr lang="en-US" sz="1200" kern="1200">
+            <a:endParaRPr lang="en-US" sz="1200" kern="1200" dirty="0">
               <a:solidFill>
                 <a:schemeClr val="tx1"/>
               </a:solidFill>
@@ -6694,734 +1638,6 @@
             <a:noAutofit/>
           </a:bodyPr>
           <a:lstStyle/>
-          <a:p>
-            <a:r>
-              <a:rPr lang="en-US" sz="1200" kern="1200" dirty="0" err="1">
-                <a:solidFill>
-                  <a:schemeClr val="tx1"/>
-                </a:solidFill>
-                <a:effectLst/>
-                <a:latin typeface="+mn-lt"/>
-                <a:ea typeface="+mn-ea"/>
-                <a:cs typeface="+mn-cs"/>
-              </a:rPr>
-              <a:t>Q_k</a:t>
-            </a:r>
-            <a:r>
-              <a:rPr lang="en-US" sz="1200" kern="1200" dirty="0">
-                <a:solidFill>
-                  <a:schemeClr val="tx1"/>
-                </a:solidFill>
-                <a:effectLst/>
-                <a:latin typeface="+mn-lt"/>
-                <a:ea typeface="+mn-ea"/>
-                <a:cs typeface="+mn-cs"/>
-              </a:rPr>
-              <a:t>(\delta \</a:t>
-            </a:r>
-            <a:r>
-              <a:rPr lang="en-US" sz="1200" kern="1200" dirty="0" err="1">
-                <a:solidFill>
-                  <a:schemeClr val="tx1"/>
-                </a:solidFill>
-                <a:effectLst/>
-                <a:latin typeface="+mn-lt"/>
-                <a:ea typeface="+mn-ea"/>
-                <a:cs typeface="+mn-cs"/>
-              </a:rPr>
-              <a:t>st_k</a:t>
-            </a:r>
-            <a:r>
-              <a:rPr lang="en-US" sz="1200" kern="1200" dirty="0">
-                <a:solidFill>
-                  <a:schemeClr val="tx1"/>
-                </a:solidFill>
-                <a:effectLst/>
-                <a:latin typeface="+mn-lt"/>
-                <a:ea typeface="+mn-ea"/>
-                <a:cs typeface="+mn-cs"/>
-              </a:rPr>
-              <a:t>, \delta \</a:t>
-            </a:r>
-            <a:r>
-              <a:rPr lang="en-US" sz="1200" kern="1200" dirty="0" err="1">
-                <a:solidFill>
-                  <a:schemeClr val="tx1"/>
-                </a:solidFill>
-                <a:effectLst/>
-                <a:latin typeface="+mn-lt"/>
-                <a:ea typeface="+mn-ea"/>
-                <a:cs typeface="+mn-cs"/>
-              </a:rPr>
-              <a:t>ac_k</a:t>
-            </a:r>
-            <a:r>
-              <a:rPr lang="en-US" sz="1200" kern="1200" dirty="0">
-                <a:solidFill>
-                  <a:schemeClr val="tx1"/>
-                </a:solidFill>
-                <a:effectLst/>
-                <a:latin typeface="+mn-lt"/>
-                <a:ea typeface="+mn-ea"/>
-                <a:cs typeface="+mn-cs"/>
-              </a:rPr>
-              <a:t>) := \cost (\bar{\</a:t>
-            </a:r>
-            <a:r>
-              <a:rPr lang="en-US" sz="1200" kern="1200" dirty="0" err="1">
-                <a:solidFill>
-                  <a:schemeClr val="tx1"/>
-                </a:solidFill>
-                <a:effectLst/>
-                <a:latin typeface="+mn-lt"/>
-                <a:ea typeface="+mn-ea"/>
-                <a:cs typeface="+mn-cs"/>
-              </a:rPr>
-              <a:t>st</a:t>
-            </a:r>
-            <a:r>
-              <a:rPr lang="en-US" sz="1200" kern="1200" dirty="0">
-                <a:solidFill>
-                  <a:schemeClr val="tx1"/>
-                </a:solidFill>
-                <a:effectLst/>
-                <a:latin typeface="+mn-lt"/>
-                <a:ea typeface="+mn-ea"/>
-                <a:cs typeface="+mn-cs"/>
-              </a:rPr>
-              <a:t>}_k + \delta \</a:t>
-            </a:r>
-            <a:r>
-              <a:rPr lang="en-US" sz="1200" kern="1200" dirty="0" err="1">
-                <a:solidFill>
-                  <a:schemeClr val="tx1"/>
-                </a:solidFill>
-                <a:effectLst/>
-                <a:latin typeface="+mn-lt"/>
-                <a:ea typeface="+mn-ea"/>
-                <a:cs typeface="+mn-cs"/>
-              </a:rPr>
-              <a:t>st_k</a:t>
-            </a:r>
-            <a:r>
-              <a:rPr lang="en-US" sz="1200" kern="1200" dirty="0">
-                <a:solidFill>
-                  <a:schemeClr val="tx1"/>
-                </a:solidFill>
-                <a:effectLst/>
-                <a:latin typeface="+mn-lt"/>
-                <a:ea typeface="+mn-ea"/>
-                <a:cs typeface="+mn-cs"/>
-              </a:rPr>
-              <a:t>, \bar{\ac}_k + \delta \</a:t>
-            </a:r>
-            <a:r>
-              <a:rPr lang="en-US" sz="1200" kern="1200" dirty="0" err="1">
-                <a:solidFill>
-                  <a:schemeClr val="tx1"/>
-                </a:solidFill>
-                <a:effectLst/>
-                <a:latin typeface="+mn-lt"/>
-                <a:ea typeface="+mn-ea"/>
-                <a:cs typeface="+mn-cs"/>
-              </a:rPr>
-              <a:t>ac_k</a:t>
-            </a:r>
-            <a:r>
-              <a:rPr lang="en-US" sz="1200" kern="1200" dirty="0">
-                <a:solidFill>
-                  <a:schemeClr val="tx1"/>
-                </a:solidFill>
-                <a:effectLst/>
-                <a:latin typeface="+mn-lt"/>
-                <a:ea typeface="+mn-ea"/>
-                <a:cs typeface="+mn-cs"/>
-              </a:rPr>
-              <a:t>) + \J_{k+1}(\f(\bar{\</a:t>
-            </a:r>
-            <a:r>
-              <a:rPr lang="en-US" sz="1200" kern="1200" dirty="0" err="1">
-                <a:solidFill>
-                  <a:schemeClr val="tx1"/>
-                </a:solidFill>
-                <a:effectLst/>
-                <a:latin typeface="+mn-lt"/>
-                <a:ea typeface="+mn-ea"/>
-                <a:cs typeface="+mn-cs"/>
-              </a:rPr>
-              <a:t>st</a:t>
-            </a:r>
-            <a:r>
-              <a:rPr lang="en-US" sz="1200" kern="1200" dirty="0">
-                <a:solidFill>
-                  <a:schemeClr val="tx1"/>
-                </a:solidFill>
-                <a:effectLst/>
-                <a:latin typeface="+mn-lt"/>
-                <a:ea typeface="+mn-ea"/>
-                <a:cs typeface="+mn-cs"/>
-              </a:rPr>
-              <a:t>}_k + \delta \</a:t>
-            </a:r>
-            <a:r>
-              <a:rPr lang="en-US" sz="1200" kern="1200" dirty="0" err="1">
-                <a:solidFill>
-                  <a:schemeClr val="tx1"/>
-                </a:solidFill>
-                <a:effectLst/>
-                <a:latin typeface="+mn-lt"/>
-                <a:ea typeface="+mn-ea"/>
-                <a:cs typeface="+mn-cs"/>
-              </a:rPr>
-              <a:t>st_k</a:t>
-            </a:r>
-            <a:r>
-              <a:rPr lang="en-US" sz="1200" kern="1200" dirty="0">
-                <a:solidFill>
-                  <a:schemeClr val="tx1"/>
-                </a:solidFill>
-                <a:effectLst/>
-                <a:latin typeface="+mn-lt"/>
-                <a:ea typeface="+mn-ea"/>
-                <a:cs typeface="+mn-cs"/>
-              </a:rPr>
-              <a:t>, \bar{\ac}_k + \delta \</a:t>
-            </a:r>
-            <a:r>
-              <a:rPr lang="en-US" sz="1200" kern="1200" dirty="0" err="1">
-                <a:solidFill>
-                  <a:schemeClr val="tx1"/>
-                </a:solidFill>
-                <a:effectLst/>
-                <a:latin typeface="+mn-lt"/>
-                <a:ea typeface="+mn-ea"/>
-                <a:cs typeface="+mn-cs"/>
-              </a:rPr>
-              <a:t>ac_k</a:t>
-            </a:r>
-            <a:r>
-              <a:rPr lang="en-US" sz="1200" kern="1200" dirty="0">
-                <a:solidFill>
-                  <a:schemeClr val="tx1"/>
-                </a:solidFill>
-                <a:effectLst/>
-                <a:latin typeface="+mn-lt"/>
-                <a:ea typeface="+mn-ea"/>
-                <a:cs typeface="+mn-cs"/>
-              </a:rPr>
-              <a:t>))</a:t>
-            </a:r>
-          </a:p>
-          <a:p>
-            <a:endParaRPr lang="en-US" sz="1200" kern="1200" dirty="0">
-              <a:solidFill>
-                <a:schemeClr val="tx1"/>
-              </a:solidFill>
-              <a:effectLst/>
-              <a:latin typeface="+mn-lt"/>
-              <a:ea typeface="+mn-ea"/>
-              <a:cs typeface="+mn-cs"/>
-            </a:endParaRPr>
-          </a:p>
-          <a:p>
-            <a:pPr marL="0" marR="0" lvl="0" indent="0" algn="l" defTabSz="914400" rtl="0" eaLnBrk="1" fontAlgn="auto" latinLnBrk="0" hangingPunct="1">
-              <a:lnSpc>
-                <a:spcPct val="100000"/>
-              </a:lnSpc>
-              <a:spcBef>
-                <a:spcPts val="0"/>
-              </a:spcBef>
-              <a:spcAft>
-                <a:spcPts val="0"/>
-              </a:spcAft>
-              <a:buClrTx/>
-              <a:buSzTx/>
-              <a:buFontTx/>
-              <a:buNone/>
-              <a:tabLst/>
-              <a:defRPr/>
-            </a:pPr>
-            <a:r>
-              <a:rPr lang="en-US" sz="1200" kern="1200" dirty="0" err="1">
-                <a:solidFill>
-                  <a:schemeClr val="tx1"/>
-                </a:solidFill>
-                <a:effectLst/>
-                <a:latin typeface="+mn-lt"/>
-                <a:ea typeface="+mn-ea"/>
-                <a:cs typeface="+mn-cs"/>
-              </a:rPr>
-              <a:t>Q_k</a:t>
-            </a:r>
-            <a:r>
-              <a:rPr lang="en-US" sz="1200" kern="1200" dirty="0">
-                <a:solidFill>
-                  <a:schemeClr val="tx1"/>
-                </a:solidFill>
-                <a:effectLst/>
-                <a:latin typeface="+mn-lt"/>
-                <a:ea typeface="+mn-ea"/>
-                <a:cs typeface="+mn-cs"/>
-              </a:rPr>
-              <a:t>(\delta \</a:t>
-            </a:r>
-            <a:r>
-              <a:rPr lang="en-US" sz="1200" kern="1200" dirty="0" err="1">
-                <a:solidFill>
-                  <a:schemeClr val="tx1"/>
-                </a:solidFill>
-                <a:effectLst/>
-                <a:latin typeface="+mn-lt"/>
-                <a:ea typeface="+mn-ea"/>
-                <a:cs typeface="+mn-cs"/>
-              </a:rPr>
-              <a:t>st_k</a:t>
-            </a:r>
-            <a:r>
-              <a:rPr lang="en-US" sz="1200" kern="1200" dirty="0">
-                <a:solidFill>
-                  <a:schemeClr val="tx1"/>
-                </a:solidFill>
-                <a:effectLst/>
-                <a:latin typeface="+mn-lt"/>
-                <a:ea typeface="+mn-ea"/>
-                <a:cs typeface="+mn-cs"/>
-              </a:rPr>
-              <a:t>, \delta \</a:t>
-            </a:r>
-            <a:r>
-              <a:rPr lang="en-US" sz="1200" kern="1200" dirty="0" err="1">
-                <a:solidFill>
-                  <a:schemeClr val="tx1"/>
-                </a:solidFill>
-                <a:effectLst/>
-                <a:latin typeface="+mn-lt"/>
-                <a:ea typeface="+mn-ea"/>
-                <a:cs typeface="+mn-cs"/>
-              </a:rPr>
-              <a:t>ac_k</a:t>
-            </a:r>
-            <a:r>
-              <a:rPr lang="en-US" sz="1200" kern="1200" dirty="0">
-                <a:solidFill>
-                  <a:schemeClr val="tx1"/>
-                </a:solidFill>
-                <a:effectLst/>
-                <a:latin typeface="+mn-lt"/>
-                <a:ea typeface="+mn-ea"/>
-                <a:cs typeface="+mn-cs"/>
-              </a:rPr>
-              <a:t>) \</a:t>
-            </a:r>
-            <a:r>
-              <a:rPr lang="en-US" sz="1200" kern="1200" dirty="0" err="1">
-                <a:solidFill>
-                  <a:schemeClr val="tx1"/>
-                </a:solidFill>
-                <a:effectLst/>
-                <a:latin typeface="+mn-lt"/>
-                <a:ea typeface="+mn-ea"/>
-                <a:cs typeface="+mn-cs"/>
-              </a:rPr>
-              <a:t>approx</a:t>
-            </a:r>
-            <a:r>
-              <a:rPr lang="en-US" sz="1200" kern="1200" dirty="0">
-                <a:solidFill>
-                  <a:schemeClr val="tx1"/>
-                </a:solidFill>
-                <a:effectLst/>
-                <a:latin typeface="+mn-lt"/>
-                <a:ea typeface="+mn-ea"/>
-                <a:cs typeface="+mn-cs"/>
-              </a:rPr>
-              <a:t> </a:t>
-            </a:r>
-            <a:r>
-              <a:rPr lang="en-US" sz="1200" kern="1200" dirty="0" err="1">
-                <a:solidFill>
-                  <a:schemeClr val="tx1"/>
-                </a:solidFill>
-                <a:effectLst/>
-                <a:latin typeface="+mn-lt"/>
-                <a:ea typeface="+mn-ea"/>
-                <a:cs typeface="+mn-cs"/>
-              </a:rPr>
-              <a:t>Q_k</a:t>
-            </a:r>
-            <a:r>
-              <a:rPr lang="en-US" sz="1200" kern="1200" dirty="0">
-                <a:solidFill>
-                  <a:schemeClr val="tx1"/>
-                </a:solidFill>
-                <a:effectLst/>
-                <a:latin typeface="+mn-lt"/>
-                <a:ea typeface="+mn-ea"/>
-                <a:cs typeface="+mn-cs"/>
-              </a:rPr>
-              <a:t>(0, 0) + \</a:t>
-            </a:r>
-            <a:r>
-              <a:rPr lang="en-US" sz="1200" kern="1200" dirty="0" err="1">
-                <a:solidFill>
-                  <a:schemeClr val="tx1"/>
-                </a:solidFill>
-                <a:effectLst/>
-                <a:latin typeface="+mn-lt"/>
-                <a:ea typeface="+mn-ea"/>
-                <a:cs typeface="+mn-cs"/>
-              </a:rPr>
-              <a:t>nabla</a:t>
-            </a:r>
-            <a:r>
-              <a:rPr lang="en-US" sz="1200" kern="1200" dirty="0">
-                <a:solidFill>
-                  <a:schemeClr val="tx1"/>
-                </a:solidFill>
-                <a:effectLst/>
-                <a:latin typeface="+mn-lt"/>
-                <a:ea typeface="+mn-ea"/>
-                <a:cs typeface="+mn-cs"/>
-              </a:rPr>
-              <a:t> </a:t>
-            </a:r>
-            <a:r>
-              <a:rPr lang="en-US" sz="1200" kern="1200" dirty="0" err="1">
-                <a:solidFill>
-                  <a:schemeClr val="tx1"/>
-                </a:solidFill>
-                <a:effectLst/>
-                <a:latin typeface="+mn-lt"/>
-                <a:ea typeface="+mn-ea"/>
-                <a:cs typeface="+mn-cs"/>
-              </a:rPr>
-              <a:t>Q_k^T</a:t>
-            </a:r>
-            <a:r>
-              <a:rPr lang="en-US" sz="1200" kern="1200" dirty="0">
-                <a:solidFill>
-                  <a:schemeClr val="tx1"/>
-                </a:solidFill>
-                <a:effectLst/>
-                <a:latin typeface="+mn-lt"/>
-                <a:ea typeface="+mn-ea"/>
-                <a:cs typeface="+mn-cs"/>
-              </a:rPr>
-              <a:t>\begin{</a:t>
-            </a:r>
-            <a:r>
-              <a:rPr lang="en-US" sz="1200" kern="1200" dirty="0" err="1">
-                <a:solidFill>
-                  <a:schemeClr val="tx1"/>
-                </a:solidFill>
-                <a:effectLst/>
-                <a:latin typeface="+mn-lt"/>
-                <a:ea typeface="+mn-ea"/>
-                <a:cs typeface="+mn-cs"/>
-              </a:rPr>
-              <a:t>bmatrix</a:t>
-            </a:r>
-            <a:r>
-              <a:rPr lang="en-US" sz="1200" kern="1200" dirty="0">
-                <a:solidFill>
-                  <a:schemeClr val="tx1"/>
-                </a:solidFill>
-                <a:effectLst/>
-                <a:latin typeface="+mn-lt"/>
-                <a:ea typeface="+mn-ea"/>
-                <a:cs typeface="+mn-cs"/>
-              </a:rPr>
-              <a:t>}\delta \</a:t>
-            </a:r>
-            <a:r>
-              <a:rPr lang="en-US" sz="1200" kern="1200" dirty="0" err="1">
-                <a:solidFill>
-                  <a:schemeClr val="tx1"/>
-                </a:solidFill>
-                <a:effectLst/>
-                <a:latin typeface="+mn-lt"/>
-                <a:ea typeface="+mn-ea"/>
-                <a:cs typeface="+mn-cs"/>
-              </a:rPr>
-              <a:t>x_k</a:t>
-            </a:r>
-            <a:r>
-              <a:rPr lang="en-US" sz="1200" kern="1200" dirty="0">
-                <a:solidFill>
-                  <a:schemeClr val="tx1"/>
-                </a:solidFill>
-                <a:effectLst/>
-                <a:latin typeface="+mn-lt"/>
-                <a:ea typeface="+mn-ea"/>
-                <a:cs typeface="+mn-cs"/>
-              </a:rPr>
-              <a:t> \\ \delta \</a:t>
-            </a:r>
-            <a:r>
-              <a:rPr lang="en-US" sz="1200" kern="1200" dirty="0" err="1">
-                <a:solidFill>
-                  <a:schemeClr val="tx1"/>
-                </a:solidFill>
-                <a:effectLst/>
-                <a:latin typeface="+mn-lt"/>
-                <a:ea typeface="+mn-ea"/>
-                <a:cs typeface="+mn-cs"/>
-              </a:rPr>
-              <a:t>u_k</a:t>
-            </a:r>
-            <a:r>
-              <a:rPr lang="en-US" sz="1200" kern="1200" dirty="0">
-                <a:solidFill>
-                  <a:schemeClr val="tx1"/>
-                </a:solidFill>
-                <a:effectLst/>
-                <a:latin typeface="+mn-lt"/>
-                <a:ea typeface="+mn-ea"/>
-                <a:cs typeface="+mn-cs"/>
-              </a:rPr>
-              <a:t>\end{</a:t>
-            </a:r>
-            <a:r>
-              <a:rPr lang="en-US" sz="1200" kern="1200" dirty="0" err="1">
-                <a:solidFill>
-                  <a:schemeClr val="tx1"/>
-                </a:solidFill>
-                <a:effectLst/>
-                <a:latin typeface="+mn-lt"/>
-                <a:ea typeface="+mn-ea"/>
-                <a:cs typeface="+mn-cs"/>
-              </a:rPr>
-              <a:t>bmatrix</a:t>
-            </a:r>
-            <a:r>
-              <a:rPr lang="en-US" sz="1200" kern="1200" dirty="0">
-                <a:solidFill>
-                  <a:schemeClr val="tx1"/>
-                </a:solidFill>
-                <a:effectLst/>
-                <a:latin typeface="+mn-lt"/>
-                <a:ea typeface="+mn-ea"/>
-                <a:cs typeface="+mn-cs"/>
-              </a:rPr>
-              <a:t>} + \frac{1}{2}\begin{</a:t>
-            </a:r>
-            <a:r>
-              <a:rPr lang="en-US" sz="1200" kern="1200" dirty="0" err="1">
-                <a:solidFill>
-                  <a:schemeClr val="tx1"/>
-                </a:solidFill>
-                <a:effectLst/>
-                <a:latin typeface="+mn-lt"/>
-                <a:ea typeface="+mn-ea"/>
-                <a:cs typeface="+mn-cs"/>
-              </a:rPr>
-              <a:t>bmatrix</a:t>
-            </a:r>
-            <a:r>
-              <a:rPr lang="en-US" sz="1200" kern="1200" dirty="0">
-                <a:solidFill>
-                  <a:schemeClr val="tx1"/>
-                </a:solidFill>
-                <a:effectLst/>
-                <a:latin typeface="+mn-lt"/>
-                <a:ea typeface="+mn-ea"/>
-                <a:cs typeface="+mn-cs"/>
-              </a:rPr>
-              <a:t>}\delta \</a:t>
-            </a:r>
-            <a:r>
-              <a:rPr lang="en-US" sz="1200" kern="1200" dirty="0" err="1">
-                <a:solidFill>
-                  <a:schemeClr val="tx1"/>
-                </a:solidFill>
-                <a:effectLst/>
-                <a:latin typeface="+mn-lt"/>
-                <a:ea typeface="+mn-ea"/>
-                <a:cs typeface="+mn-cs"/>
-              </a:rPr>
-              <a:t>x_k</a:t>
-            </a:r>
-            <a:r>
-              <a:rPr lang="en-US" sz="1200" kern="1200" dirty="0">
-                <a:solidFill>
-                  <a:schemeClr val="tx1"/>
-                </a:solidFill>
-                <a:effectLst/>
-                <a:latin typeface="+mn-lt"/>
-                <a:ea typeface="+mn-ea"/>
-                <a:cs typeface="+mn-cs"/>
-              </a:rPr>
-              <a:t> \\ \delta \</a:t>
-            </a:r>
-            <a:r>
-              <a:rPr lang="en-US" sz="1200" kern="1200" dirty="0" err="1">
-                <a:solidFill>
-                  <a:schemeClr val="tx1"/>
-                </a:solidFill>
-                <a:effectLst/>
-                <a:latin typeface="+mn-lt"/>
-                <a:ea typeface="+mn-ea"/>
-                <a:cs typeface="+mn-cs"/>
-              </a:rPr>
-              <a:t>u_k</a:t>
-            </a:r>
-            <a:r>
-              <a:rPr lang="en-US" sz="1200" kern="1200" dirty="0">
-                <a:solidFill>
-                  <a:schemeClr val="tx1"/>
-                </a:solidFill>
-                <a:effectLst/>
-                <a:latin typeface="+mn-lt"/>
-                <a:ea typeface="+mn-ea"/>
-                <a:cs typeface="+mn-cs"/>
-              </a:rPr>
-              <a:t>\end{</a:t>
-            </a:r>
-            <a:r>
-              <a:rPr lang="en-US" sz="1200" kern="1200" dirty="0" err="1">
-                <a:solidFill>
-                  <a:schemeClr val="tx1"/>
-                </a:solidFill>
-                <a:effectLst/>
-                <a:latin typeface="+mn-lt"/>
-                <a:ea typeface="+mn-ea"/>
-                <a:cs typeface="+mn-cs"/>
-              </a:rPr>
-              <a:t>bmatrix</a:t>
-            </a:r>
-            <a:r>
-              <a:rPr lang="en-US" sz="1200" kern="1200" dirty="0">
-                <a:solidFill>
-                  <a:schemeClr val="tx1"/>
-                </a:solidFill>
-                <a:effectLst/>
-                <a:latin typeface="+mn-lt"/>
-                <a:ea typeface="+mn-ea"/>
-                <a:cs typeface="+mn-cs"/>
-              </a:rPr>
-              <a:t>} \nabla^2 </a:t>
-            </a:r>
-            <a:r>
-              <a:rPr lang="en-US" sz="1200" kern="1200" dirty="0" err="1">
-                <a:solidFill>
-                  <a:schemeClr val="tx1"/>
-                </a:solidFill>
-                <a:effectLst/>
-                <a:latin typeface="+mn-lt"/>
-                <a:ea typeface="+mn-ea"/>
-                <a:cs typeface="+mn-cs"/>
-              </a:rPr>
-              <a:t>Q_k</a:t>
-            </a:r>
-            <a:r>
-              <a:rPr lang="en-US" sz="1200" kern="1200" dirty="0">
-                <a:solidFill>
-                  <a:schemeClr val="tx1"/>
-                </a:solidFill>
-                <a:effectLst/>
-                <a:latin typeface="+mn-lt"/>
-                <a:ea typeface="+mn-ea"/>
-                <a:cs typeface="+mn-cs"/>
-              </a:rPr>
-              <a:t> \begin{</a:t>
-            </a:r>
-            <a:r>
-              <a:rPr lang="en-US" sz="1200" kern="1200" dirty="0" err="1">
-                <a:solidFill>
-                  <a:schemeClr val="tx1"/>
-                </a:solidFill>
-                <a:effectLst/>
-                <a:latin typeface="+mn-lt"/>
-                <a:ea typeface="+mn-ea"/>
-                <a:cs typeface="+mn-cs"/>
-              </a:rPr>
-              <a:t>bmatrix</a:t>
-            </a:r>
-            <a:r>
-              <a:rPr lang="en-US" sz="1200" kern="1200" dirty="0">
-                <a:solidFill>
-                  <a:schemeClr val="tx1"/>
-                </a:solidFill>
-                <a:effectLst/>
-                <a:latin typeface="+mn-lt"/>
-                <a:ea typeface="+mn-ea"/>
-                <a:cs typeface="+mn-cs"/>
-              </a:rPr>
-              <a:t>}\delta \</a:t>
-            </a:r>
-            <a:r>
-              <a:rPr lang="en-US" sz="1200" kern="1200" dirty="0" err="1">
-                <a:solidFill>
-                  <a:schemeClr val="tx1"/>
-                </a:solidFill>
-                <a:effectLst/>
-                <a:latin typeface="+mn-lt"/>
-                <a:ea typeface="+mn-ea"/>
-                <a:cs typeface="+mn-cs"/>
-              </a:rPr>
-              <a:t>x_k</a:t>
-            </a:r>
-            <a:r>
-              <a:rPr lang="en-US" sz="1200" kern="1200" dirty="0">
-                <a:solidFill>
-                  <a:schemeClr val="tx1"/>
-                </a:solidFill>
-                <a:effectLst/>
-                <a:latin typeface="+mn-lt"/>
-                <a:ea typeface="+mn-ea"/>
-                <a:cs typeface="+mn-cs"/>
-              </a:rPr>
-              <a:t> \\ \delta \</a:t>
-            </a:r>
-            <a:r>
-              <a:rPr lang="en-US" sz="1200" kern="1200" dirty="0" err="1">
-                <a:solidFill>
-                  <a:schemeClr val="tx1"/>
-                </a:solidFill>
-                <a:effectLst/>
-                <a:latin typeface="+mn-lt"/>
-                <a:ea typeface="+mn-ea"/>
-                <a:cs typeface="+mn-cs"/>
-              </a:rPr>
-              <a:t>u_k</a:t>
-            </a:r>
-            <a:r>
-              <a:rPr lang="en-US" sz="1200" kern="1200" dirty="0">
-                <a:solidFill>
-                  <a:schemeClr val="tx1"/>
-                </a:solidFill>
-                <a:effectLst/>
-                <a:latin typeface="+mn-lt"/>
-                <a:ea typeface="+mn-ea"/>
-                <a:cs typeface="+mn-cs"/>
-              </a:rPr>
-              <a:t>\end{</a:t>
-            </a:r>
-            <a:r>
-              <a:rPr lang="en-US" sz="1200" kern="1200" dirty="0" err="1">
-                <a:solidFill>
-                  <a:schemeClr val="tx1"/>
-                </a:solidFill>
-                <a:effectLst/>
-                <a:latin typeface="+mn-lt"/>
-                <a:ea typeface="+mn-ea"/>
-                <a:cs typeface="+mn-cs"/>
-              </a:rPr>
-              <a:t>bmatrix</a:t>
-            </a:r>
-            <a:r>
-              <a:rPr lang="en-US" sz="1200" kern="1200" dirty="0">
-                <a:solidFill>
-                  <a:schemeClr val="tx1"/>
-                </a:solidFill>
-                <a:effectLst/>
-                <a:latin typeface="+mn-lt"/>
-                <a:ea typeface="+mn-ea"/>
-                <a:cs typeface="+mn-cs"/>
-              </a:rPr>
-              <a:t>}</a:t>
-            </a:r>
-          </a:p>
           <a:p>
             <a:endParaRPr lang="en-US" sz="1200" kern="1200" dirty="0">
               <a:solidFill>
@@ -7618,7 +1834,7 @@
           <a:p>
             <a:fld id="{2128423C-C6A5-A34F-A0D2-6D4ABEE49904}" type="datetime1">
               <a:rPr lang="en-US" smtClean="0"/>
-              <a:t>4/22/26</a:t>
+              <a:t>8/13/26</a:t>
             </a:fld>
             <a:endParaRPr lang="en-US" dirty="0"/>
           </a:p>
@@ -7836,7 +2052,7 @@
           <a:p>
             <a:fld id="{7268AB72-D9B1-8C4C-9C48-EFDB2E77DD98}" type="datetime1">
               <a:rPr lang="en-US" smtClean="0"/>
-              <a:t>4/22/26</a:t>
+              <a:t>8/13/26</a:t>
             </a:fld>
             <a:endParaRPr lang="en-US"/>
           </a:p>
@@ -8018,7 +2234,7 @@
           <a:p>
             <a:fld id="{FCCE93EC-EA0B-CC46-AC56-BF4E1EFA15E4}" type="datetime1">
               <a:rPr lang="en-US" smtClean="0"/>
-              <a:t>4/22/26</a:t>
+              <a:t>8/13/26</a:t>
             </a:fld>
             <a:endParaRPr lang="en-US"/>
           </a:p>
@@ -8226,7 +2442,7 @@
           <a:p>
             <a:fld id="{3207243D-590F-9743-81B7-6CF33249CF4A}" type="datetime1">
               <a:rPr lang="en-US" smtClean="0"/>
-              <a:t>4/22/26</a:t>
+              <a:t>8/13/26</a:t>
             </a:fld>
             <a:endParaRPr lang="en-US"/>
           </a:p>
@@ -8531,7 +2747,7 @@
           <a:p>
             <a:fld id="{36CADDF4-12AD-2943-BB48-5F323F89CED8}" type="datetime1">
               <a:rPr lang="en-US" smtClean="0"/>
-              <a:t>4/22/26</a:t>
+              <a:t>8/13/26</a:t>
             </a:fld>
             <a:endParaRPr lang="en-US"/>
           </a:p>
@@ -8764,7 +2980,7 @@
           <a:p>
             <a:fld id="{7FB64788-0CCD-9442-BDCD-596FFE670DBE}" type="datetime1">
               <a:rPr lang="en-US" smtClean="0"/>
-              <a:t>4/22/26</a:t>
+              <a:t>8/13/26</a:t>
             </a:fld>
             <a:endParaRPr lang="en-US"/>
           </a:p>
@@ -9132,7 +3348,7 @@
           <a:p>
             <a:fld id="{E1303F0C-7227-1C4B-A350-78CD4B66FA22}" type="datetime1">
               <a:rPr lang="en-US" smtClean="0"/>
-              <a:t>4/22/26</a:t>
+              <a:t>8/13/26</a:t>
             </a:fld>
             <a:endParaRPr lang="en-US"/>
           </a:p>
@@ -9253,7 +3469,7 @@
           <a:p>
             <a:fld id="{29A87733-DCC4-6548-B021-3F478B72C012}" type="datetime1">
               <a:rPr lang="en-US" smtClean="0"/>
-              <a:t>4/22/26</a:t>
+              <a:t>8/13/26</a:t>
             </a:fld>
             <a:endParaRPr lang="en-US"/>
           </a:p>
@@ -9352,7 +3568,7 @@
           <a:p>
             <a:fld id="{649AC9FA-1DDD-B443-BBEA-18BEAECB5027}" type="datetime1">
               <a:rPr lang="en-US" smtClean="0"/>
-              <a:t>4/22/26</a:t>
+              <a:t>8/13/26</a:t>
             </a:fld>
             <a:endParaRPr lang="en-US"/>
           </a:p>
@@ -9631,7 +3847,7 @@
           <a:p>
             <a:fld id="{96BF379F-FF63-FC49-9F5C-321A5F3FC6EA}" type="datetime1">
               <a:rPr lang="en-US" smtClean="0"/>
-              <a:t>4/22/26</a:t>
+              <a:t>8/13/26</a:t>
             </a:fld>
             <a:endParaRPr lang="en-US"/>
           </a:p>
@@ -9887,7 +4103,7 @@
           <a:p>
             <a:fld id="{389D6C44-2A53-2F43-97F0-5C93B0CB6997}" type="datetime1">
               <a:rPr lang="en-US" smtClean="0"/>
-              <a:t>4/22/26</a:t>
+              <a:t>8/13/26</a:t>
             </a:fld>
             <a:endParaRPr lang="en-US"/>
           </a:p>
@@ -10102,7 +4318,7 @@
           <a:p>
             <a:fld id="{BC17A12D-7F74-4B40-AEDD-DBAA40841E3F}" type="datetime1">
               <a:rPr lang="en-US" smtClean="0"/>
-              <a:t>4/22/26</a:t>
+              <a:t>8/13/26</a:t>
             </a:fld>
             <a:endParaRPr lang="en-US"/>
           </a:p>
@@ -10713,7 +4929,7 @@
                           <m:accPr>
                             <m:chr m:val="̅"/>
                             <m:ctrlPr>
-                              <a:rPr lang="en-US" sz="2000" b="0" i="1" smtClean="0">
+                              <a:rPr lang="en-US" sz="2000" b="1" i="1" smtClean="0">
                                 <a:latin typeface="Cambria Math" panose="02040503050406030204" pitchFamily="18" charset="0"/>
                               </a:rPr>
                             </m:ctrlPr>
@@ -10752,7 +4968,7 @@
                     <m:sSubSup>
                       <m:sSubSupPr>
                         <m:ctrlPr>
-                          <a:rPr lang="en-US" sz="2000" b="0" i="1" smtClean="0">
+                          <a:rPr lang="en-US" sz="2000" b="1" i="1" smtClean="0">
                             <a:latin typeface="Cambria Math" panose="02040503050406030204" pitchFamily="18" charset="0"/>
                           </a:rPr>
                         </m:ctrlPr>
@@ -10809,7 +5025,7 @@
                           <m:accPr>
                             <m:chr m:val="̅"/>
                             <m:ctrlPr>
-                              <a:rPr lang="en-US" sz="2000" i="1">
+                              <a:rPr lang="en-US" sz="2000" b="1" i="1" smtClean="0">
                                 <a:latin typeface="Cambria Math" panose="02040503050406030204" pitchFamily="18" charset="0"/>
                               </a:rPr>
                             </m:ctrlPr>
@@ -10848,7 +5064,7 @@
                     <m:sSubSup>
                       <m:sSubSupPr>
                         <m:ctrlPr>
-                          <a:rPr lang="en-US" sz="2000" b="0" i="1" smtClean="0">
+                          <a:rPr lang="en-US" sz="2000" b="1" i="1" smtClean="0">
                             <a:latin typeface="Cambria Math" panose="02040503050406030204" pitchFamily="18" charset="0"/>
                           </a:rPr>
                         </m:ctrlPr>
@@ -10996,7 +5212,7 @@
           <a:p>
             <a:fld id="{17F0B419-12A8-7748-AE65-D02F87269E3F}" type="datetime1">
               <a:rPr lang="en-US" smtClean="0"/>
-              <a:t>4/22/26</a:t>
+              <a:t>8/13/26</a:t>
             </a:fld>
             <a:endParaRPr lang="en-US"/>
           </a:p>
@@ -11364,7 +5580,7 @@
           <a:p>
             <a:fld id="{2F4209A5-AF80-ED4F-A9DD-8C8F638A45AE}" type="datetime1">
               <a:rPr lang="en-US" smtClean="0"/>
-              <a:t>4/22/26</a:t>
+              <a:t>8/13/26</a:t>
             </a:fld>
             <a:endParaRPr lang="en-US"/>
           </a:p>
@@ -11488,7 +5704,7 @@
           <a:p>
             <a:fld id="{E3EFBBD3-32A5-9444-9249-9D669AF48E95}" type="datetime1">
               <a:rPr lang="en-US" smtClean="0"/>
-              <a:t>4/22/26</a:t>
+              <a:t>8/13/26</a:t>
             </a:fld>
             <a:endParaRPr lang="en-US"/>
           </a:p>
@@ -11632,10 +5848,7 @@
                     <a:pPr/>
                     <a14:m>
                       <m:oMathPara xmlns:m="http://schemas.openxmlformats.org/officeDocument/2006/math">
-                        <m:oMathParaPr>
-                          <m:jc m:val="centerGroup"/>
-                        </m:oMathParaPr>
-                        <m:oMath xmlns:m="http://schemas.openxmlformats.org/officeDocument/2006/math">
+                        <m:oMath>
                           <m:r>
                             <m:rPr>
                               <m:sty m:val="p"/>
@@ -11695,7 +5908,7 @@
                               <m:sSub>
                                 <m:sSubPr>
                                   <m:ctrlPr>
-                                    <a:rPr lang="en-US" sz="1600" b="0" i="1" smtClean="0">
+                                    <a:rPr lang="en-US" sz="1600" i="1">
                                       <a:solidFill>
                                         <a:schemeClr val="tx1"/>
                                       </a:solidFill>
@@ -11740,7 +5953,7 @@
                               <m:d>
                                 <m:dPr>
                                   <m:ctrlPr>
-                                    <a:rPr lang="en-US" sz="1600" b="0" i="1" smtClean="0">
+                                    <a:rPr lang="en-US" sz="1600" b="1">
                                       <a:solidFill>
                                         <a:schemeClr val="tx1"/>
                                       </a:solidFill>
@@ -11955,7 +6168,7 @@
                           <m:accPr>
                             <m:chr m:val="̇"/>
                             <m:ctrlPr>
-                              <a:rPr lang="en-US" sz="1600" i="1" smtClean="0">
+                              <a:rPr lang="en-US" sz="1600" b="1">
                                 <a:solidFill>
                                   <a:schemeClr val="tx1"/>
                                 </a:solidFill>
@@ -12005,7 +6218,7 @@
                         <m:sSub>
                           <m:sSubPr>
                             <m:ctrlPr>
-                              <a:rPr lang="en-US" sz="1600" b="1" i="1" smtClean="0">
+                              <a:rPr lang="en-US" sz="1600" b="1" i="0" smtClean="0">
                                 <a:solidFill>
                                   <a:schemeClr val="tx1"/>
                                 </a:solidFill>
@@ -12048,7 +6261,7 @@
                         <m:d>
                           <m:dPr>
                             <m:ctrlPr>
-                              <a:rPr lang="en-US" sz="1600" b="0" i="1" smtClean="0">
+                              <a:rPr lang="en-US" sz="1600" b="1">
                                 <a:solidFill>
                                   <a:schemeClr val="tx1"/>
                                 </a:solidFill>
@@ -12185,7 +6398,7 @@
                           <m:rPr>
                             <m:nor/>
                           </m:rPr>
-                          <a:rPr lang="en-US" sz="1600" dirty="0">
+                          <a:rPr lang="en-US" sz="1600" i="0" dirty="0">
                             <a:solidFill>
                               <a:schemeClr val="tx1"/>
                             </a:solidFill>
@@ -12195,7 +6408,7 @@
                         <m:sSub>
                           <m:sSubPr>
                             <m:ctrlPr>
-                              <a:rPr lang="en-US" sz="1600" i="1" smtClean="0">
+                              <a:rPr lang="en-US" sz="1600" i="1">
                                 <a:solidFill>
                                   <a:schemeClr val="tx1"/>
                                 </a:solidFill>
@@ -12230,7 +6443,7 @@
                           <m:rPr>
                             <m:nor/>
                           </m:rPr>
-                          <a:rPr lang="en-US" sz="1600" dirty="0">
+                          <a:rPr lang="en-US" sz="1600" i="0" dirty="0">
                             <a:solidFill>
                               <a:schemeClr val="tx1"/>
                             </a:solidFill>
@@ -12369,7 +6582,7 @@
                         <m:sSub>
                           <m:sSubPr>
                             <m:ctrlPr>
-                              <a:rPr lang="en-US" sz="1600" i="1">
+                              <a:rPr lang="en-US" sz="1600" b="1">
                                 <a:solidFill>
                                   <a:schemeClr val="tx1"/>
                                 </a:solidFill>
@@ -12481,7 +6694,7 @@
                         <m:sSub>
                           <m:sSubPr>
                             <m:ctrlPr>
-                              <a:rPr lang="en-US" sz="1600" b="1" i="1" smtClean="0">
+                              <a:rPr lang="en-US" sz="1600" b="1" i="0" smtClean="0">
                                 <a:solidFill>
                                   <a:schemeClr val="tx1"/>
                                 </a:solidFill>
@@ -12602,18 +6815,15 @@
                   <a:pPr/>
                   <a14:m>
                     <m:oMathPara xmlns:m="http://schemas.openxmlformats.org/officeDocument/2006/math">
-                      <m:oMathParaPr>
-                        <m:jc m:val="centerGroup"/>
-                      </m:oMathParaPr>
-                      <m:oMath xmlns:m="http://schemas.openxmlformats.org/officeDocument/2006/math">
+                      <m:oMath>
                         <m:sSub>
                           <m:sSubPr>
                             <m:ctrlPr>
-                              <a:rPr lang="en-US" b="0" i="1" smtClean="0">
+                              <a:rPr lang="en-US" i="0" dirty="0">
                                 <a:solidFill>
                                   <a:schemeClr val="tx1"/>
                                 </a:solidFill>
-                                <a:latin typeface="Cambria Math" panose="02040503050406030204" pitchFamily="18" charset="0"/>
+                                <a:latin typeface="Source Sans Pro" panose="020B0503030403020204" pitchFamily="34" charset="0"/>
                                 <a:ea typeface="Source Sans Pro" panose="020B0503030403020204" pitchFamily="34" charset="0"/>
                               </a:rPr>
                             </m:ctrlPr>
@@ -12623,7 +6833,7 @@
                               <m:rPr>
                                 <m:nor/>
                               </m:rPr>
-                              <a:rPr lang="en-US" dirty="0">
+                              <a:rPr lang="en-US" i="0" dirty="0">
                                 <a:solidFill>
                                   <a:schemeClr val="tx1"/>
                                 </a:solidFill>
@@ -12636,7 +6846,7 @@
                               <m:rPr>
                                 <m:nor/>
                               </m:rPr>
-                              <a:rPr lang="en-US" b="1" dirty="0">
+                              <a:rPr lang="en-US" b="1" i="0" dirty="0">
                                 <a:solidFill>
                                   <a:schemeClr val="tx1"/>
                                 </a:solidFill>
@@ -12649,7 +6859,7 @@
                               <m:rPr>
                                 <m:nor/>
                               </m:rPr>
-                              <a:rPr lang="en-US" dirty="0">
+                              <a:rPr lang="en-US" i="0" dirty="0">
                                 <a:solidFill>
                                   <a:schemeClr val="tx1"/>
                                 </a:solidFill>
@@ -12904,7 +7114,7 @@
                         <m:rPr>
                           <m:nor/>
                         </m:rPr>
-                        <a:rPr lang="en-US" sz="1600" dirty="0">
+                        <a:rPr lang="en-US" sz="1600" i="0" dirty="0">
                           <a:solidFill>
                             <a:schemeClr val="tx1"/>
                           </a:solidFill>
@@ -12914,7 +7124,7 @@
                       <m:sSub>
                         <m:sSubPr>
                           <m:ctrlPr>
-                            <a:rPr lang="en-US" sz="1600" i="1" smtClean="0">
+                            <a:rPr lang="en-US" sz="1600" i="1">
                               <a:solidFill>
                                 <a:schemeClr val="tx1"/>
                               </a:solidFill>
@@ -12949,7 +7159,7 @@
                         <m:rPr>
                           <m:nor/>
                         </m:rPr>
-                        <a:rPr lang="en-US" sz="1600" dirty="0">
+                        <a:rPr lang="en-US" sz="1600" i="0" dirty="0">
                           <a:solidFill>
                             <a:schemeClr val="tx1"/>
                           </a:solidFill>
@@ -13197,7 +7407,7 @@
                             <m:sSub>
                               <m:sSubPr>
                                 <m:ctrlPr>
-                                  <a:rPr lang="en-US" sz="1600" i="1">
+                                  <a:rPr lang="en-US" sz="1600" b="1" i="0">
                                     <a:solidFill>
                                       <a:srgbClr val="C00000"/>
                                     </a:solidFill>
@@ -13263,7 +7473,7 @@
                             <m:sSub>
                               <m:sSubPr>
                                 <m:ctrlPr>
-                                  <a:rPr lang="en-US" sz="1600" i="1">
+                                  <a:rPr lang="en-US" sz="1600" b="1" i="0">
                                     <a:solidFill>
                                       <a:srgbClr val="C00000"/>
                                     </a:solidFill>
@@ -13443,11 +7653,11 @@
                         <m:sSub>
                           <m:sSubPr>
                             <m:ctrlPr>
-                              <a:rPr lang="en-US" sz="1600" i="1" smtClean="0">
+                              <a:rPr lang="en-US" sz="1600" i="0" dirty="0">
                                 <a:solidFill>
                                   <a:srgbClr val="C00000"/>
                                 </a:solidFill>
-                                <a:latin typeface="Cambria Math" panose="02040503050406030204" pitchFamily="18" charset="0"/>
+                                <a:latin typeface="Source Sans Pro" panose="020B0503030403020204" pitchFamily="34" charset="77"/>
                               </a:rPr>
                             </m:ctrlPr>
                           </m:sSubPr>
@@ -13456,7 +7666,7 @@
                               <m:rPr>
                                 <m:nor/>
                               </m:rPr>
-                              <a:rPr lang="en-US" sz="1600" dirty="0">
+                              <a:rPr lang="en-US" sz="1600" i="0" dirty="0">
                                 <a:solidFill>
                                   <a:srgbClr val="C00000"/>
                                 </a:solidFill>
@@ -13468,7 +7678,7 @@
                               <m:rPr>
                                 <m:nor/>
                               </m:rPr>
-                              <a:rPr lang="en-US" sz="1600" b="1" dirty="0">
+                              <a:rPr lang="en-US" sz="1600" b="1" i="0" dirty="0">
                                 <a:solidFill>
                                   <a:srgbClr val="C00000"/>
                                 </a:solidFill>
@@ -13480,7 +7690,7 @@
                               <m:rPr>
                                 <m:nor/>
                               </m:rPr>
-                              <a:rPr lang="en-US" sz="1600" dirty="0">
+                              <a:rPr lang="en-US" sz="1600" i="0" dirty="0">
                                 <a:solidFill>
                                   <a:srgbClr val="C00000"/>
                                 </a:solidFill>
@@ -13631,11 +7841,11 @@
                         <m:sSub>
                           <m:sSubPr>
                             <m:ctrlPr>
-                              <a:rPr lang="en-US" sz="1600" i="1" smtClean="0">
+                              <a:rPr lang="en-US" sz="1600" i="0" dirty="0">
                                 <a:solidFill>
                                   <a:srgbClr val="C00000"/>
                                 </a:solidFill>
-                                <a:latin typeface="Cambria Math" panose="02040503050406030204" pitchFamily="18" charset="0"/>
+                                <a:latin typeface="Source Sans Pro" panose="020B0503030403020204" pitchFamily="34" charset="77"/>
                               </a:rPr>
                             </m:ctrlPr>
                           </m:sSubPr>
@@ -13644,7 +7854,7 @@
                               <m:rPr>
                                 <m:nor/>
                               </m:rPr>
-                              <a:rPr lang="en-US" sz="1600" dirty="0">
+                              <a:rPr lang="en-US" sz="1600" i="0" dirty="0">
                                 <a:solidFill>
                                   <a:srgbClr val="C00000"/>
                                 </a:solidFill>
@@ -13656,7 +7866,7 @@
                               <m:rPr>
                                 <m:nor/>
                               </m:rPr>
-                              <a:rPr lang="en-US" sz="1600" b="1" dirty="0">
+                              <a:rPr lang="en-US" sz="1600" b="1" i="0" dirty="0">
                                 <a:solidFill>
                                   <a:srgbClr val="C00000"/>
                                 </a:solidFill>
@@ -13668,7 +7878,7 @@
                               <m:rPr>
                                 <m:nor/>
                               </m:rPr>
-                              <a:rPr lang="en-US" sz="1600" dirty="0">
+                              <a:rPr lang="en-US" sz="1600" i="0" dirty="0">
                                 <a:solidFill>
                                   <a:srgbClr val="C00000"/>
                                 </a:solidFill>
@@ -13714,11 +7924,11 @@
                         <m:sSub>
                           <m:sSubPr>
                             <m:ctrlPr>
-                              <a:rPr lang="en-US" sz="1600" i="1" smtClean="0">
+                              <a:rPr lang="en-US" sz="1600" i="0" dirty="0">
                                 <a:solidFill>
                                   <a:srgbClr val="C00000"/>
                                 </a:solidFill>
-                                <a:latin typeface="Cambria Math" panose="02040503050406030204" pitchFamily="18" charset="0"/>
+                                <a:latin typeface="Source Sans Pro" panose="020B0503030403020204" pitchFamily="34" charset="77"/>
                               </a:rPr>
                             </m:ctrlPr>
                           </m:sSubPr>
@@ -13727,7 +7937,7 @@
                               <m:rPr>
                                 <m:nor/>
                               </m:rPr>
-                              <a:rPr lang="en-US" sz="1600" dirty="0">
+                              <a:rPr lang="en-US" sz="1600" i="0" dirty="0">
                                 <a:solidFill>
                                   <a:srgbClr val="C00000"/>
                                 </a:solidFill>
@@ -13739,7 +7949,7 @@
                               <m:rPr>
                                 <m:nor/>
                               </m:rPr>
-                              <a:rPr lang="en-US" sz="1600" b="1" dirty="0">
+                              <a:rPr lang="en-US" sz="1600" b="1" i="0" dirty="0">
                                 <a:solidFill>
                                   <a:srgbClr val="C00000"/>
                                 </a:solidFill>
@@ -13751,7 +7961,7 @@
                               <m:rPr>
                                 <m:nor/>
                               </m:rPr>
-                              <a:rPr lang="en-US" sz="1600" dirty="0">
+                              <a:rPr lang="en-US" sz="1600" i="0" dirty="0">
                                 <a:solidFill>
                                   <a:srgbClr val="C00000"/>
                                 </a:solidFill>
@@ -14011,11 +8221,11 @@
                         <m:sSub>
                           <m:sSubPr>
                             <m:ctrlPr>
-                              <a:rPr lang="en-US" sz="1600" i="1">
+                              <a:rPr lang="en-US" sz="1600" i="0" dirty="0">
                                 <a:solidFill>
                                   <a:srgbClr val="C00000"/>
                                 </a:solidFill>
-                                <a:latin typeface="Cambria Math" panose="02040503050406030204" pitchFamily="18" charset="0"/>
+                                <a:latin typeface="Source Sans Pro" panose="020B0503030403020204" pitchFamily="34" charset="77"/>
                               </a:rPr>
                             </m:ctrlPr>
                           </m:sSubPr>
@@ -14024,7 +8234,7 @@
                               <m:rPr>
                                 <m:nor/>
                               </m:rPr>
-                              <a:rPr lang="en-US" sz="1600" dirty="0">
+                              <a:rPr lang="en-US" sz="1600" i="0" dirty="0">
                                 <a:solidFill>
                                   <a:srgbClr val="C00000"/>
                                 </a:solidFill>
@@ -14036,7 +8246,7 @@
                               <m:rPr>
                                 <m:nor/>
                               </m:rPr>
-                              <a:rPr lang="en-US" sz="1600" b="1" dirty="0">
+                              <a:rPr lang="en-US" sz="1600" b="1" i="0" dirty="0">
                                 <a:solidFill>
                                   <a:srgbClr val="C00000"/>
                                 </a:solidFill>
@@ -14048,7 +8258,7 @@
                               <m:rPr>
                                 <m:nor/>
                               </m:rPr>
-                              <a:rPr lang="en-US" sz="1600" dirty="0">
+                              <a:rPr lang="en-US" sz="1600" i="0" dirty="0">
                                 <a:solidFill>
                                   <a:srgbClr val="C00000"/>
                                 </a:solidFill>
@@ -14106,7 +8316,7 @@
                             <m:sSub>
                               <m:sSubPr>
                                 <m:ctrlPr>
-                                  <a:rPr lang="en-US" sz="1600" i="1">
+                                  <a:rPr lang="en-US" sz="1600" b="1" i="0">
                                     <a:solidFill>
                                       <a:srgbClr val="C00000"/>
                                     </a:solidFill>
@@ -14181,7 +8391,7 @@
                             <m:sSub>
                               <m:sSubPr>
                                 <m:ctrlPr>
-                                  <a:rPr lang="en-US" sz="1600" i="1">
+                                  <a:rPr lang="en-US" sz="1600" b="1" i="0">
                                     <a:solidFill>
                                       <a:srgbClr val="C00000"/>
                                     </a:solidFill>
@@ -14494,14 +8704,11 @@
                       <a:pPr/>
                       <a14:m>
                         <m:oMathPara xmlns:m="http://schemas.openxmlformats.org/officeDocument/2006/math">
-                          <m:oMathParaPr>
-                            <m:jc m:val="centerGroup"/>
-                          </m:oMathParaPr>
-                          <m:oMath xmlns:m="http://schemas.openxmlformats.org/officeDocument/2006/math">
+                          <m:oMath>
                             <m:sSub>
                               <m:sSubPr>
                                 <m:ctrlPr>
-                                  <a:rPr lang="en-US" sz="1600" b="0" i="1" smtClean="0">
+                                  <a:rPr lang="en-US" sz="1600" b="0" i="0" smtClean="0">
                                     <a:solidFill>
                                       <a:schemeClr val="tx1"/>
                                     </a:solidFill>
@@ -14536,7 +8743,7 @@
                                 <m:sSub>
                                   <m:sSubPr>
                                     <m:ctrlPr>
-                                      <a:rPr lang="en-US" sz="1600" b="0" i="1" smtClean="0">
+                                      <a:rPr lang="en-US" sz="1600" b="1" i="0" smtClean="0">
                                         <a:solidFill>
                                           <a:schemeClr val="tx1"/>
                                         </a:solidFill>
@@ -14579,7 +8786,7 @@
                                 <m:sSub>
                                   <m:sSubPr>
                                     <m:ctrlPr>
-                                      <a:rPr lang="en-US" sz="1600" b="0" i="1" smtClean="0">
+                                      <a:rPr lang="en-US" sz="1600" b="1" i="0" smtClean="0">
                                         <a:solidFill>
                                           <a:schemeClr val="tx1"/>
                                         </a:solidFill>
@@ -14696,7 +8903,7 @@
                                         </a:solidFill>
                                         <a:latin typeface="Cambria Math" panose="02040503050406030204" pitchFamily="18" charset="0"/>
                                       </a:rPr>
-                                      <m:t>h</m:t>
+                                      <m:t>ℎ</m:t>
                                     </m:r>
                                   </m:e>
                                   <m:sub>
@@ -14732,7 +8939,7 @@
                                 <m:sSub>
                                   <m:sSubPr>
                                     <m:ctrlPr>
-                                      <a:rPr lang="en-US" sz="1600" b="0" i="1" smtClean="0">
+                                      <a:rPr lang="en-US" sz="1600" b="1" i="0" smtClean="0">
                                         <a:solidFill>
                                           <a:schemeClr val="tx1"/>
                                         </a:solidFill>
@@ -14775,7 +8982,7 @@
                                 <m:sSub>
                                   <m:sSubPr>
                                     <m:ctrlPr>
-                                      <a:rPr lang="en-US" sz="1600" b="0" i="1" smtClean="0">
+                                      <a:rPr lang="en-US" sz="1600" b="1" i="0" smtClean="0">
                                         <a:solidFill>
                                           <a:schemeClr val="tx1"/>
                                         </a:solidFill>
@@ -14952,7 +9159,7 @@
                           <m:sSub>
                             <m:sSubPr>
                               <m:ctrlPr>
-                                <a:rPr lang="en-US" sz="1600" b="0" i="1" smtClean="0">
+                                <a:rPr lang="en-US" sz="1600" b="1" i="0" smtClean="0">
                                   <a:solidFill>
                                     <a:schemeClr val="tx1"/>
                                   </a:solidFill>
@@ -15004,7 +9211,7 @@
                           <m:sSub>
                             <m:sSubPr>
                               <m:ctrlPr>
-                                <a:rPr lang="en-US" sz="1600" b="0" i="1" smtClean="0">
+                                <a:rPr lang="en-US" sz="1600" b="1" i="0" smtClean="0">
                                   <a:solidFill>
                                     <a:schemeClr val="tx1"/>
                                   </a:solidFill>
@@ -15063,7 +9270,7 @@
                                   </a:solidFill>
                                   <a:latin typeface="Cambria Math" panose="02040503050406030204" pitchFamily="18" charset="0"/>
                                 </a:rPr>
-                                <m:t>h</m:t>
+                                <m:t>ℎ</m:t>
                               </m:r>
                             </m:e>
                             <m:sub>
@@ -15081,7 +9288,7 @@
                           <m:sSub>
                             <m:sSubPr>
                               <m:ctrlPr>
-                                <a:rPr lang="en-US" sz="1600" b="0" i="1" smtClean="0">
+                                <a:rPr lang="en-US" sz="1600" b="1" i="0" smtClean="0">
                                   <a:solidFill>
                                     <a:schemeClr val="tx1"/>
                                   </a:solidFill>
@@ -15136,7 +9343,7 @@
                               <m:sSub>
                                 <m:sSubPr>
                                   <m:ctrlPr>
-                                    <a:rPr lang="en-US" sz="1600" b="0" i="1" smtClean="0">
+                                    <a:rPr lang="en-US" sz="1600" b="1" i="0" smtClean="0">
                                       <a:solidFill>
                                         <a:schemeClr val="tx1"/>
                                       </a:solidFill>
@@ -15179,7 +9386,7 @@
                               <m:sSub>
                                 <m:sSubPr>
                                   <m:ctrlPr>
-                                    <a:rPr lang="en-US" sz="1600" b="0" i="1" smtClean="0">
+                                    <a:rPr lang="en-US" sz="1600" b="1" i="0" smtClean="0">
                                       <a:solidFill>
                                         <a:schemeClr val="tx1"/>
                                       </a:solidFill>
@@ -15393,14 +9600,11 @@
                     <a:pPr/>
                     <a14:m>
                       <m:oMathPara xmlns:m="http://schemas.openxmlformats.org/officeDocument/2006/math">
-                        <m:oMathParaPr>
-                          <m:jc m:val="centerGroup"/>
-                        </m:oMathParaPr>
-                        <m:oMath xmlns:m="http://schemas.openxmlformats.org/officeDocument/2006/math">
+                        <m:oMath>
                           <m:sSub>
                             <m:sSubPr>
                               <m:ctrlPr>
-                                <a:rPr lang="en-US" sz="1600" i="1" smtClean="0">
+                                <a:rPr lang="en-US" sz="1600" b="1" i="0">
                                   <a:solidFill>
                                     <a:schemeClr val="tx1"/>
                                   </a:solidFill>
@@ -15497,7 +9701,7 @@
                           <m:sSub>
                             <m:sSubPr>
                               <m:ctrlPr>
-                                <a:rPr lang="en-US" sz="1600" b="0" i="1" smtClean="0">
+                                <a:rPr lang="en-US" sz="1600" b="1" i="0" smtClean="0">
                                   <a:solidFill>
                                     <a:schemeClr val="tx1"/>
                                   </a:solidFill>
@@ -15540,7 +9744,7 @@
                           <m:sSub>
                             <m:sSubPr>
                               <m:ctrlPr>
-                                <a:rPr lang="en-US" sz="1600" i="1">
+                                <a:rPr lang="en-US" sz="1600" b="1" i="0">
                                   <a:solidFill>
                                     <a:schemeClr val="tx1"/>
                                   </a:solidFill>
@@ -15664,18 +9868,14 @@
                   <a:pPr/>
                   <a14:m>
                     <m:oMathPara xmlns:m="http://schemas.openxmlformats.org/officeDocument/2006/math">
-                      <m:oMathParaPr>
-                        <m:jc m:val="centerGroup"/>
-                      </m:oMathParaPr>
-                      <m:oMath xmlns:m="http://schemas.openxmlformats.org/officeDocument/2006/math">
+                      <m:oMath>
                         <m:sSub>
                           <m:sSubPr>
                             <m:ctrlPr>
-                              <a:rPr lang="en-US" i="1" smtClean="0">
+                              <a:rPr lang="en-US" i="0" dirty="0">
                                 <a:solidFill>
                                   <a:schemeClr val="tx1"/>
                                 </a:solidFill>
-                                <a:latin typeface="Cambria Math" panose="02040503050406030204" pitchFamily="18" charset="0"/>
                               </a:rPr>
                             </m:ctrlPr>
                           </m:sSubPr>
@@ -15684,7 +9884,7 @@
                               <m:rPr>
                                 <m:nor/>
                               </m:rPr>
-                              <a:rPr lang="en-US" dirty="0">
+                              <a:rPr lang="en-US" i="0" dirty="0">
                                 <a:solidFill>
                                   <a:schemeClr val="tx1"/>
                                 </a:solidFill>
@@ -15706,7 +9906,7 @@
                               <m:rPr>
                                 <m:nor/>
                               </m:rPr>
-                              <a:rPr lang="en-US" b="1" dirty="0">
+                              <a:rPr lang="en-US" b="1" i="0" dirty="0">
                                 <a:solidFill>
                                   <a:schemeClr val="tx1"/>
                                 </a:solidFill>
@@ -15717,7 +9917,7 @@
                               <m:rPr>
                                 <m:nor/>
                               </m:rPr>
-                              <a:rPr lang="en-US" dirty="0">
+                              <a:rPr lang="en-US" i="0" dirty="0">
                                 <a:solidFill>
                                   <a:schemeClr val="tx1"/>
                                 </a:solidFill>
@@ -16072,7 +10272,7 @@
           <a:p>
             <a:fld id="{9D580103-CD61-AF4C-B67C-BF8A1AB491E9}" type="datetime1">
               <a:rPr lang="en-US" smtClean="0"/>
-              <a:t>4/22/26</a:t>
+              <a:t>8/13/26</a:t>
             </a:fld>
             <a:endParaRPr lang="en-US"/>
           </a:p>
@@ -16276,7 +10476,7 @@
           <a:p>
             <a:fld id="{9CA26273-4F87-644D-8CED-41217D8C66B9}" type="datetime1">
               <a:rPr lang="en-US" smtClean="0"/>
-              <a:t>4/22/26</a:t>
+              <a:t>8/13/26</a:t>
             </a:fld>
             <a:endParaRPr lang="en-US"/>
           </a:p>
@@ -16616,7 +10816,7 @@
           <a:p>
             <a:fld id="{650635D9-1D5D-BC4E-8551-4FE15E8D1459}" type="datetime1">
               <a:rPr lang="en-US" smtClean="0"/>
-              <a:t>4/22/26</a:t>
+              <a:t>8/13/26</a:t>
             </a:fld>
             <a:endParaRPr/>
           </a:p>
@@ -16894,7 +11094,7 @@
           <a:p>
             <a:fld id="{D693848E-1525-3C46-9499-46A214D6206B}" type="datetime1">
               <a:rPr lang="en-US" smtClean="0"/>
-              <a:t>4/22/26</a:t>
+              <a:t>8/13/26</a:t>
             </a:fld>
             <a:endParaRPr/>
           </a:p>
@@ -17712,7 +11912,7 @@
           <a:p>
             <a:fld id="{094B6438-28CC-EC44-B281-A90D33CAFFDD}" type="datetime1">
               <a:rPr lang="en-US" smtClean="0"/>
-              <a:t>4/22/26</a:t>
+              <a:t>8/13/26</a:t>
             </a:fld>
             <a:endParaRPr/>
           </a:p>
@@ -17993,7 +12193,7 @@
           <a:p>
             <a:fld id="{F1699C1A-6C15-E041-83C3-8475B6AFA5CF}" type="datetime1">
               <a:rPr lang="en-US" smtClean="0"/>
-              <a:t>4/22/26</a:t>
+              <a:t>8/13/26</a:t>
             </a:fld>
             <a:endParaRPr/>
           </a:p>
@@ -18308,7 +12508,7 @@
           <a:p>
             <a:fld id="{245AB8F4-45BF-7E4D-AA0E-E9585B4DE57F}" type="datetime1">
               <a:rPr lang="en-US" smtClean="0"/>
-              <a:t>4/22/26</a:t>
+              <a:t>8/13/26</a:t>
             </a:fld>
             <a:endParaRPr lang="en-US"/>
           </a:p>
@@ -18424,7 +12624,7 @@
           <a:p>
             <a:fld id="{A30A4140-ABF4-A549-8FD7-A820D7DDF69B}" type="datetime1">
               <a:rPr lang="en-US" smtClean="0"/>
-              <a:t>4/22/26</a:t>
+              <a:t>8/13/26</a:t>
             </a:fld>
             <a:endParaRPr lang="en-US"/>
           </a:p>
@@ -20730,7 +14930,7 @@
           <a:p>
             <a:fld id="{9BD721B5-442F-C54A-B8AF-D08766D0B479}" type="datetime1">
               <a:rPr lang="en-US" smtClean="0"/>
-              <a:t>4/22/26</a:t>
+              <a:t>8/13/26</a:t>
             </a:fld>
             <a:endParaRPr lang="en-US"/>
           </a:p>
@@ -20875,7 +15075,7 @@
           <a:p>
             <a:fld id="{025555FD-E808-8948-A2B0-D34ED128FA57}" type="datetime1">
               <a:rPr lang="en-US" smtClean="0"/>
-              <a:t>4/22/26</a:t>
+              <a:t>8/13/26</a:t>
             </a:fld>
             <a:endParaRPr lang="en-US"/>
           </a:p>
@@ -21261,7 +15461,7 @@
           <a:p>
             <a:fld id="{EE83ACA9-62B3-0748-B0C5-37116511C39A}" type="datetime1">
               <a:rPr lang="en-US" smtClean="0"/>
-              <a:t>4/22/26</a:t>
+              <a:t>8/13/26</a:t>
             </a:fld>
             <a:endParaRPr lang="en-US" dirty="0"/>
           </a:p>
@@ -21645,7 +15845,7 @@
                           <m:accPr>
                             <m:chr m:val="̅"/>
                             <m:ctrlPr>
-                              <a:rPr lang="en-US" sz="1800" b="0" i="1" smtClean="0">
+                              <a:rPr lang="en-US" sz="1800" b="1" i="1">
                                 <a:latin typeface="Cambria Math" panose="02040503050406030204" pitchFamily="18" charset="0"/>
                               </a:rPr>
                             </m:ctrlPr>
@@ -21699,7 +15899,7 @@
                           <m:accPr>
                             <m:chr m:val="̅"/>
                             <m:ctrlPr>
-                              <a:rPr lang="en-US" sz="1800" i="1">
+                              <a:rPr lang="en-US" sz="1800" b="1" i="1">
                                 <a:latin typeface="Cambria Math" panose="02040503050406030204" pitchFamily="18" charset="0"/>
                               </a:rPr>
                             </m:ctrlPr>
@@ -21748,7 +15948,7 @@
                           <m:accPr>
                             <m:chr m:val="̅"/>
                             <m:ctrlPr>
-                              <a:rPr lang="en-US" sz="1800" i="1">
+                              <a:rPr lang="en-US" sz="1800" b="1" i="1" smtClean="0">
                                 <a:latin typeface="Cambria Math" panose="02040503050406030204" pitchFamily="18" charset="0"/>
                               </a:rPr>
                             </m:ctrlPr>
@@ -21782,7 +15982,7 @@
                       <m:rPr>
                         <m:nor/>
                       </m:rPr>
-                      <a:rPr lang="en-US" sz="1800" dirty="0">
+                      <a:rPr lang="en-US" sz="1800" i="0" dirty="0">
                         <a:latin typeface="Source Sans Pro" panose="020B0503030403020204" pitchFamily="34" charset="0"/>
                         <a:ea typeface="Source Sans Pro" panose="020B0503030403020204" pitchFamily="34" charset="0"/>
                       </a:rPr>
@@ -21801,7 +16001,7 @@
                           <m:accPr>
                             <m:chr m:val="̅"/>
                             <m:ctrlPr>
-                              <a:rPr lang="en-US" sz="1800" i="1">
+                              <a:rPr lang="en-US" sz="1800" b="1" i="1" smtClean="0">
                                 <a:latin typeface="Cambria Math" panose="02040503050406030204" pitchFamily="18" charset="0"/>
                               </a:rPr>
                             </m:ctrlPr>
@@ -21881,10 +16081,7 @@
                 </a:pPr>
                 <a14:m>
                   <m:oMathPara xmlns:m="http://schemas.openxmlformats.org/officeDocument/2006/math">
-                    <m:oMathParaPr>
-                      <m:jc m:val="centerGroup"/>
-                    </m:oMathParaPr>
-                    <m:oMath xmlns:m="http://schemas.openxmlformats.org/officeDocument/2006/math">
+                    <m:oMath>
                       <m:r>
                         <a:rPr lang="en-US" sz="1400" i="1">
                           <a:latin typeface="Cambria Math" panose="02040503050406030204" pitchFamily="18" charset="0"/>
@@ -21919,7 +16116,7 @@
                       <m:sSup>
                         <m:sSupPr>
                           <m:ctrlPr>
-                            <a:rPr lang="en-US" sz="1400" b="0" i="1" smtClean="0">
+                            <a:rPr lang="en-US" sz="1400" i="1" smtClean="0">
                               <a:latin typeface="Cambria Math" panose="02040503050406030204" pitchFamily="18" charset="0"/>
                             </a:rPr>
                           </m:ctrlPr>
@@ -21928,7 +16125,7 @@
                           <m:d>
                             <m:dPr>
                               <m:ctrlPr>
-                                <a:rPr lang="en-US" sz="1400" i="1" smtClean="0">
+                                <a:rPr lang="en-US" sz="1400" b="0" i="1" smtClean="0">
                                   <a:latin typeface="Cambria Math" panose="02040503050406030204" pitchFamily="18" charset="0"/>
                                 </a:rPr>
                               </m:ctrlPr>
@@ -21937,7 +16134,7 @@
                               <m:sSub>
                                 <m:sSubPr>
                                   <m:ctrlPr>
-                                    <a:rPr lang="en-US" sz="1400" b="0" i="1" smtClean="0">
+                                    <a:rPr lang="en-US" sz="1400" b="1" i="1" smtClean="0">
                                       <a:latin typeface="Cambria Math" panose="02040503050406030204" pitchFamily="18" charset="0"/>
                                     </a:rPr>
                                   </m:ctrlPr>
@@ -21968,7 +16165,7 @@
                               <m:sSubSup>
                                 <m:sSubSupPr>
                                   <m:ctrlPr>
-                                    <a:rPr lang="en-US" sz="1400" b="0" i="1" smtClean="0">
+                                    <a:rPr lang="en-US" sz="1400" i="1" smtClean="0">
                                       <a:latin typeface="Cambria Math" panose="02040503050406030204" pitchFamily="18" charset="0"/>
                                     </a:rPr>
                                   </m:ctrlPr>
@@ -21978,7 +16175,7 @@
                                     <m:accPr>
                                       <m:chr m:val="̅"/>
                                       <m:ctrlPr>
-                                        <a:rPr lang="en-US" sz="1400" i="1" smtClean="0">
+                                        <a:rPr lang="en-US" sz="1400" b="1" i="1" smtClean="0">
                                           <a:latin typeface="Cambria Math" panose="02040503050406030204" pitchFamily="18" charset="0"/>
                                         </a:rPr>
                                       </m:ctrlPr>
@@ -22055,7 +16252,7 @@
                       <m:sSub>
                         <m:sSubPr>
                           <m:ctrlPr>
-                            <a:rPr lang="en-US" sz="1400" i="1">
+                            <a:rPr lang="en-US" sz="1400" b="1" i="1">
                               <a:latin typeface="Cambria Math" panose="02040503050406030204" pitchFamily="18" charset="0"/>
                             </a:rPr>
                           </m:ctrlPr>
@@ -22096,7 +16293,7 @@
                             <m:accPr>
                               <m:chr m:val="̅"/>
                               <m:ctrlPr>
-                                <a:rPr lang="en-US" sz="1400" i="1">
+                                <a:rPr lang="en-US" sz="1400" b="1" i="1">
                                   <a:latin typeface="Cambria Math" panose="02040503050406030204" pitchFamily="18" charset="0"/>
                                 </a:rPr>
                               </m:ctrlPr>
@@ -22202,7 +16399,7 @@
                           <m:sSup>
                             <m:sSupPr>
                               <m:ctrlPr>
-                                <a:rPr lang="en-US" sz="1400" b="0" i="1" smtClean="0">
+                                <a:rPr lang="en-US" sz="1400" i="1">
                                   <a:latin typeface="Cambria Math" panose="02040503050406030204" pitchFamily="18" charset="0"/>
                                 </a:rPr>
                               </m:ctrlPr>
@@ -22220,7 +16417,7 @@
                                   <m:sSub>
                                     <m:sSubPr>
                                       <m:ctrlPr>
-                                        <a:rPr lang="en-US" sz="1400" i="1">
+                                        <a:rPr lang="en-US" sz="1400" b="1" i="1">
                                           <a:latin typeface="Cambria Math" panose="02040503050406030204" pitchFamily="18" charset="0"/>
                                         </a:rPr>
                                       </m:ctrlPr>
@@ -22261,7 +16458,7 @@
                                         <m:accPr>
                                           <m:chr m:val="̅"/>
                                           <m:ctrlPr>
-                                            <a:rPr lang="en-US" sz="1400" i="1">
+                                            <a:rPr lang="en-US" sz="1400" b="1" i="1">
                                               <a:latin typeface="Cambria Math" panose="02040503050406030204" pitchFamily="18" charset="0"/>
                                             </a:rPr>
                                           </m:ctrlPr>
@@ -22313,7 +16510,7 @@
                           <m:sSub>
                             <m:sSubPr>
                               <m:ctrlPr>
-                                <a:rPr lang="en-US" sz="1400" i="1">
+                                <a:rPr lang="en-US" sz="1400" b="1" i="1">
                                   <a:latin typeface="Cambria Math" panose="02040503050406030204" pitchFamily="18" charset="0"/>
                                 </a:rPr>
                               </m:ctrlPr>
@@ -22354,7 +16551,7 @@
                                 <m:accPr>
                                   <m:chr m:val="̅"/>
                                   <m:ctrlPr>
-                                    <a:rPr lang="en-US" sz="1400" i="1">
+                                    <a:rPr lang="en-US" sz="1400" b="1" i="1">
                                       <a:latin typeface="Cambria Math" panose="02040503050406030204" pitchFamily="18" charset="0"/>
                                     </a:rPr>
                                   </m:ctrlPr>
@@ -22388,7 +16585,7 @@
                           <m:sSup>
                             <m:sSupPr>
                               <m:ctrlPr>
-                                <a:rPr lang="en-US" sz="1400" b="0" i="1" smtClean="0">
+                                <a:rPr lang="en-US" sz="1400" b="0" i="1">
                                   <a:latin typeface="Cambria Math" panose="02040503050406030204" pitchFamily="18" charset="0"/>
                                 </a:rPr>
                               </m:ctrlPr>
@@ -22397,7 +16594,7 @@
                               <m:d>
                                 <m:dPr>
                                   <m:ctrlPr>
-                                    <a:rPr lang="en-US" sz="1400" b="0" i="1">
+                                    <a:rPr lang="en-US" sz="1400" i="1">
                                       <a:latin typeface="Cambria Math" panose="02040503050406030204" pitchFamily="18" charset="0"/>
                                     </a:rPr>
                                   </m:ctrlPr>
@@ -22406,7 +16603,7 @@
                                   <m:sSub>
                                     <m:sSubPr>
                                       <m:ctrlPr>
-                                        <a:rPr lang="en-US" sz="1400" i="1">
+                                        <a:rPr lang="en-US" sz="1400" b="1" i="1" smtClean="0">
                                           <a:latin typeface="Cambria Math" panose="02040503050406030204" pitchFamily="18" charset="0"/>
                                         </a:rPr>
                                       </m:ctrlPr>
@@ -22437,7 +16634,7 @@
                                   <m:sSubSup>
                                     <m:sSubSupPr>
                                       <m:ctrlPr>
-                                        <a:rPr lang="en-US" sz="1400" i="1">
+                                        <a:rPr lang="en-US" sz="1400" i="1" smtClean="0">
                                           <a:latin typeface="Cambria Math" panose="02040503050406030204" pitchFamily="18" charset="0"/>
                                         </a:rPr>
                                       </m:ctrlPr>
@@ -22447,7 +16644,7 @@
                                         <m:accPr>
                                           <m:chr m:val="̅"/>
                                           <m:ctrlPr>
-                                            <a:rPr lang="en-US" sz="1400" i="1" smtClean="0">
+                                            <a:rPr lang="en-US" sz="1400" b="1" i="1" smtClean="0">
                                               <a:latin typeface="Cambria Math" panose="02040503050406030204" pitchFamily="18" charset="0"/>
                                             </a:rPr>
                                           </m:ctrlPr>
@@ -22499,7 +16696,7 @@
                           <m:sSub>
                             <m:sSubPr>
                               <m:ctrlPr>
-                                <a:rPr lang="en-US" sz="1400" i="1">
+                                <a:rPr lang="en-US" sz="1400" b="1" i="1" smtClean="0">
                                   <a:latin typeface="Cambria Math" panose="02040503050406030204" pitchFamily="18" charset="0"/>
                                 </a:rPr>
                               </m:ctrlPr>
@@ -22540,7 +16737,7 @@
                                 <m:accPr>
                                   <m:chr m:val="̅"/>
                                   <m:ctrlPr>
-                                    <a:rPr lang="en-US" sz="1400" i="1">
+                                    <a:rPr lang="en-US" sz="1400" b="1" i="1" smtClean="0">
                                       <a:latin typeface="Cambria Math" panose="02040503050406030204" pitchFamily="18" charset="0"/>
                                     </a:rPr>
                                   </m:ctrlPr>
@@ -22575,7 +16772,7 @@
                             <m:rPr>
                               <m:nor/>
                             </m:rPr>
-                            <a:rPr lang="en-US" sz="1400" dirty="0">
+                            <a:rPr lang="en-US" sz="1400" i="0" dirty="0">
                               <a:latin typeface="Source Sans Pro" panose="020B0503030403020204" pitchFamily="34" charset="0"/>
                               <a:ea typeface="Source Sans Pro" panose="020B0503030403020204" pitchFamily="34" charset="0"/>
                             </a:rPr>
@@ -22627,7 +16824,7 @@
                     <m:sSub>
                       <m:sSubPr>
                         <m:ctrlPr>
-                          <a:rPr lang="en-US" sz="1800" b="0" i="1" smtClean="0">
+                          <a:rPr lang="en-US" sz="1800" b="1" i="1" smtClean="0">
                             <a:latin typeface="Cambria Math" panose="02040503050406030204" pitchFamily="18" charset="0"/>
                           </a:rPr>
                         </m:ctrlPr>
@@ -22658,7 +16855,7 @@
                     <m:sSub>
                       <m:sSubPr>
                         <m:ctrlPr>
-                          <a:rPr lang="en-US" sz="1800" i="1">
+                          <a:rPr lang="en-US" sz="1800" b="1" i="1">
                             <a:latin typeface="Cambria Math" panose="02040503050406030204" pitchFamily="18" charset="0"/>
                           </a:rPr>
                         </m:ctrlPr>
@@ -22699,7 +16896,7 @@
                           <m:accPr>
                             <m:chr m:val="̅"/>
                             <m:ctrlPr>
-                              <a:rPr lang="en-US" sz="1800" i="1">
+                              <a:rPr lang="en-US" sz="1800" b="1" i="1">
                                 <a:latin typeface="Cambria Math" panose="02040503050406030204" pitchFamily="18" charset="0"/>
                               </a:rPr>
                             </m:ctrlPr>
@@ -22738,7 +16935,7 @@
                     <m:sSub>
                       <m:sSubPr>
                         <m:ctrlPr>
-                          <a:rPr lang="en-US" sz="1800" i="1">
+                          <a:rPr lang="en-US" sz="1800" b="0" i="1" smtClean="0">
                             <a:latin typeface="Cambria Math" panose="02040503050406030204" pitchFamily="18" charset="0"/>
                           </a:rPr>
                         </m:ctrlPr>
@@ -22753,7 +16950,7 @@
                         <m:sSub>
                           <m:sSubPr>
                             <m:ctrlPr>
-                              <a:rPr lang="en-US" sz="1800" b="0" i="1" smtClean="0">
+                              <a:rPr lang="en-US" sz="1800" b="1" i="1" smtClean="0">
                                 <a:latin typeface="Cambria Math" panose="02040503050406030204" pitchFamily="18" charset="0"/>
                               </a:rPr>
                             </m:ctrlPr>
@@ -22816,7 +17013,7 @@
                           <m:accPr>
                             <m:chr m:val="̅"/>
                             <m:ctrlPr>
-                              <a:rPr lang="en-US" sz="1800" i="1">
+                              <a:rPr lang="en-US" sz="1800" b="1" i="1" smtClean="0">
                                 <a:latin typeface="Cambria Math" panose="02040503050406030204" pitchFamily="18" charset="0"/>
                               </a:rPr>
                             </m:ctrlPr>
@@ -22978,7 +17175,7 @@
           <a:p>
             <a:fld id="{430C8A40-7C8B-A64A-881A-9B9197E36B97}" type="datetime1">
               <a:rPr lang="en-US" smtClean="0"/>
-              <a:t>4/22/26</a:t>
+              <a:t>8/13/26</a:t>
             </a:fld>
             <a:endParaRPr lang="en-US" dirty="0"/>
           </a:p>
@@ -23158,7 +17355,7 @@
                           <m:accPr>
                             <m:chr m:val="̅"/>
                             <m:ctrlPr>
-                              <a:rPr lang="en-US" sz="1800" i="1">
+                              <a:rPr lang="en-US" sz="1800" b="1" i="1">
                                 <a:latin typeface="Cambria Math" panose="02040503050406030204" pitchFamily="18" charset="0"/>
                               </a:rPr>
                             </m:ctrlPr>
@@ -23212,7 +17409,7 @@
                           <m:accPr>
                             <m:chr m:val="̅"/>
                             <m:ctrlPr>
-                              <a:rPr lang="en-US" sz="1800" i="1">
+                              <a:rPr lang="en-US" sz="1800" b="1" i="1">
                                 <a:latin typeface="Cambria Math" panose="02040503050406030204" pitchFamily="18" charset="0"/>
                               </a:rPr>
                             </m:ctrlPr>
@@ -23261,7 +17458,7 @@
                           <m:accPr>
                             <m:chr m:val="̅"/>
                             <m:ctrlPr>
-                              <a:rPr lang="en-US" sz="1800" i="1">
+                              <a:rPr lang="en-US" sz="1800" b="1" i="1">
                                 <a:latin typeface="Cambria Math" panose="02040503050406030204" pitchFamily="18" charset="0"/>
                               </a:rPr>
                             </m:ctrlPr>
@@ -23295,7 +17492,7 @@
                       <m:rPr>
                         <m:nor/>
                       </m:rPr>
-                      <a:rPr lang="en-US" sz="1800" dirty="0">
+                      <a:rPr lang="en-US" sz="1800" i="0" dirty="0">
                         <a:latin typeface="Source Sans Pro" panose="020B0503030403020204" pitchFamily="34" charset="0"/>
                         <a:ea typeface="Source Sans Pro" panose="020B0503030403020204" pitchFamily="34" charset="0"/>
                       </a:rPr>
@@ -23314,7 +17511,7 @@
                           <m:accPr>
                             <m:chr m:val="̅"/>
                             <m:ctrlPr>
-                              <a:rPr lang="en-US" sz="1800" i="1">
+                              <a:rPr lang="en-US" sz="1800" b="1" i="1">
                                 <a:latin typeface="Cambria Math" panose="02040503050406030204" pitchFamily="18" charset="0"/>
                               </a:rPr>
                             </m:ctrlPr>
@@ -23377,14 +17574,11 @@
                 </a:pPr>
                 <a14:m>
                   <m:oMathPara xmlns:m="http://schemas.openxmlformats.org/officeDocument/2006/math">
-                    <m:oMathParaPr>
-                      <m:jc m:val="centerGroup"/>
-                    </m:oMathParaPr>
-                    <m:oMath xmlns:m="http://schemas.openxmlformats.org/officeDocument/2006/math">
+                    <m:oMath>
                       <m:sSub>
                         <m:sSubPr>
                           <m:ctrlPr>
-                            <a:rPr lang="en-US" sz="1800" b="0" i="1" smtClean="0">
+                            <a:rPr lang="en-US" sz="1800" b="1" i="1" smtClean="0">
                               <a:latin typeface="Cambria Math" panose="02040503050406030204" pitchFamily="18" charset="0"/>
                             </a:rPr>
                           </m:ctrlPr>
@@ -23433,7 +17627,7 @@
                       <m:sSub>
                         <m:sSubPr>
                           <m:ctrlPr>
-                            <a:rPr lang="en-US" sz="1800" b="0" i="1" smtClean="0">
+                            <a:rPr lang="en-US" sz="1800" b="1" i="1" smtClean="0">
                               <a:latin typeface="Cambria Math" panose="02040503050406030204" pitchFamily="18" charset="0"/>
                             </a:rPr>
                           </m:ctrlPr>
@@ -23464,7 +17658,7 @@
                       <m:sSub>
                         <m:sSubPr>
                           <m:ctrlPr>
-                            <a:rPr lang="en-US" sz="1800" b="0" i="1" smtClean="0">
+                            <a:rPr lang="en-US" sz="1800" b="1" i="1" smtClean="0">
                               <a:latin typeface="Cambria Math" panose="02040503050406030204" pitchFamily="18" charset="0"/>
                             </a:rPr>
                           </m:ctrlPr>
@@ -23539,7 +17733,7 @@
                     <m:sSub>
                       <m:sSubPr>
                         <m:ctrlPr>
-                          <a:rPr lang="en-US" sz="1800" i="1">
+                          <a:rPr lang="en-US" sz="1800" b="1" i="1">
                             <a:latin typeface="Cambria Math" panose="02040503050406030204" pitchFamily="18" charset="0"/>
                           </a:rPr>
                         </m:ctrlPr>
@@ -23607,7 +17801,7 @@
                     <m:sSub>
                       <m:sSubPr>
                         <m:ctrlPr>
-                          <a:rPr lang="en-US" sz="1800" i="1">
+                          <a:rPr lang="en-US" sz="1800" b="1" i="1">
                             <a:latin typeface="Cambria Math" panose="02040503050406030204" pitchFamily="18" charset="0"/>
                           </a:rPr>
                         </m:ctrlPr>
@@ -23669,7 +17863,7 @@
                     <m:sSub>
                       <m:sSubPr>
                         <m:ctrlPr>
-                          <a:rPr lang="en-US" sz="1800" i="1">
+                          <a:rPr lang="en-US" sz="1800" b="1" i="1">
                             <a:latin typeface="Cambria Math" panose="02040503050406030204" pitchFamily="18" charset="0"/>
                           </a:rPr>
                         </m:ctrlPr>
@@ -23995,14 +18189,11 @@
                     <a:pPr/>
                     <a14:m>
                       <m:oMathPara xmlns:m="http://schemas.openxmlformats.org/officeDocument/2006/math">
-                        <m:oMathParaPr>
-                          <m:jc m:val="centerGroup"/>
-                        </m:oMathParaPr>
-                        <m:oMath xmlns:m="http://schemas.openxmlformats.org/officeDocument/2006/math">
+                        <m:oMath>
                           <m:sSub>
                             <m:sSubPr>
                               <m:ctrlPr>
-                                <a:rPr lang="en-US" sz="1600" i="1" smtClean="0">
+                                <a:rPr lang="en-US" sz="1600" b="0" i="1" smtClean="0">
                                   <a:latin typeface="Cambria Math" panose="02040503050406030204" pitchFamily="18" charset="0"/>
                                 </a:rPr>
                               </m:ctrlPr>
@@ -24110,14 +18301,11 @@
                     <a:pPr/>
                     <a14:m>
                       <m:oMathPara xmlns:m="http://schemas.openxmlformats.org/officeDocument/2006/math">
-                        <m:oMathParaPr>
-                          <m:jc m:val="centerGroup"/>
-                        </m:oMathParaPr>
-                        <m:oMath xmlns:m="http://schemas.openxmlformats.org/officeDocument/2006/math">
+                        <m:oMath>
                           <m:sSub>
                             <m:sSubPr>
                               <m:ctrlPr>
-                                <a:rPr lang="en-US" sz="1600" i="1" smtClean="0">
+                                <a:rPr lang="en-US" sz="1600" b="0" i="1" smtClean="0">
                                   <a:latin typeface="Cambria Math" panose="02040503050406030204" pitchFamily="18" charset="0"/>
                                 </a:rPr>
                               </m:ctrlPr>
@@ -24225,10 +18413,7 @@
                     <a:pPr/>
                     <a14:m>
                       <m:oMathPara xmlns:m="http://schemas.openxmlformats.org/officeDocument/2006/math">
-                        <m:oMathParaPr>
-                          <m:jc m:val="centerGroup"/>
-                        </m:oMathParaPr>
-                        <m:oMath xmlns:m="http://schemas.openxmlformats.org/officeDocument/2006/math">
+                        <m:oMath>
                           <m:r>
                             <a:rPr lang="en-US" sz="1600" b="0" i="1" smtClean="0">
                               <a:latin typeface="Cambria Math" panose="02040503050406030204" pitchFamily="18" charset="0"/>
@@ -24238,7 +18423,7 @@
                           <m:sSub>
                             <m:sSubPr>
                               <m:ctrlPr>
-                                <a:rPr lang="en-US" sz="1600" b="0" i="1" smtClean="0">
+                                <a:rPr lang="en-US" sz="1600" b="1" i="1">
                                   <a:latin typeface="Cambria Math" panose="02040503050406030204" pitchFamily="18" charset="0"/>
                                 </a:rPr>
                               </m:ctrlPr>
@@ -24346,10 +18531,7 @@
                     <a:pPr/>
                     <a14:m>
                       <m:oMathPara xmlns:m="http://schemas.openxmlformats.org/officeDocument/2006/math">
-                        <m:oMathParaPr>
-                          <m:jc m:val="centerGroup"/>
-                        </m:oMathParaPr>
-                        <m:oMath xmlns:m="http://schemas.openxmlformats.org/officeDocument/2006/math">
+                        <m:oMath>
                           <m:r>
                             <a:rPr lang="en-US" sz="1600" b="0" i="1" smtClean="0">
                               <a:latin typeface="Cambria Math" panose="02040503050406030204" pitchFamily="18" charset="0"/>
@@ -24359,7 +18541,7 @@
                           <m:sSub>
                             <m:sSubPr>
                               <m:ctrlPr>
-                                <a:rPr lang="en-US" sz="1600" b="0" i="1" smtClean="0">
+                                <a:rPr lang="en-US" sz="1600" b="1" i="1">
                                   <a:latin typeface="Cambria Math" panose="02040503050406030204" pitchFamily="18" charset="0"/>
                                 </a:rPr>
                               </m:ctrlPr>
@@ -24532,7 +18714,7 @@
           <a:p>
             <a:fld id="{7E094F4E-9667-4D4C-8F3B-C0838B242E73}" type="datetime1">
               <a:rPr lang="en-US" smtClean="0"/>
-              <a:t>4/22/26</a:t>
+              <a:t>8/13/26</a:t>
             </a:fld>
             <a:endParaRPr lang="en-US"/>
           </a:p>
@@ -24790,7 +18972,7 @@
           <a:p>
             <a:fld id="{19C253F8-6378-934F-8904-30DA2DC6392E}" type="datetime1">
               <a:rPr lang="en-US" smtClean="0"/>
-              <a:t>4/22/26</a:t>
+              <a:t>8/13/26</a:t>
             </a:fld>
             <a:endParaRPr lang="en-US"/>
           </a:p>
@@ -24970,7 +19152,7 @@
                           <m:accPr>
                             <m:chr m:val="̅"/>
                             <m:ctrlPr>
-                              <a:rPr lang="en-US" sz="1800" i="1">
+                              <a:rPr lang="en-US" sz="1800" b="1" i="1">
                                 <a:latin typeface="Cambria Math" panose="02040503050406030204" pitchFamily="18" charset="0"/>
                               </a:rPr>
                             </m:ctrlPr>
@@ -25024,7 +19206,7 @@
                           <m:accPr>
                             <m:chr m:val="̅"/>
                             <m:ctrlPr>
-                              <a:rPr lang="en-US" sz="1800" i="1">
+                              <a:rPr lang="en-US" sz="1800" b="1" i="1">
                                 <a:latin typeface="Cambria Math" panose="02040503050406030204" pitchFamily="18" charset="0"/>
                               </a:rPr>
                             </m:ctrlPr>
@@ -25073,7 +19255,7 @@
                           <m:accPr>
                             <m:chr m:val="̅"/>
                             <m:ctrlPr>
-                              <a:rPr lang="en-US" sz="1800" i="1">
+                              <a:rPr lang="en-US" sz="1800" b="1" i="1">
                                 <a:latin typeface="Cambria Math" panose="02040503050406030204" pitchFamily="18" charset="0"/>
                               </a:rPr>
                             </m:ctrlPr>
@@ -25107,7 +19289,7 @@
                       <m:rPr>
                         <m:nor/>
                       </m:rPr>
-                      <a:rPr lang="en-US" sz="1800" dirty="0">
+                      <a:rPr lang="en-US" sz="1800" i="0" dirty="0">
                         <a:latin typeface="Source Sans Pro" panose="020B0503030403020204" pitchFamily="34" charset="0"/>
                         <a:ea typeface="Source Sans Pro" panose="020B0503030403020204" pitchFamily="34" charset="0"/>
                       </a:rPr>
@@ -25126,7 +19308,7 @@
                           <m:accPr>
                             <m:chr m:val="̅"/>
                             <m:ctrlPr>
-                              <a:rPr lang="en-US" sz="1800" i="1">
+                              <a:rPr lang="en-US" sz="1800" b="1" i="1">
                                 <a:latin typeface="Cambria Math" panose="02040503050406030204" pitchFamily="18" charset="0"/>
                               </a:rPr>
                             </m:ctrlPr>
@@ -25300,7 +19482,7 @@
           <a:p>
             <a:fld id="{924844B7-5B0C-D345-8D2F-23DAF4A23556}" type="datetime1">
               <a:rPr lang="en-US" smtClean="0"/>
-              <a:t>4/22/26</a:t>
+              <a:t>8/13/26</a:t>
             </a:fld>
             <a:endParaRPr lang="en-US"/>
           </a:p>
@@ -25931,6 +20113,21 @@
 </file>
 
 <file path=customXml/item1.xml><?xml version="1.0" encoding="utf-8"?>
+<p:properties xmlns:p="http://schemas.microsoft.com/office/2006/metadata/properties" xmlns:xsi="http://www.w3.org/2001/XMLSchema-instance" xmlns:pc="http://schemas.microsoft.com/office/infopath/2007/PartnerControls">
+  <documentManagement/>
+</p:properties>
+</file>
+
+<file path=customXml/item2.xml><?xml version="1.0" encoding="utf-8"?>
+<?mso-contentType ?>
+<FormTemplates xmlns="http://schemas.microsoft.com/sharepoint/v3/contenttype/forms">
+  <Display>DocumentLibraryForm</Display>
+  <Edit>DocumentLibraryForm</Edit>
+  <New>DocumentLibraryForm</New>
+</FormTemplates>
+</file>
+
+<file path=customXml/item3.xml><?xml version="1.0" encoding="utf-8"?>
 <ct:contentTypeSchema xmlns:ct="http://schemas.microsoft.com/office/2006/metadata/contentType" xmlns:ma="http://schemas.microsoft.com/office/2006/metadata/properties/metaAttributes" ct:_="" ma:_="" ma:contentTypeName="Document" ma:contentTypeID="0x0101001AFBB6EF975807449194B44213CB1385" ma:contentTypeVersion="5" ma:contentTypeDescription="Create a new document." ma:contentTypeScope="" ma:versionID="6297688411df770d7ba805098bf03ebd">
   <xsd:schema xmlns:xsd="http://www.w3.org/2001/XMLSchema" xmlns:xs="http://www.w3.org/2001/XMLSchema" xmlns:p="http://schemas.microsoft.com/office/2006/metadata/properties" xmlns:ns3="d1af692f-475c-46b5-a87d-a47813ac8995" xmlns:ns4="ec38afac-11fd-4f05-b2a5-9d8ac7fc116b" targetNamespace="http://schemas.microsoft.com/office/2006/metadata/properties" ma:root="true" ma:fieldsID="a8acf1f0a3134d6bce4e4716f1f754da" ns3:_="" ns4:_="">
     <xsd:import namespace="d1af692f-475c-46b5-a87d-a47813ac8995"/>
@@ -26101,22 +20298,32 @@
 </ct:contentTypeSchema>
 </file>
 
-<file path=customXml/item2.xml><?xml version="1.0" encoding="utf-8"?>
-<?mso-contentType ?>
-<FormTemplates xmlns="http://schemas.microsoft.com/sharepoint/v3/contenttype/forms">
-  <Display>DocumentLibraryForm</Display>
-  <Edit>DocumentLibraryForm</Edit>
-  <New>DocumentLibraryForm</New>
-</FormTemplates>
+<file path=customXml/itemProps1.xml><?xml version="1.0" encoding="utf-8"?>
+<ds:datastoreItem xmlns:ds="http://schemas.openxmlformats.org/officeDocument/2006/customXml" ds:itemID="{8CDD998B-DDF4-43A4-8742-5AE47805ED40}">
+  <ds:schemaRefs>
+    <ds:schemaRef ds:uri="http://schemas.microsoft.com/office/2006/documentManagement/types"/>
+    <ds:schemaRef ds:uri="http://purl.org/dc/elements/1.1/"/>
+    <ds:schemaRef ds:uri="http://schemas.microsoft.com/office/2006/metadata/properties"/>
+    <ds:schemaRef ds:uri="http://www.w3.org/XML/1998/namespace"/>
+    <ds:schemaRef ds:uri="http://schemas.microsoft.com/office/infopath/2007/PartnerControls"/>
+    <ds:schemaRef ds:uri="http://purl.org/dc/dcmitype/"/>
+    <ds:schemaRef ds:uri="ec38afac-11fd-4f05-b2a5-9d8ac7fc116b"/>
+    <ds:schemaRef ds:uri="http://schemas.openxmlformats.org/package/2006/metadata/core-properties"/>
+    <ds:schemaRef ds:uri="d1af692f-475c-46b5-a87d-a47813ac8995"/>
+    <ds:schemaRef ds:uri="http://purl.org/dc/terms/"/>
+  </ds:schemaRefs>
+</ds:datastoreItem>
 </file>
 
-<file path=customXml/item3.xml><?xml version="1.0" encoding="utf-8"?>
-<p:properties xmlns:p="http://schemas.microsoft.com/office/2006/metadata/properties" xmlns:xsi="http://www.w3.org/2001/XMLSchema-instance" xmlns:pc="http://schemas.microsoft.com/office/infopath/2007/PartnerControls">
-  <documentManagement/>
-</p:properties>
+<file path=customXml/itemProps2.xml><?xml version="1.0" encoding="utf-8"?>
+<ds:datastoreItem xmlns:ds="http://schemas.openxmlformats.org/officeDocument/2006/customXml" ds:itemID="{47491A99-A98F-4E5B-91C4-75EDF7F9A32A}">
+  <ds:schemaRefs>
+    <ds:schemaRef ds:uri="http://schemas.microsoft.com/sharepoint/v3/contenttype/forms"/>
+  </ds:schemaRefs>
+</ds:datastoreItem>
 </file>
 
-<file path=customXml/itemProps1.xml><?xml version="1.0" encoding="utf-8"?>
+<file path=customXml/itemProps3.xml><?xml version="1.0" encoding="utf-8"?>
 <ds:datastoreItem xmlns:ds="http://schemas.openxmlformats.org/officeDocument/2006/customXml" ds:itemID="{9321C71F-50EC-42A2-9BEA-F0A21830E09E}">
   <ds:schemaRefs>
     <ds:schemaRef ds:uri="d1af692f-475c-46b5-a87d-a47813ac8995"/>
@@ -26133,29 +20340,4 @@
     <ds:schemaRef ds:uri="http://www.w3.org/2001/XMLSchema"/>
   </ds:schemaRefs>
 </ds:datastoreItem>
-</file>
-
-<file path=customXml/itemProps2.xml><?xml version="1.0" encoding="utf-8"?>
-<ds:datastoreItem xmlns:ds="http://schemas.openxmlformats.org/officeDocument/2006/customXml" ds:itemID="{47491A99-A98F-4E5B-91C4-75EDF7F9A32A}">
-  <ds:schemaRefs>
-    <ds:schemaRef ds:uri="http://schemas.microsoft.com/sharepoint/v3/contenttype/forms"/>
-  </ds:schemaRefs>
-</ds:datastoreItem>
-</file>
-
-<file path=customXml/itemProps3.xml><?xml version="1.0" encoding="utf-8"?>
-<ds:datastoreItem xmlns:ds="http://schemas.openxmlformats.org/officeDocument/2006/customXml" ds:itemID="{8CDD998B-DDF4-43A4-8742-5AE47805ED40}">
-  <ds:schemaRefs>
-    <ds:schemaRef ds:uri="d1af692f-475c-46b5-a87d-a47813ac8995"/>
-    <ds:schemaRef ds:uri="ec38afac-11fd-4f05-b2a5-9d8ac7fc116b"/>
-    <ds:schemaRef ds:uri="http://purl.org/dc/dcmitype/"/>
-    <ds:schemaRef ds:uri="http://purl.org/dc/elements/1.1/"/>
-    <ds:schemaRef ds:uri="http://purl.org/dc/terms/"/>
-    <ds:schemaRef ds:uri="http://schemas.microsoft.com/office/2006/documentManagement/types"/>
-    <ds:schemaRef ds:uri="http://schemas.microsoft.com/office/2006/metadata/properties"/>
-    <ds:schemaRef ds:uri="http://schemas.microsoft.com/office/infopath/2007/PartnerControls"/>
-    <ds:schemaRef ds:uri="http://schemas.openxmlformats.org/package/2006/metadata/core-properties"/>
-    <ds:schemaRef ds:uri="http://www.w3.org/XML/1998/namespace"/>
-  </ds:schemaRefs>
-</ds:datastoreItem>
 </file>